--- a/Deliverables/The_Secret_Library_Presentation.pptx
+++ b/Deliverables/The_Secret_Library_Presentation.pptx
@@ -6,17 +6,19 @@
   </p:sldMasterIdLst>
   <p:sldIdLst>
     <p:sldId id="256" r:id="rId7"/>
-    <p:sldId id="257" r:id="rId8"/>
-    <p:sldId id="258" r:id="rId9"/>
-    <p:sldId id="259" r:id="rId10"/>
-    <p:sldId id="260" r:id="rId11"/>
-    <p:sldId id="261" r:id="rId12"/>
-    <p:sldId id="262" r:id="rId13"/>
-    <p:sldId id="263" r:id="rId14"/>
-    <p:sldId id="264" r:id="rId15"/>
-    <p:sldId id="265" r:id="rId16"/>
-    <p:sldId id="266" r:id="rId17"/>
-    <p:sldId id="267" r:id="rId18"/>
+    <p:sldId id="257" r:id="rId9"/>
+    <p:sldId id="258" r:id="rId10"/>
+    <p:sldId id="259" r:id="rId11"/>
+    <p:sldId id="260" r:id="rId12"/>
+    <p:sldId id="261" r:id="rId13"/>
+    <p:sldId id="262" r:id="rId14"/>
+    <p:sldId id="263" r:id="rId15"/>
+    <p:sldId id="264" r:id="rId16"/>
+    <p:sldId id="265" r:id="rId17"/>
+    <p:sldId id="266" r:id="rId18"/>
+    <p:sldId id="267" r:id="rId19"/>
+    <p:sldId id="268" r:id="rId20"/>
+    <p:sldId id="269" r:id="rId21"/>
   </p:sldIdLst>
   <p:sldSz cx="12191695" cy="6858000" type="screen4x3"/>
   <p:notesSz cx="6858000" cy="9144000"/>
@@ -116,6 +118,1336 @@
     </a:lvl9pPr>
   </p:defaultTextStyle>
 </p:presentation>
+</file>
+
+<file path=ppt/notesMasters/notesMaster1.xml><?xml version="1.0" encoding="utf-8"?>
+<p:notesMaster xmlns:a="http://schemas.openxmlformats.org/drawingml/2006/main" xmlns:p="http://schemas.openxmlformats.org/presentationml/2006/main" xmlns:r="http://schemas.openxmlformats.org/officeDocument/2006/relationships">
+  <p:cSld>
+    <p:bg>
+      <p:bgRef idx="1001">
+        <a:schemeClr val="bg1"/>
+      </p:bgRef>
+    </p:bg>
+    <p:spTree>
+      <p:nvGrpSpPr>
+        <p:cNvPr id="1" name=""/>
+        <p:cNvGrpSpPr/>
+        <p:nvPr/>
+      </p:nvGrpSpPr>
+      <p:grpSpPr>
+        <a:xfrm>
+          <a:off x="0" y="0"/>
+          <a:ext cx="0" cy="0"/>
+          <a:chOff x="0" y="0"/>
+          <a:chExt cx="0" cy="0"/>
+        </a:xfrm>
+      </p:grpSpPr>
+      <p:sp>
+        <p:nvSpPr>
+          <p:cNvPr id="2" name="Header Placeholder 1"/>
+          <p:cNvSpPr>
+            <a:spLocks noGrp="1"/>
+          </p:cNvSpPr>
+          <p:nvPr>
+            <p:ph type="hdr" sz="quarter"/>
+          </p:nvPr>
+        </p:nvSpPr>
+        <p:spPr>
+          <a:xfrm>
+            <a:off x="0" y="0"/>
+            <a:ext cx="2971800" cy="457200"/>
+          </a:xfrm>
+          <a:prstGeom prst="rect">
+            <a:avLst/>
+          </a:prstGeom>
+        </p:spPr>
+        <p:txBody>
+          <a:bodyPr vert="horz" lIns="91440" tIns="45720" rIns="91440" bIns="45720" rtlCol="0"/>
+          <a:lstStyle>
+            <a:lvl1pPr algn="l">
+              <a:defRPr sz="1200"/>
+            </a:lvl1pPr>
+          </a:lstStyle>
+          <a:p>
+            <a:endParaRPr lang="en-US"/>
+          </a:p>
+        </p:txBody>
+      </p:sp>
+      <p:sp>
+        <p:nvSpPr>
+          <p:cNvPr id="3" name="Date Placeholder 2"/>
+          <p:cNvSpPr>
+            <a:spLocks noGrp="1"/>
+          </p:cNvSpPr>
+          <p:nvPr>
+            <p:ph type="dt" idx="1"/>
+          </p:nvPr>
+        </p:nvSpPr>
+        <p:spPr>
+          <a:xfrm>
+            <a:off x="3884613" y="0"/>
+            <a:ext cx="2971800" cy="457200"/>
+          </a:xfrm>
+          <a:prstGeom prst="rect">
+            <a:avLst/>
+          </a:prstGeom>
+        </p:spPr>
+        <p:txBody>
+          <a:bodyPr vert="horz" lIns="91440" tIns="45720" rIns="91440" bIns="45720" rtlCol="0"/>
+          <a:lstStyle>
+            <a:lvl1pPr algn="r">
+              <a:defRPr sz="1200"/>
+            </a:lvl1pPr>
+          </a:lstStyle>
+          <a:p>
+            <a:fld id="{0F89C1C7-3DCD-1040-A9CF-14679D8B5DDD}" type="datetimeFigureOut">
+              <a:rPr lang="en-US" smtClean="0"/>
+              <a:t>10/17/16</a:t>
+            </a:fld>
+            <a:endParaRPr lang="en-US"/>
+          </a:p>
+        </p:txBody>
+      </p:sp>
+      <p:sp>
+        <p:nvSpPr>
+          <p:cNvPr id="4" name="Slide Image Placeholder 3"/>
+          <p:cNvSpPr>
+            <a:spLocks noGrp="1" noRot="1" noChangeAspect="1"/>
+          </p:cNvSpPr>
+          <p:nvPr>
+            <p:ph type="sldImg" idx="2"/>
+          </p:nvPr>
+        </p:nvSpPr>
+        <p:spPr>
+          <a:xfrm>
+            <a:off x="1143000" y="685800"/>
+            <a:ext cx="4572000" cy="3429000"/>
+          </a:xfrm>
+          <a:prstGeom prst="rect">
+            <a:avLst/>
+          </a:prstGeom>
+          <a:noFill/>
+          <a:ln w="12700">
+            <a:solidFill>
+              <a:prstClr val="black"/>
+            </a:solidFill>
+          </a:ln>
+        </p:spPr>
+        <p:txBody>
+          <a:bodyPr vert="horz" lIns="91440" tIns="45720" rIns="91440" bIns="45720" rtlCol="0" anchor="ctr"/>
+          <a:lstStyle/>
+          <a:p>
+            <a:endParaRPr lang="en-US"/>
+          </a:p>
+        </p:txBody>
+      </p:sp>
+      <p:sp>
+        <p:nvSpPr>
+          <p:cNvPr id="5" name="Notes Placeholder 4"/>
+          <p:cNvSpPr>
+            <a:spLocks noGrp="1"/>
+          </p:cNvSpPr>
+          <p:nvPr>
+            <p:ph type="body" sz="quarter" idx="3"/>
+          </p:nvPr>
+        </p:nvSpPr>
+        <p:spPr>
+          <a:xfrm>
+            <a:off x="685800" y="4343400"/>
+            <a:ext cx="5486400" cy="4114800"/>
+          </a:xfrm>
+          <a:prstGeom prst="rect">
+            <a:avLst/>
+          </a:prstGeom>
+        </p:spPr>
+        <p:txBody>
+          <a:bodyPr vert="horz" lIns="91440" tIns="45720" rIns="91440" bIns="45720" rtlCol="0"/>
+          <a:lstStyle/>
+          <a:p>
+            <a:pPr lvl="0"/>
+            <a:r>
+              <a:rPr lang="en-US" smtClean="0"/>
+              <a:t>Click to edit Master text styles</a:t>
+            </a:r>
+          </a:p>
+          <a:p>
+            <a:pPr lvl="1"/>
+            <a:r>
+              <a:rPr lang="en-US" smtClean="0"/>
+              <a:t>Second level</a:t>
+            </a:r>
+          </a:p>
+          <a:p>
+            <a:pPr lvl="2"/>
+            <a:r>
+              <a:rPr lang="en-US" smtClean="0"/>
+              <a:t>Third level</a:t>
+            </a:r>
+          </a:p>
+          <a:p>
+            <a:pPr lvl="3"/>
+            <a:r>
+              <a:rPr lang="en-US" smtClean="0"/>
+              <a:t>Fourth level</a:t>
+            </a:r>
+          </a:p>
+          <a:p>
+            <a:pPr lvl="4"/>
+            <a:r>
+              <a:rPr lang="en-US" smtClean="0"/>
+              <a:t>Fifth level</a:t>
+            </a:r>
+            <a:endParaRPr lang="en-US"/>
+          </a:p>
+        </p:txBody>
+      </p:sp>
+      <p:sp>
+        <p:nvSpPr>
+          <p:cNvPr id="6" name="Footer Placeholder 5"/>
+          <p:cNvSpPr>
+            <a:spLocks noGrp="1"/>
+          </p:cNvSpPr>
+          <p:nvPr>
+            <p:ph type="ftr" sz="quarter" idx="4"/>
+          </p:nvPr>
+        </p:nvSpPr>
+        <p:spPr>
+          <a:xfrm>
+            <a:off x="0" y="8685213"/>
+            <a:ext cx="2971800" cy="457200"/>
+          </a:xfrm>
+          <a:prstGeom prst="rect">
+            <a:avLst/>
+          </a:prstGeom>
+        </p:spPr>
+        <p:txBody>
+          <a:bodyPr vert="horz" lIns="91440" tIns="45720" rIns="91440" bIns="45720" rtlCol="0" anchor="b"/>
+          <a:lstStyle>
+            <a:lvl1pPr algn="l">
+              <a:defRPr sz="1200"/>
+            </a:lvl1pPr>
+          </a:lstStyle>
+          <a:p>
+            <a:endParaRPr lang="en-US"/>
+          </a:p>
+        </p:txBody>
+      </p:sp>
+      <p:sp>
+        <p:nvSpPr>
+          <p:cNvPr id="7" name="Slide Number Placeholder 6"/>
+          <p:cNvSpPr>
+            <a:spLocks noGrp="1"/>
+          </p:cNvSpPr>
+          <p:nvPr>
+            <p:ph type="sldNum" sz="quarter" idx="5"/>
+          </p:nvPr>
+        </p:nvSpPr>
+        <p:spPr>
+          <a:xfrm>
+            <a:off x="3884613" y="8685213"/>
+            <a:ext cx="2971800" cy="457200"/>
+          </a:xfrm>
+          <a:prstGeom prst="rect">
+            <a:avLst/>
+          </a:prstGeom>
+        </p:spPr>
+        <p:txBody>
+          <a:bodyPr vert="horz" lIns="91440" tIns="45720" rIns="91440" bIns="45720" rtlCol="0" anchor="b"/>
+          <a:lstStyle>
+            <a:lvl1pPr algn="r">
+              <a:defRPr sz="1200"/>
+            </a:lvl1pPr>
+          </a:lstStyle>
+          <a:p>
+            <a:fld id="{BB5E49A5-4136-284D-997B-48E1D791AD67}" type="slidenum">
+              <a:rPr lang="en-US" smtClean="0"/>
+              <a:t>‹#›</a:t>
+            </a:fld>
+            <a:endParaRPr lang="en-US"/>
+          </a:p>
+        </p:txBody>
+      </p:sp>
+    </p:spTree>
+    <p:extLst>
+      <p:ext uri="{BB962C8B-B14F-4D97-AF65-F5344CB8AC3E}">
+        <p14:creationId xmlns:p14="http://schemas.microsoft.com/office/powerpoint/2010/main" val="2623252185"/>
+      </p:ext>
+    </p:extLst>
+  </p:cSld>
+  <p:clrMap bg1="lt1" tx1="dk1" bg2="lt2" tx2="dk2" accent1="accent1" accent2="accent2" accent3="accent3" accent4="accent4" accent5="accent5" accent6="accent6" hlink="hlink" folHlink="folHlink"/>
+  <p:notesStyle>
+    <a:lvl1pPr marL="0" algn="l" defTabSz="457200" rtl="0" eaLnBrk="1" latinLnBrk="0" hangingPunct="1">
+      <a:defRPr sz="1200" kern="1200">
+        <a:solidFill>
+          <a:schemeClr val="tx1"/>
+        </a:solidFill>
+        <a:latin typeface="+mn-lt"/>
+        <a:ea typeface="+mn-ea"/>
+        <a:cs typeface="+mn-cs"/>
+      </a:defRPr>
+    </a:lvl1pPr>
+    <a:lvl2pPr marL="457200" algn="l" defTabSz="457200" rtl="0" eaLnBrk="1" latinLnBrk="0" hangingPunct="1">
+      <a:defRPr sz="1200" kern="1200">
+        <a:solidFill>
+          <a:schemeClr val="tx1"/>
+        </a:solidFill>
+        <a:latin typeface="+mn-lt"/>
+        <a:ea typeface="+mn-ea"/>
+        <a:cs typeface="+mn-cs"/>
+      </a:defRPr>
+    </a:lvl2pPr>
+    <a:lvl3pPr marL="914400" algn="l" defTabSz="457200" rtl="0" eaLnBrk="1" latinLnBrk="0" hangingPunct="1">
+      <a:defRPr sz="1200" kern="1200">
+        <a:solidFill>
+          <a:schemeClr val="tx1"/>
+        </a:solidFill>
+        <a:latin typeface="+mn-lt"/>
+        <a:ea typeface="+mn-ea"/>
+        <a:cs typeface="+mn-cs"/>
+      </a:defRPr>
+    </a:lvl3pPr>
+    <a:lvl4pPr marL="1371600" algn="l" defTabSz="457200" rtl="0" eaLnBrk="1" latinLnBrk="0" hangingPunct="1">
+      <a:defRPr sz="1200" kern="1200">
+        <a:solidFill>
+          <a:schemeClr val="tx1"/>
+        </a:solidFill>
+        <a:latin typeface="+mn-lt"/>
+        <a:ea typeface="+mn-ea"/>
+        <a:cs typeface="+mn-cs"/>
+      </a:defRPr>
+    </a:lvl4pPr>
+    <a:lvl5pPr marL="1828800" algn="l" defTabSz="457200" rtl="0" eaLnBrk="1" latinLnBrk="0" hangingPunct="1">
+      <a:defRPr sz="1200" kern="1200">
+        <a:solidFill>
+          <a:schemeClr val="tx1"/>
+        </a:solidFill>
+        <a:latin typeface="+mn-lt"/>
+        <a:ea typeface="+mn-ea"/>
+        <a:cs typeface="+mn-cs"/>
+      </a:defRPr>
+    </a:lvl5pPr>
+    <a:lvl6pPr marL="2286000" algn="l" defTabSz="457200" rtl="0" eaLnBrk="1" latinLnBrk="0" hangingPunct="1">
+      <a:defRPr sz="1200" kern="1200">
+        <a:solidFill>
+          <a:schemeClr val="tx1"/>
+        </a:solidFill>
+        <a:latin typeface="+mn-lt"/>
+        <a:ea typeface="+mn-ea"/>
+        <a:cs typeface="+mn-cs"/>
+      </a:defRPr>
+    </a:lvl6pPr>
+    <a:lvl7pPr marL="2743200" algn="l" defTabSz="457200" rtl="0" eaLnBrk="1" latinLnBrk="0" hangingPunct="1">
+      <a:defRPr sz="1200" kern="1200">
+        <a:solidFill>
+          <a:schemeClr val="tx1"/>
+        </a:solidFill>
+        <a:latin typeface="+mn-lt"/>
+        <a:ea typeface="+mn-ea"/>
+        <a:cs typeface="+mn-cs"/>
+      </a:defRPr>
+    </a:lvl7pPr>
+    <a:lvl8pPr marL="3200400" algn="l" defTabSz="457200" rtl="0" eaLnBrk="1" latinLnBrk="0" hangingPunct="1">
+      <a:defRPr sz="1200" kern="1200">
+        <a:solidFill>
+          <a:schemeClr val="tx1"/>
+        </a:solidFill>
+        <a:latin typeface="+mn-lt"/>
+        <a:ea typeface="+mn-ea"/>
+        <a:cs typeface="+mn-cs"/>
+      </a:defRPr>
+    </a:lvl8pPr>
+    <a:lvl9pPr marL="3657600" algn="l" defTabSz="457200" rtl="0" eaLnBrk="1" latinLnBrk="0" hangingPunct="1">
+      <a:defRPr sz="1200" kern="1200">
+        <a:solidFill>
+          <a:schemeClr val="tx1"/>
+        </a:solidFill>
+        <a:latin typeface="+mn-lt"/>
+        <a:ea typeface="+mn-ea"/>
+        <a:cs typeface="+mn-cs"/>
+      </a:defRPr>
+    </a:lvl9pPr>
+  </p:notesStyle>
+</p:notesMaster>
+</file>
+
+<file path=ppt/notesSlides/notesSlide1.xml><?xml version="1.0" encoding="utf-8"?>
+<p:notes xmlns:a="http://schemas.openxmlformats.org/drawingml/2006/main" xmlns:p="http://schemas.openxmlformats.org/presentationml/2006/main" xmlns:r="http://schemas.openxmlformats.org/officeDocument/2006/relationships">
+  <p:cSld>
+    <p:spTree>
+      <p:nvGrpSpPr>
+        <p:cNvPr id="1" name=""/>
+        <p:cNvGrpSpPr/>
+        <p:nvPr/>
+      </p:nvGrpSpPr>
+      <p:grpSpPr>
+        <a:xfrm>
+          <a:off x="0" y="0"/>
+          <a:ext cx="0" cy="0"/>
+          <a:chOff x="0" y="0"/>
+          <a:chExt cx="0" cy="0"/>
+        </a:xfrm>
+      </p:grpSpPr>
+      <p:sp>
+        <p:nvSpPr>
+          <p:cNvPr id="2" name="Slide Image Placeholder 1"/>
+          <p:cNvSpPr>
+            <a:spLocks noGrp="1"/>
+          </p:cNvSpPr>
+          <p:nvPr>
+            <p:ph type="sldImg" idx="2"/>
+          </p:nvPr>
+        </p:nvSpPr>
+        <p:spPr/>
+      </p:sp>
+      <p:sp>
+        <p:nvSpPr>
+          <p:cNvPr id="3" name="Notes Placeholder 2"/>
+          <p:cNvSpPr>
+            <a:spLocks noGrp="1"/>
+          </p:cNvSpPr>
+          <p:nvPr>
+            <p:ph type="body" idx="3" sz="quarter"/>
+          </p:nvPr>
+        </p:nvSpPr>
+        <p:spPr/>
+        <p:txBody>
+          <a:bodyPr/>
+          <a:lstStyle/>
+          <a:p>
+            <a:r>
+              <a:t>Καλησπέρα σας. Παρουσιάζω την απαλλακτική εργασία μου για το μάθημα Ευφυή Εικονικά Περιβάλλοντα και Ανάπτυξη Παιχνιδιών με τίτλο 'The Secret Library'. Πρόκειται για ένα πλήρες 3D Escape Room ανεπτυγμένο στη Godot Engine 4.</a:t>
+            </a:r>
+          </a:p>
+        </p:txBody>
+      </p:sp>
+      <p:sp>
+        <p:nvSpPr>
+          <p:cNvPr id="4" name="Slide Number Placeholder 3"/>
+          <p:cNvSpPr>
+            <a:spLocks noGrp="1"/>
+          </p:cNvSpPr>
+          <p:nvPr>
+            <p:ph type="sldNum" idx="5" sz="quarter"/>
+          </p:nvPr>
+        </p:nvSpPr>
+        <p:spPr/>
+      </p:sp>
+    </p:spTree>
+  </p:cSld>
+  <p:clrMapOvr>
+    <a:masterClrMapping/>
+  </p:clrMapOvr>
+</p:notes>
+</file>
+
+<file path=ppt/notesSlides/notesSlide10.xml><?xml version="1.0" encoding="utf-8"?>
+<p:notes xmlns:a="http://schemas.openxmlformats.org/drawingml/2006/main" xmlns:p="http://schemas.openxmlformats.org/presentationml/2006/main" xmlns:r="http://schemas.openxmlformats.org/officeDocument/2006/relationships">
+  <p:cSld>
+    <p:spTree>
+      <p:nvGrpSpPr>
+        <p:cNvPr id="1" name=""/>
+        <p:cNvGrpSpPr/>
+        <p:nvPr/>
+      </p:nvGrpSpPr>
+      <p:grpSpPr>
+        <a:xfrm>
+          <a:off x="0" y="0"/>
+          <a:ext cx="0" cy="0"/>
+          <a:chOff x="0" y="0"/>
+          <a:chExt cx="0" cy="0"/>
+        </a:xfrm>
+      </p:grpSpPr>
+      <p:sp>
+        <p:nvSpPr>
+          <p:cNvPr id="2" name="Slide Image Placeholder 1"/>
+          <p:cNvSpPr>
+            <a:spLocks noGrp="1"/>
+          </p:cNvSpPr>
+          <p:nvPr>
+            <p:ph type="sldImg" idx="2"/>
+          </p:nvPr>
+        </p:nvSpPr>
+        <p:spPr/>
+      </p:sp>
+      <p:sp>
+        <p:nvSpPr>
+          <p:cNvPr id="3" name="Notes Placeholder 2"/>
+          <p:cNvSpPr>
+            <a:spLocks noGrp="1"/>
+          </p:cNvSpPr>
+          <p:nvPr>
+            <p:ph type="body" idx="3" sz="quarter"/>
+          </p:nvPr>
+        </p:nvSpPr>
+        <p:spPr/>
+        <p:txBody>
+          <a:bodyPr/>
+          <a:lstStyle/>
+          <a:p>
+            <a:r>
+              <a:t>Μετά το τρίγωνο, το οικόσημο ανοίγει τη βιβλιοθήκη-πόρτα. Περνώντας την έξοδο, εμφανίζεται η οθόνη νίκης και μετά από 3 δευτερόλεπτα το παιχνίδι τερματίζει αυτόματα.</a:t>
+            </a:r>
+          </a:p>
+        </p:txBody>
+      </p:sp>
+      <p:sp>
+        <p:nvSpPr>
+          <p:cNvPr id="4" name="Slide Number Placeholder 3"/>
+          <p:cNvSpPr>
+            <a:spLocks noGrp="1"/>
+          </p:cNvSpPr>
+          <p:nvPr>
+            <p:ph type="sldNum" idx="5" sz="quarter"/>
+          </p:nvPr>
+        </p:nvSpPr>
+        <p:spPr/>
+      </p:sp>
+    </p:spTree>
+  </p:cSld>
+  <p:clrMapOvr>
+    <a:masterClrMapping/>
+  </p:clrMapOvr>
+</p:notes>
+</file>
+
+<file path=ppt/notesSlides/notesSlide11.xml><?xml version="1.0" encoding="utf-8"?>
+<p:notes xmlns:a="http://schemas.openxmlformats.org/drawingml/2006/main" xmlns:p="http://schemas.openxmlformats.org/presentationml/2006/main" xmlns:r="http://schemas.openxmlformats.org/officeDocument/2006/relationships">
+  <p:cSld>
+    <p:spTree>
+      <p:nvGrpSpPr>
+        <p:cNvPr id="1" name=""/>
+        <p:cNvGrpSpPr/>
+        <p:nvPr/>
+      </p:nvGrpSpPr>
+      <p:grpSpPr>
+        <a:xfrm>
+          <a:off x="0" y="0"/>
+          <a:ext cx="0" cy="0"/>
+          <a:chOff x="0" y="0"/>
+          <a:chExt cx="0" cy="0"/>
+        </a:xfrm>
+      </p:grpSpPr>
+      <p:sp>
+        <p:nvSpPr>
+          <p:cNvPr id="2" name="Slide Image Placeholder 1"/>
+          <p:cNvSpPr>
+            <a:spLocks noGrp="1"/>
+          </p:cNvSpPr>
+          <p:nvPr>
+            <p:ph type="sldImg" idx="2"/>
+          </p:nvPr>
+        </p:nvSpPr>
+        <p:spPr/>
+      </p:sp>
+      <p:sp>
+        <p:nvSpPr>
+          <p:cNvPr id="3" name="Notes Placeholder 2"/>
+          <p:cNvSpPr>
+            <a:spLocks noGrp="1"/>
+          </p:cNvSpPr>
+          <p:nvPr>
+            <p:ph type="body" idx="3" sz="quarter"/>
+          </p:nvPr>
+        </p:nvSpPr>
+        <p:spPr/>
+        <p:txBody>
+          <a:bodyPr/>
+          <a:lstStyle/>
+          <a:p>
+            <a:r>
+              <a:t>Ιδιαίτερη έμφαση δόθηκε στη βελτιστοποίηση: μηδενικό μέγεθος assets μέσω procedural primitives, batching υλικών για χαμηλά draw calls, και Jolt Physics για ταχύτατες συγκρούσεις.</a:t>
+            </a:r>
+          </a:p>
+        </p:txBody>
+      </p:sp>
+      <p:sp>
+        <p:nvSpPr>
+          <p:cNvPr id="4" name="Slide Number Placeholder 3"/>
+          <p:cNvSpPr>
+            <a:spLocks noGrp="1"/>
+          </p:cNvSpPr>
+          <p:nvPr>
+            <p:ph type="sldNum" idx="5" sz="quarter"/>
+          </p:nvPr>
+        </p:nvSpPr>
+        <p:spPr/>
+      </p:sp>
+    </p:spTree>
+  </p:cSld>
+  <p:clrMapOvr>
+    <a:masterClrMapping/>
+  </p:clrMapOvr>
+</p:notes>
+</file>
+
+<file path=ppt/notesSlides/notesSlide12.xml><?xml version="1.0" encoding="utf-8"?>
+<p:notes xmlns:a="http://schemas.openxmlformats.org/drawingml/2006/main" xmlns:p="http://schemas.openxmlformats.org/presentationml/2006/main" xmlns:r="http://schemas.openxmlformats.org/officeDocument/2006/relationships">
+  <p:cSld>
+    <p:spTree>
+      <p:nvGrpSpPr>
+        <p:cNvPr id="1" name=""/>
+        <p:cNvGrpSpPr/>
+        <p:nvPr/>
+      </p:nvGrpSpPr>
+      <p:grpSpPr>
+        <a:xfrm>
+          <a:off x="0" y="0"/>
+          <a:ext cx="0" cy="0"/>
+          <a:chOff x="0" y="0"/>
+          <a:chExt cx="0" cy="0"/>
+        </a:xfrm>
+      </p:grpSpPr>
+      <p:sp>
+        <p:nvSpPr>
+          <p:cNvPr id="2" name="Slide Image Placeholder 1"/>
+          <p:cNvSpPr>
+            <a:spLocks noGrp="1"/>
+          </p:cNvSpPr>
+          <p:nvPr>
+            <p:ph type="sldImg" idx="2"/>
+          </p:nvPr>
+        </p:nvSpPr>
+        <p:spPr/>
+      </p:sp>
+      <p:sp>
+        <p:nvSpPr>
+          <p:cNvPr id="3" name="Notes Placeholder 2"/>
+          <p:cNvSpPr>
+            <a:spLocks noGrp="1"/>
+          </p:cNvSpPr>
+          <p:nvPr>
+            <p:ph type="body" idx="3" sz="quarter"/>
+          </p:nvPr>
+        </p:nvSpPr>
+        <p:spPr/>
+        <p:txBody>
+          <a:bodyPr/>
+          <a:lstStyle/>
+          <a:p>
+            <a:r>
+              <a:t>Το έργο καλύπτει όλα τα κριτήρια της εκφώνησης: αληθοφάνεια, πληρότητα, κίνηση μέσω tweens, βελτιστοποίηση και άρτια δομημένη λογική γρίφων.</a:t>
+            </a:r>
+          </a:p>
+        </p:txBody>
+      </p:sp>
+      <p:sp>
+        <p:nvSpPr>
+          <p:cNvPr id="4" name="Slide Number Placeholder 3"/>
+          <p:cNvSpPr>
+            <a:spLocks noGrp="1"/>
+          </p:cNvSpPr>
+          <p:nvPr>
+            <p:ph type="sldNum" idx="5" sz="quarter"/>
+          </p:nvPr>
+        </p:nvSpPr>
+        <p:spPr/>
+      </p:sp>
+    </p:spTree>
+  </p:cSld>
+  <p:clrMapOvr>
+    <a:masterClrMapping/>
+  </p:clrMapOvr>
+</p:notes>
+</file>
+
+<file path=ppt/notesSlides/notesSlide13.xml><?xml version="1.0" encoding="utf-8"?>
+<p:notes xmlns:a="http://schemas.openxmlformats.org/drawingml/2006/main" xmlns:p="http://schemas.openxmlformats.org/presentationml/2006/main" xmlns:r="http://schemas.openxmlformats.org/officeDocument/2006/relationships">
+  <p:cSld>
+    <p:spTree>
+      <p:nvGrpSpPr>
+        <p:cNvPr id="1" name=""/>
+        <p:cNvGrpSpPr/>
+        <p:nvPr/>
+      </p:nvGrpSpPr>
+      <p:grpSpPr>
+        <a:xfrm>
+          <a:off x="0" y="0"/>
+          <a:ext cx="0" cy="0"/>
+          <a:chOff x="0" y="0"/>
+          <a:chExt cx="0" cy="0"/>
+        </a:xfrm>
+      </p:grpSpPr>
+      <p:sp>
+        <p:nvSpPr>
+          <p:cNvPr id="2" name="Slide Image Placeholder 1"/>
+          <p:cNvSpPr>
+            <a:spLocks noGrp="1"/>
+          </p:cNvSpPr>
+          <p:nvPr>
+            <p:ph type="sldImg" idx="2"/>
+          </p:nvPr>
+        </p:nvSpPr>
+        <p:spPr/>
+      </p:sp>
+      <p:sp>
+        <p:nvSpPr>
+          <p:cNvPr id="3" name="Notes Placeholder 2"/>
+          <p:cNvSpPr>
+            <a:spLocks noGrp="1"/>
+          </p:cNvSpPr>
+          <p:nvPr>
+            <p:ph type="body" idx="3" sz="quarter"/>
+          </p:nvPr>
+        </p:nvSpPr>
+        <p:spPr/>
+        <p:txBody>
+          <a:bodyPr/>
+          <a:lstStyle/>
+          <a:p>
+            <a:r>
+              <a:t>Ο κώδικας χωρίζεται σε 3 βασικά scripts: player.gd για τον χειρισμό, game_manager.gd για τη λογική των γρίφων και interactable.gd ως βάση διαδραστικότητας.</a:t>
+            </a:r>
+          </a:p>
+        </p:txBody>
+      </p:sp>
+      <p:sp>
+        <p:nvSpPr>
+          <p:cNvPr id="4" name="Slide Number Placeholder 3"/>
+          <p:cNvSpPr>
+            <a:spLocks noGrp="1"/>
+          </p:cNvSpPr>
+          <p:nvPr>
+            <p:ph type="sldNum" idx="5" sz="quarter"/>
+          </p:nvPr>
+        </p:nvSpPr>
+        <p:spPr/>
+      </p:sp>
+    </p:spTree>
+  </p:cSld>
+  <p:clrMapOvr>
+    <a:masterClrMapping/>
+  </p:clrMapOvr>
+</p:notes>
+</file>
+
+<file path=ppt/notesSlides/notesSlide14.xml><?xml version="1.0" encoding="utf-8"?>
+<p:notes xmlns:a="http://schemas.openxmlformats.org/drawingml/2006/main" xmlns:p="http://schemas.openxmlformats.org/presentationml/2006/main" xmlns:r="http://schemas.openxmlformats.org/officeDocument/2006/relationships">
+  <p:cSld>
+    <p:spTree>
+      <p:nvGrpSpPr>
+        <p:cNvPr id="1" name=""/>
+        <p:cNvGrpSpPr/>
+        <p:nvPr/>
+      </p:nvGrpSpPr>
+      <p:grpSpPr>
+        <a:xfrm>
+          <a:off x="0" y="0"/>
+          <a:ext cx="0" cy="0"/>
+          <a:chOff x="0" y="0"/>
+          <a:chExt cx="0" cy="0"/>
+        </a:xfrm>
+      </p:grpSpPr>
+      <p:sp>
+        <p:nvSpPr>
+          <p:cNvPr id="2" name="Slide Image Placeholder 1"/>
+          <p:cNvSpPr>
+            <a:spLocks noGrp="1"/>
+          </p:cNvSpPr>
+          <p:nvPr>
+            <p:ph type="sldImg" idx="2"/>
+          </p:nvPr>
+        </p:nvSpPr>
+        <p:spPr/>
+      </p:sp>
+      <p:sp>
+        <p:nvSpPr>
+          <p:cNvPr id="3" name="Notes Placeholder 2"/>
+          <p:cNvSpPr>
+            <a:spLocks noGrp="1"/>
+          </p:cNvSpPr>
+          <p:nvPr>
+            <p:ph type="body" idx="3" sz="quarter"/>
+          </p:nvPr>
+        </p:nvSpPr>
+        <p:spPr/>
+        <p:txBody>
+          <a:bodyPr/>
+          <a:lstStyle/>
+          <a:p>
+            <a:r>
+              <a:t>Συνοψίζοντας, παραδίδεται ένα πλήρες, λειτουργικό project με όλα τα ζητούμενα έγγραφα και παρουσιάσεις. Ευχαριστώ πολύ για την προσοχή σας!</a:t>
+            </a:r>
+          </a:p>
+        </p:txBody>
+      </p:sp>
+      <p:sp>
+        <p:nvSpPr>
+          <p:cNvPr id="4" name="Slide Number Placeholder 3"/>
+          <p:cNvSpPr>
+            <a:spLocks noGrp="1"/>
+          </p:cNvSpPr>
+          <p:nvPr>
+            <p:ph type="sldNum" idx="5" sz="quarter"/>
+          </p:nvPr>
+        </p:nvSpPr>
+        <p:spPr/>
+      </p:sp>
+    </p:spTree>
+  </p:cSld>
+  <p:clrMapOvr>
+    <a:masterClrMapping/>
+  </p:clrMapOvr>
+</p:notes>
+</file>
+
+<file path=ppt/notesSlides/notesSlide2.xml><?xml version="1.0" encoding="utf-8"?>
+<p:notes xmlns:a="http://schemas.openxmlformats.org/drawingml/2006/main" xmlns:p="http://schemas.openxmlformats.org/presentationml/2006/main" xmlns:r="http://schemas.openxmlformats.org/officeDocument/2006/relationships">
+  <p:cSld>
+    <p:spTree>
+      <p:nvGrpSpPr>
+        <p:cNvPr id="1" name=""/>
+        <p:cNvGrpSpPr/>
+        <p:nvPr/>
+      </p:nvGrpSpPr>
+      <p:grpSpPr>
+        <a:xfrm>
+          <a:off x="0" y="0"/>
+          <a:ext cx="0" cy="0"/>
+          <a:chOff x="0" y="0"/>
+          <a:chExt cx="0" cy="0"/>
+        </a:xfrm>
+      </p:grpSpPr>
+      <p:sp>
+        <p:nvSpPr>
+          <p:cNvPr id="2" name="Slide Image Placeholder 1"/>
+          <p:cNvSpPr>
+            <a:spLocks noGrp="1"/>
+          </p:cNvSpPr>
+          <p:nvPr>
+            <p:ph type="sldImg" idx="2"/>
+          </p:nvPr>
+        </p:nvSpPr>
+        <p:spPr/>
+      </p:sp>
+      <p:sp>
+        <p:nvSpPr>
+          <p:cNvPr id="3" name="Notes Placeholder 2"/>
+          <p:cNvSpPr>
+            <a:spLocks noGrp="1"/>
+          </p:cNvSpPr>
+          <p:nvPr>
+            <p:ph type="body" idx="3" sz="quarter"/>
+          </p:nvPr>
+        </p:nvSpPr>
+        <p:spPr/>
+        <p:txBody>
+          <a:bodyPr/>
+          <a:lstStyle/>
+          <a:p>
+            <a:r>
+              <a:t>Η εργασία εντάσσεται στο Θέμα 5 της εκφώνησης. Στόχος ήταν η δημιουργία ενός πειστικού, ολοκληρωμένου Escape Room με συνεπή λογική γρίφων και υψηλή αισθητική αρτιότητα.</a:t>
+            </a:r>
+          </a:p>
+        </p:txBody>
+      </p:sp>
+      <p:sp>
+        <p:nvSpPr>
+          <p:cNvPr id="4" name="Slide Number Placeholder 3"/>
+          <p:cNvSpPr>
+            <a:spLocks noGrp="1"/>
+          </p:cNvSpPr>
+          <p:nvPr>
+            <p:ph type="sldNum" idx="5" sz="quarter"/>
+          </p:nvPr>
+        </p:nvSpPr>
+        <p:spPr/>
+      </p:sp>
+    </p:spTree>
+  </p:cSld>
+  <p:clrMapOvr>
+    <a:masterClrMapping/>
+  </p:clrMapOvr>
+</p:notes>
+</file>
+
+<file path=ppt/notesSlides/notesSlide3.xml><?xml version="1.0" encoding="utf-8"?>
+<p:notes xmlns:a="http://schemas.openxmlformats.org/drawingml/2006/main" xmlns:p="http://schemas.openxmlformats.org/presentationml/2006/main" xmlns:r="http://schemas.openxmlformats.org/officeDocument/2006/relationships">
+  <p:cSld>
+    <p:spTree>
+      <p:nvGrpSpPr>
+        <p:cNvPr id="1" name=""/>
+        <p:cNvGrpSpPr/>
+        <p:nvPr/>
+      </p:nvGrpSpPr>
+      <p:grpSpPr>
+        <a:xfrm>
+          <a:off x="0" y="0"/>
+          <a:ext cx="0" cy="0"/>
+          <a:chOff x="0" y="0"/>
+          <a:chExt cx="0" cy="0"/>
+        </a:xfrm>
+      </p:grpSpPr>
+      <p:sp>
+        <p:nvSpPr>
+          <p:cNvPr id="2" name="Slide Image Placeholder 1"/>
+          <p:cNvSpPr>
+            <a:spLocks noGrp="1"/>
+          </p:cNvSpPr>
+          <p:nvPr>
+            <p:ph type="sldImg" idx="2"/>
+          </p:nvPr>
+        </p:nvSpPr>
+        <p:spPr/>
+      </p:sp>
+      <p:sp>
+        <p:nvSpPr>
+          <p:cNvPr id="3" name="Notes Placeholder 2"/>
+          <p:cNvSpPr>
+            <a:spLocks noGrp="1"/>
+          </p:cNvSpPr>
+          <p:nvPr>
+            <p:ph type="body" idx="3" sz="quarter"/>
+          </p:nvPr>
+        </p:nvSpPr>
+        <p:spPr/>
+        <p:txBody>
+          <a:bodyPr/>
+          <a:lstStyle/>
+          <a:p>
+            <a:r>
+              <a:t>Χρησιμοποιήθηκε η Godot 4.7 με GDScript. Για τη φυσική αξιοποιήθηκε η μηχανή Jolt Physics που προσφέρει κορυφαία σταθερότητα και απόδοση.</a:t>
+            </a:r>
+          </a:p>
+        </p:txBody>
+      </p:sp>
+      <p:sp>
+        <p:nvSpPr>
+          <p:cNvPr id="4" name="Slide Number Placeholder 3"/>
+          <p:cNvSpPr>
+            <a:spLocks noGrp="1"/>
+          </p:cNvSpPr>
+          <p:nvPr>
+            <p:ph type="sldNum" idx="5" sz="quarter"/>
+          </p:nvPr>
+        </p:nvSpPr>
+        <p:spPr/>
+      </p:sp>
+    </p:spTree>
+  </p:cSld>
+  <p:clrMapOvr>
+    <a:masterClrMapping/>
+  </p:clrMapOvr>
+</p:notes>
+</file>
+
+<file path=ppt/notesSlides/notesSlide4.xml><?xml version="1.0" encoding="utf-8"?>
+<p:notes xmlns:a="http://schemas.openxmlformats.org/drawingml/2006/main" xmlns:p="http://schemas.openxmlformats.org/presentationml/2006/main" xmlns:r="http://schemas.openxmlformats.org/officeDocument/2006/relationships">
+  <p:cSld>
+    <p:spTree>
+      <p:nvGrpSpPr>
+        <p:cNvPr id="1" name=""/>
+        <p:cNvGrpSpPr/>
+        <p:nvPr/>
+      </p:nvGrpSpPr>
+      <p:grpSpPr>
+        <a:xfrm>
+          <a:off x="0" y="0"/>
+          <a:ext cx="0" cy="0"/>
+          <a:chOff x="0" y="0"/>
+          <a:chExt cx="0" cy="0"/>
+        </a:xfrm>
+      </p:grpSpPr>
+      <p:sp>
+        <p:nvSpPr>
+          <p:cNvPr id="2" name="Slide Image Placeholder 1"/>
+          <p:cNvSpPr>
+            <a:spLocks noGrp="1"/>
+          </p:cNvSpPr>
+          <p:nvPr>
+            <p:ph type="sldImg" idx="2"/>
+          </p:nvPr>
+        </p:nvSpPr>
+        <p:spPr/>
+      </p:sp>
+      <p:sp>
+        <p:nvSpPr>
+          <p:cNvPr id="3" name="Notes Placeholder 2"/>
+          <p:cNvSpPr>
+            <a:spLocks noGrp="1"/>
+          </p:cNvSpPr>
+          <p:nvPr>
+            <p:ph type="body" idx="3" sz="quarter"/>
+          </p:nvPr>
+        </p:nvSpPr>
+        <p:spPr/>
+        <p:txBody>
+          <a:bodyPr/>
+          <a:lstStyle/>
+          <a:p>
+            <a:r>
+              <a:t>Η σκηνή main.tscn έχει σχεδιαστεί με απόλυτο διαχωρισμό ευθυνών. Ο GameManager συνδέεται ασύγχρονα με όλα τα αντικείμενα μέσω σημάτων, εξασφαλίζοντας σταθερότητα.</a:t>
+            </a:r>
+          </a:p>
+        </p:txBody>
+      </p:sp>
+      <p:sp>
+        <p:nvSpPr>
+          <p:cNvPr id="4" name="Slide Number Placeholder 3"/>
+          <p:cNvSpPr>
+            <a:spLocks noGrp="1"/>
+          </p:cNvSpPr>
+          <p:nvPr>
+            <p:ph type="sldNum" idx="5" sz="quarter"/>
+          </p:nvPr>
+        </p:nvSpPr>
+        <p:spPr/>
+      </p:sp>
+    </p:spTree>
+  </p:cSld>
+  <p:clrMapOvr>
+    <a:masterClrMapping/>
+  </p:clrMapOvr>
+</p:notes>
+</file>
+
+<file path=ppt/notesSlides/notesSlide5.xml><?xml version="1.0" encoding="utf-8"?>
+<p:notes xmlns:a="http://schemas.openxmlformats.org/drawingml/2006/main" xmlns:p="http://schemas.openxmlformats.org/presentationml/2006/main" xmlns:r="http://schemas.openxmlformats.org/officeDocument/2006/relationships">
+  <p:cSld>
+    <p:spTree>
+      <p:nvGrpSpPr>
+        <p:cNvPr id="1" name=""/>
+        <p:cNvGrpSpPr/>
+        <p:nvPr/>
+      </p:nvGrpSpPr>
+      <p:grpSpPr>
+        <a:xfrm>
+          <a:off x="0" y="0"/>
+          <a:ext cx="0" cy="0"/>
+          <a:chOff x="0" y="0"/>
+          <a:chExt cx="0" cy="0"/>
+        </a:xfrm>
+      </p:grpSpPr>
+      <p:sp>
+        <p:nvSpPr>
+          <p:cNvPr id="2" name="Slide Image Placeholder 1"/>
+          <p:cNvSpPr>
+            <a:spLocks noGrp="1"/>
+          </p:cNvSpPr>
+          <p:nvPr>
+            <p:ph type="sldImg" idx="2"/>
+          </p:nvPr>
+        </p:nvSpPr>
+        <p:spPr/>
+      </p:sp>
+      <p:sp>
+        <p:nvSpPr>
+          <p:cNvPr id="3" name="Notes Placeholder 2"/>
+          <p:cNvSpPr>
+            <a:spLocks noGrp="1"/>
+          </p:cNvSpPr>
+          <p:nvPr>
+            <p:ph type="body" idx="3" sz="quarter"/>
+          </p:nvPr>
+        </p:nvSpPr>
+        <p:spPr/>
+        <p:txBody>
+          <a:bodyPr/>
+          <a:lstStyle/>
+          <a:p>
+            <a:r>
+              <a:t>Στο player.gd υλοποιήσαμε FPS controller με ανεξαρτησία γλώσσας πληκτρολογίου μέσω physical keycodes, ώστε το πλήκτρο E να λειτουργεί πάντα απρόσκοπτα.</a:t>
+            </a:r>
+          </a:p>
+        </p:txBody>
+      </p:sp>
+      <p:sp>
+        <p:nvSpPr>
+          <p:cNvPr id="4" name="Slide Number Placeholder 3"/>
+          <p:cNvSpPr>
+            <a:spLocks noGrp="1"/>
+          </p:cNvSpPr>
+          <p:nvPr>
+            <p:ph type="sldNum" idx="5" sz="quarter"/>
+          </p:nvPr>
+        </p:nvSpPr>
+        <p:spPr/>
+      </p:sp>
+    </p:spTree>
+  </p:cSld>
+  <p:clrMapOvr>
+    <a:masterClrMapping/>
+  </p:clrMapOvr>
+</p:notes>
+</file>
+
+<file path=ppt/notesSlides/notesSlide6.xml><?xml version="1.0" encoding="utf-8"?>
+<p:notes xmlns:a="http://schemas.openxmlformats.org/drawingml/2006/main" xmlns:p="http://schemas.openxmlformats.org/presentationml/2006/main" xmlns:r="http://schemas.openxmlformats.org/officeDocument/2006/relationships">
+  <p:cSld>
+    <p:spTree>
+      <p:nvGrpSpPr>
+        <p:cNvPr id="1" name=""/>
+        <p:cNvGrpSpPr/>
+        <p:nvPr/>
+      </p:nvGrpSpPr>
+      <p:grpSpPr>
+        <a:xfrm>
+          <a:off x="0" y="0"/>
+          <a:ext cx="0" cy="0"/>
+          <a:chOff x="0" y="0"/>
+          <a:chExt cx="0" cy="0"/>
+        </a:xfrm>
+      </p:grpSpPr>
+      <p:sp>
+        <p:nvSpPr>
+          <p:cNvPr id="2" name="Slide Image Placeholder 1"/>
+          <p:cNvSpPr>
+            <a:spLocks noGrp="1"/>
+          </p:cNvSpPr>
+          <p:nvPr>
+            <p:ph type="sldImg" idx="2"/>
+          </p:nvPr>
+        </p:nvSpPr>
+        <p:spPr/>
+      </p:sp>
+      <p:sp>
+        <p:nvSpPr>
+          <p:cNvPr id="3" name="Notes Placeholder 2"/>
+          <p:cNvSpPr>
+            <a:spLocks noGrp="1"/>
+          </p:cNvSpPr>
+          <p:nvPr>
+            <p:ph type="body" idx="3" sz="quarter"/>
+          </p:nvPr>
+        </p:nvSpPr>
+        <p:spPr/>
+        <p:txBody>
+          <a:bodyPr/>
+          <a:lstStyle/>
+          <a:p>
+            <a:r>
+              <a:t>Αντί για ένα στατικό 2D εικονίδιο, σχεδιάσαμε ένα πλήρες τρισδιάστατο χέρι με 5 δάχτυλα που απλώνεται με Tween animation κάθε φορά που ο παίκτης αλληλεπιδρά.</a:t>
+            </a:r>
+          </a:p>
+        </p:txBody>
+      </p:sp>
+      <p:sp>
+        <p:nvSpPr>
+          <p:cNvPr id="4" name="Slide Number Placeholder 3"/>
+          <p:cNvSpPr>
+            <a:spLocks noGrp="1"/>
+          </p:cNvSpPr>
+          <p:nvPr>
+            <p:ph type="sldNum" idx="5" sz="quarter"/>
+          </p:nvPr>
+        </p:nvSpPr>
+        <p:spPr/>
+      </p:sp>
+    </p:spTree>
+  </p:cSld>
+  <p:clrMapOvr>
+    <a:masterClrMapping/>
+  </p:clrMapOvr>
+</p:notes>
+</file>
+
+<file path=ppt/notesSlides/notesSlide7.xml><?xml version="1.0" encoding="utf-8"?>
+<p:notes xmlns:a="http://schemas.openxmlformats.org/drawingml/2006/main" xmlns:p="http://schemas.openxmlformats.org/presentationml/2006/main" xmlns:r="http://schemas.openxmlformats.org/officeDocument/2006/relationships">
+  <p:cSld>
+    <p:spTree>
+      <p:nvGrpSpPr>
+        <p:cNvPr id="1" name=""/>
+        <p:cNvGrpSpPr/>
+        <p:nvPr/>
+      </p:nvGrpSpPr>
+      <p:grpSpPr>
+        <a:xfrm>
+          <a:off x="0" y="0"/>
+          <a:ext cx="0" cy="0"/>
+          <a:chOff x="0" y="0"/>
+          <a:chExt cx="0" cy="0"/>
+        </a:xfrm>
+      </p:grpSpPr>
+      <p:sp>
+        <p:nvSpPr>
+          <p:cNvPr id="2" name="Slide Image Placeholder 1"/>
+          <p:cNvSpPr>
+            <a:spLocks noGrp="1"/>
+          </p:cNvSpPr>
+          <p:nvPr>
+            <p:ph type="sldImg" idx="2"/>
+          </p:nvPr>
+        </p:nvSpPr>
+        <p:spPr/>
+      </p:sp>
+      <p:sp>
+        <p:nvSpPr>
+          <p:cNvPr id="3" name="Notes Placeholder 2"/>
+          <p:cNvSpPr>
+            <a:spLocks noGrp="1"/>
+          </p:cNvSpPr>
+          <p:nvPr>
+            <p:ph type="body" idx="3" sz="quarter"/>
+          </p:nvPr>
+        </p:nvSpPr>
+        <p:spPr/>
+        <p:txBody>
+          <a:bodyPr/>
+          <a:lstStyle/>
+          <a:p>
+            <a:r>
+              <a:t>Η ανίχνευση γίνεται μέσω RayCast3D. Όταν ο παίκτης κοιτάζει κάποιο αντικείμενο, το στόχαστρο μετατρέπεται δυναμικά σε χέρι 🫱 και εμφανίζεται το κατάλληλο μήνυμα προτροπής.</a:t>
+            </a:r>
+          </a:p>
+        </p:txBody>
+      </p:sp>
+      <p:sp>
+        <p:nvSpPr>
+          <p:cNvPr id="4" name="Slide Number Placeholder 3"/>
+          <p:cNvSpPr>
+            <a:spLocks noGrp="1"/>
+          </p:cNvSpPr>
+          <p:nvPr>
+            <p:ph type="sldNum" idx="5" sz="quarter"/>
+          </p:nvPr>
+        </p:nvSpPr>
+        <p:spPr/>
+      </p:sp>
+    </p:spTree>
+  </p:cSld>
+  <p:clrMapOvr>
+    <a:masterClrMapping/>
+  </p:clrMapOvr>
+</p:notes>
+</file>
+
+<file path=ppt/notesSlides/notesSlide8.xml><?xml version="1.0" encoding="utf-8"?>
+<p:notes xmlns:a="http://schemas.openxmlformats.org/drawingml/2006/main" xmlns:p="http://schemas.openxmlformats.org/presentationml/2006/main" xmlns:r="http://schemas.openxmlformats.org/officeDocument/2006/relationships">
+  <p:cSld>
+    <p:spTree>
+      <p:nvGrpSpPr>
+        <p:cNvPr id="1" name=""/>
+        <p:cNvGrpSpPr/>
+        <p:nvPr/>
+      </p:nvGrpSpPr>
+      <p:grpSpPr>
+        <a:xfrm>
+          <a:off x="0" y="0"/>
+          <a:ext cx="0" cy="0"/>
+          <a:chOff x="0" y="0"/>
+          <a:chExt cx="0" cy="0"/>
+        </a:xfrm>
+      </p:grpSpPr>
+      <p:sp>
+        <p:nvSpPr>
+          <p:cNvPr id="2" name="Slide Image Placeholder 1"/>
+          <p:cNvSpPr>
+            <a:spLocks noGrp="1"/>
+          </p:cNvSpPr>
+          <p:nvPr>
+            <p:ph type="sldImg" idx="2"/>
+          </p:nvPr>
+        </p:nvSpPr>
+        <p:spPr/>
+      </p:sp>
+      <p:sp>
+        <p:nvSpPr>
+          <p:cNvPr id="3" name="Notes Placeholder 2"/>
+          <p:cNvSpPr>
+            <a:spLocks noGrp="1"/>
+          </p:cNvSpPr>
+          <p:nvPr>
+            <p:ph type="body" idx="3" sz="quarter"/>
+          </p:nvPr>
+        </p:nvSpPr>
+        <p:spPr/>
+        <p:txBody>
+          <a:bodyPr/>
+          <a:lstStyle/>
+          <a:p>
+            <a:r>
+              <a:t>Στον 1ο γρίφο, ο παίκτης πρέπει να ανακαλύψει τη σειρά τραβήγματος των βιβλίων: Αριστερό, Δεξί, Μεσαίο. Οι φωτεινοί κρύσταλλοι δίνουν άμεσο οπτικό feedback.</a:t>
+            </a:r>
+          </a:p>
+        </p:txBody>
+      </p:sp>
+      <p:sp>
+        <p:nvSpPr>
+          <p:cNvPr id="4" name="Slide Number Placeholder 3"/>
+          <p:cNvSpPr>
+            <a:spLocks noGrp="1"/>
+          </p:cNvSpPr>
+          <p:nvPr>
+            <p:ph type="sldNum" idx="5" sz="quarter"/>
+          </p:nvPr>
+        </p:nvSpPr>
+        <p:spPr/>
+      </p:sp>
+    </p:spTree>
+  </p:cSld>
+  <p:clrMapOvr>
+    <a:masterClrMapping/>
+  </p:clrMapOvr>
+</p:notes>
+</file>
+
+<file path=ppt/notesSlides/notesSlide9.xml><?xml version="1.0" encoding="utf-8"?>
+<p:notes xmlns:a="http://schemas.openxmlformats.org/drawingml/2006/main" xmlns:p="http://schemas.openxmlformats.org/presentationml/2006/main" xmlns:r="http://schemas.openxmlformats.org/officeDocument/2006/relationships">
+  <p:cSld>
+    <p:spTree>
+      <p:nvGrpSpPr>
+        <p:cNvPr id="1" name=""/>
+        <p:cNvGrpSpPr/>
+        <p:nvPr/>
+      </p:nvGrpSpPr>
+      <p:grpSpPr>
+        <a:xfrm>
+          <a:off x="0" y="0"/>
+          <a:ext cx="0" cy="0"/>
+          <a:chOff x="0" y="0"/>
+          <a:chExt cx="0" cy="0"/>
+        </a:xfrm>
+      </p:grpSpPr>
+      <p:sp>
+        <p:nvSpPr>
+          <p:cNvPr id="2" name="Slide Image Placeholder 1"/>
+          <p:cNvSpPr>
+            <a:spLocks noGrp="1"/>
+          </p:cNvSpPr>
+          <p:nvPr>
+            <p:ph type="sldImg" idx="2"/>
+          </p:nvPr>
+        </p:nvSpPr>
+        <p:spPr/>
+      </p:sp>
+      <p:sp>
+        <p:nvSpPr>
+          <p:cNvPr id="3" name="Notes Placeholder 2"/>
+          <p:cNvSpPr>
+            <a:spLocks noGrp="1"/>
+          </p:cNvSpPr>
+          <p:nvPr>
+            <p:ph type="body" idx="3" sz="quarter"/>
+          </p:nvPr>
+        </p:nvSpPr>
+        <p:spPr/>
+        <p:txBody>
+          <a:bodyPr/>
+          <a:lstStyle/>
+          <a:p>
+            <a:r>
+              <a:t>Ο 2ος γρίφος απαιτεί τον σχηματισμό ενός τριγώνου. Αναπτύξαμε έναν έξυπνο αλγόριθμο ταξινόμησης γωνιών που αναγνωρίζει οποιονδήποτε έγκυρο σχηματισμό με συμμετρία 180 μοιρών.</a:t>
+            </a:r>
+          </a:p>
+        </p:txBody>
+      </p:sp>
+      <p:sp>
+        <p:nvSpPr>
+          <p:cNvPr id="4" name="Slide Number Placeholder 3"/>
+          <p:cNvSpPr>
+            <a:spLocks noGrp="1"/>
+          </p:cNvSpPr>
+          <p:nvPr>
+            <p:ph type="sldNum" idx="5" sz="quarter"/>
+          </p:nvPr>
+        </p:nvSpPr>
+        <p:spPr/>
+      </p:sp>
+    </p:spTree>
+  </p:cSld>
+  <p:clrMapOvr>
+    <a:masterClrMapping/>
+  </p:clrMapOvr>
+</p:notes>
 </file>
 
 <file path=ppt/slideLayouts/slideLayout1.xml><?xml version="1.0" encoding="utf-8"?>
@@ -3114,12 +4446,10 @@
             <a:avLst/>
           </a:prstGeom>
           <a:solidFill>
-            <a:srgbClr val="121E31"/>
+            <a:srgbClr val="0B132B"/>
           </a:solidFill>
           <a:ln>
-            <a:solidFill>
-              <a:srgbClr val="121E31"/>
-            </a:solidFill>
+            <a:noFill/>
           </a:ln>
         </p:spPr>
         <p:style>
@@ -3153,7 +4483,7 @@
         <p:spPr>
           <a:xfrm>
             <a:off x="0" y="0"/>
-            <a:ext cx="12191695" cy="137160"/>
+            <a:ext cx="12191695" cy="73152"/>
           </a:xfrm>
           <a:prstGeom prst="rect">
             <a:avLst/>
@@ -3162,9 +4492,7 @@
             <a:srgbClr val="D4AF37"/>
           </a:solidFill>
           <a:ln>
-            <a:solidFill>
-              <a:srgbClr val="D4AF37"/>
-            </a:solidFill>
+            <a:noFill/>
           </a:ln>
         </p:spPr>
         <p:style>
@@ -3191,67 +4519,20 @@
       </p:sp>
       <p:sp>
         <p:nvSpPr>
-          <p:cNvPr id="4" name="TextBox 3"/>
-          <p:cNvSpPr txBox="1"/>
-          <p:nvPr/>
-        </p:nvSpPr>
-        <p:spPr>
-          <a:xfrm>
-            <a:off x="731520" y="457200"/>
-            <a:ext cx="10698480" cy="1280160"/>
-          </a:xfrm>
-          <a:prstGeom prst="rect">
-            <a:avLst/>
-          </a:prstGeom>
-          <a:noFill/>
-        </p:spPr>
-        <p:txBody>
-          <a:bodyPr wrap="square">
-            <a:spAutoFit/>
-          </a:bodyPr>
-          <a:lstStyle/>
-          <a:p>
-            <a:pPr>
-              <a:defRPr sz="3400" b="1">
-                <a:solidFill>
-                  <a:srgbClr val="D4AF37"/>
-                </a:solidFill>
-              </a:defRPr>
-            </a:pPr>
-            <a:r>
-              <a:t>The Secret Library</a:t>
-            </a:r>
-          </a:p>
-          <a:p>
-            <a:pPr>
-              <a:defRPr sz="2000" i="1">
-                <a:solidFill>
-                  <a:srgbClr val="DCE1E6"/>
-                </a:solidFill>
-              </a:defRPr>
-            </a:pPr>
-            <a:r>
-              <a:t>Interactive 3D Escape Room in Godot Engine 4</a:t>
-            </a:r>
-          </a:p>
-        </p:txBody>
-      </p:sp>
-      <p:sp>
-        <p:nvSpPr>
-          <p:cNvPr id="5" name="Rounded Rectangle 4"/>
+          <p:cNvPr id="4" name="Rounded Rectangle 3"/>
           <p:cNvSpPr/>
           <p:nvPr/>
         </p:nvSpPr>
         <p:spPr>
           <a:xfrm>
-            <a:off x="731520" y="1828800"/>
-            <a:ext cx="10698480" cy="4389120"/>
+            <a:off x="1097280" y="731520"/>
+            <a:ext cx="5943600" cy="411480"/>
           </a:xfrm>
           <a:prstGeom prst="roundRect">
             <a:avLst/>
           </a:prstGeom>
           <a:solidFill>
-            <a:srgbClr val="1C2C46"/>
+            <a:srgbClr val="1C2541"/>
           </a:solidFill>
           <a:ln w="12700">
             <a:solidFill>
@@ -3274,81 +4555,190 @@
           </a:fontRef>
         </p:style>
         <p:txBody>
-          <a:bodyPr rtlCol="0" anchor="ctr" wrap="square" lIns="365760" rIns="365760" tIns="274320" bIns="274320"/>
+          <a:bodyPr rtlCol="0" anchor="ctr" wrap="square"/>
           <a:lstStyle/>
           <a:p>
             <a:pPr algn="ctr">
-              <a:spcAft>
-                <a:spcPts val="1200"/>
-              </a:spcAft>
-              <a:defRPr sz="1600">
-                <a:solidFill>
-                  <a:srgbClr val="FFFFFF"/>
-                </a:solidFill>
-              </a:defRPr>
-            </a:pPr>
-            <a:r>
-              <a:t>Μάθημα: Ευφυή Εικονικά Περιβάλλοντα και Ανάπτυξη Παιχνιδιών</a:t>
-            </a:r>
-          </a:p>
-          <a:p>
-            <a:pPr>
-              <a:spcAft>
-                <a:spcPts val="1200"/>
-              </a:spcAft>
-              <a:defRPr sz="1600">
-                <a:solidFill>
-                  <a:srgbClr val="FFFFFF"/>
-                </a:solidFill>
-              </a:defRPr>
-            </a:pPr>
-            <a:r>
-              <a:t>ΠΜΣ: «Προηγμένα Συστήματα Πληροφορικής – Ανάπτυξη Λογισμικού και Τεχνητής Νοημοσύνης»</a:t>
-            </a:r>
-          </a:p>
-          <a:p>
-            <a:pPr>
-              <a:spcAft>
-                <a:spcPts val="1200"/>
-              </a:spcAft>
-              <a:defRPr sz="1600">
-                <a:solidFill>
-                  <a:srgbClr val="DCE1E6"/>
-                </a:solidFill>
-              </a:defRPr>
-            </a:pPr>
-            <a:r>
-              <a:t>Τμήμα Πληροφορικής, Πανεπιστήμιο Πειραιώς</a:t>
-            </a:r>
-          </a:p>
-          <a:p>
-            <a:pPr>
-              <a:spcAft>
-                <a:spcPts val="1200"/>
-              </a:spcAft>
-              <a:defRPr sz="1600">
-                <a:solidFill>
-                  <a:srgbClr val="DCE1E6"/>
-                </a:solidFill>
-              </a:defRPr>
-            </a:pPr>
-            <a:r>
-              <a:t>Διδάσκοντες: Ε. Αλέπης – Μ. Καμήτσιος</a:t>
-            </a:r>
-          </a:p>
-          <a:p>
-            <a:pPr>
-              <a:spcAft>
-                <a:spcPts val="1200"/>
-              </a:spcAft>
-              <a:defRPr sz="1600">
-                <a:solidFill>
-                  <a:srgbClr val="DCE1E6"/>
-                </a:solidFill>
-              </a:defRPr>
-            </a:pPr>
-            <a:r>
-              <a:t>Φοιτητής: Παναγιώτης Μπεκιάρης | Ακαδημαϊκό Έτος 2025–2026</a:t>
+              <a:defRPr sz="1100" b="1">
+                <a:solidFill>
+                  <a:srgbClr val="D4AF37"/>
+                </a:solidFill>
+              </a:defRPr>
+            </a:pPr>
+            <a:r>
+              <a:t>ΠΑΝΕΠΙΣΤΗΜΙΟ ΠΕΙΡΑΙΩΣ | ΤΜΗΜΑ ΠΛΗΡΟΦΟΡΙΚΗΣ</a:t>
+            </a:r>
+          </a:p>
+        </p:txBody>
+      </p:sp>
+      <p:sp>
+        <p:nvSpPr>
+          <p:cNvPr id="5" name="TextBox 4"/>
+          <p:cNvSpPr txBox="1"/>
+          <p:nvPr/>
+        </p:nvSpPr>
+        <p:spPr>
+          <a:xfrm>
+            <a:off x="1097280" y="1280160"/>
+            <a:ext cx="10058400" cy="1280160"/>
+          </a:xfrm>
+          <a:prstGeom prst="rect">
+            <a:avLst/>
+          </a:prstGeom>
+          <a:noFill/>
+        </p:spPr>
+        <p:txBody>
+          <a:bodyPr wrap="square">
+            <a:spAutoFit/>
+          </a:bodyPr>
+          <a:lstStyle/>
+          <a:p>
+            <a:pPr>
+              <a:defRPr sz="4400" b="1">
+                <a:solidFill>
+                  <a:srgbClr val="D4AF37"/>
+                </a:solidFill>
+              </a:defRPr>
+            </a:pPr>
+            <a:r>
+              <a:t>The Secret Library</a:t>
+            </a:r>
+          </a:p>
+        </p:txBody>
+      </p:sp>
+      <p:sp>
+        <p:nvSpPr>
+          <p:cNvPr id="6" name="TextBox 5"/>
+          <p:cNvSpPr txBox="1"/>
+          <p:nvPr/>
+        </p:nvSpPr>
+        <p:spPr>
+          <a:xfrm>
+            <a:off x="1097280" y="2468880"/>
+            <a:ext cx="10058400" cy="731520"/>
+          </a:xfrm>
+          <a:prstGeom prst="rect">
+            <a:avLst/>
+          </a:prstGeom>
+          <a:noFill/>
+        </p:spPr>
+        <p:txBody>
+          <a:bodyPr wrap="square">
+            <a:spAutoFit/>
+          </a:bodyPr>
+          <a:lstStyle/>
+          <a:p>
+            <a:pPr>
+              <a:defRPr sz="2200">
+                <a:solidFill>
+                  <a:srgbClr val="4ECDC4"/>
+                </a:solidFill>
+              </a:defRPr>
+            </a:pPr>
+            <a:r>
+              <a:t>Interactive 3D Escape Room in Godot Engine 4</a:t>
+            </a:r>
+          </a:p>
+        </p:txBody>
+      </p:sp>
+      <p:sp>
+        <p:nvSpPr>
+          <p:cNvPr id="7" name="Rounded Rectangle 6"/>
+          <p:cNvSpPr/>
+          <p:nvPr/>
+        </p:nvSpPr>
+        <p:spPr>
+          <a:xfrm>
+            <a:off x="1097280" y="3474720"/>
+            <a:ext cx="9997135" cy="2560320"/>
+          </a:xfrm>
+          <a:prstGeom prst="roundRect">
+            <a:avLst/>
+          </a:prstGeom>
+          <a:solidFill>
+            <a:srgbClr val="1C2541"/>
+          </a:solidFill>
+          <a:ln w="15240">
+            <a:solidFill>
+              <a:srgbClr val="D4AF37"/>
+            </a:solidFill>
+          </a:ln>
+        </p:spPr>
+        <p:style>
+          <a:lnRef idx="1">
+            <a:schemeClr val="accent1"/>
+          </a:lnRef>
+          <a:fillRef idx="3">
+            <a:schemeClr val="accent1"/>
+          </a:fillRef>
+          <a:effectRef idx="2">
+            <a:schemeClr val="accent1"/>
+          </a:effectRef>
+          <a:fontRef idx="minor">
+            <a:schemeClr val="lt1"/>
+          </a:fontRef>
+        </p:style>
+        <p:txBody>
+          <a:bodyPr rtlCol="0" anchor="ctr" wrap="square" lIns="457200" rIns="457200" tIns="320040" bIns="320040"/>
+          <a:lstStyle/>
+          <a:p>
+            <a:pPr algn="ctr">
+              <a:spcAft>
+                <a:spcPts val="1000"/>
+              </a:spcAft>
+              <a:defRPr sz="1500" b="0">
+                <a:solidFill>
+                  <a:srgbClr val="DCE2EB"/>
+                </a:solidFill>
+              </a:defRPr>
+            </a:pPr>
+            <a:r>
+              <a:t>🏛️  Μάθημα: Ευφυή Εικονικά Περιβάλλοντα &amp; Ανάπτυξη Παιχνιδιών</a:t>
+            </a:r>
+          </a:p>
+          <a:p>
+            <a:pPr>
+              <a:spcAft>
+                <a:spcPts val="1000"/>
+              </a:spcAft>
+              <a:defRPr sz="1500" b="0">
+                <a:solidFill>
+                  <a:srgbClr val="DCE2EB"/>
+                </a:solidFill>
+              </a:defRPr>
+            </a:pPr>
+            <a:r>
+              <a:t>🎓  </a:t>
+            </a:r>
+          </a:p>
+          <a:p>
+            <a:pPr>
+              <a:spcAft>
+                <a:spcPts val="1000"/>
+              </a:spcAft>
+              <a:defRPr sz="1500" b="0">
+                <a:solidFill>
+                  <a:srgbClr val="DCE2EB"/>
+                </a:solidFill>
+              </a:defRPr>
+            </a:pPr>
+            <a:r>
+              <a:t>👨‍🏫  </a:t>
+            </a:r>
+          </a:p>
+          <a:p>
+            <a:pPr>
+              <a:spcAft>
+                <a:spcPts val="1000"/>
+              </a:spcAft>
+              <a:defRPr sz="1500" b="1">
+                <a:solidFill>
+                  <a:srgbClr val="D4AF37"/>
+                </a:solidFill>
+              </a:defRPr>
+            </a:pPr>
+            <a:r>
+              <a:t>👤  Φοιτητής: Παναγιώτης Μπεκιάρης | Ακαδημαϊκό Έτος 2025–2026</a:t>
             </a:r>
           </a:p>
         </p:txBody>
@@ -3386,12 +4776,10 @@
             <a:avLst/>
           </a:prstGeom>
           <a:solidFill>
-            <a:srgbClr val="121E31"/>
+            <a:srgbClr val="0B132B"/>
           </a:solidFill>
           <a:ln>
-            <a:solidFill>
-              <a:srgbClr val="121E31"/>
-            </a:solidFill>
+            <a:noFill/>
           </a:ln>
         </p:spPr>
         <p:style>
@@ -3425,7 +4813,7 @@
         <p:spPr>
           <a:xfrm>
             <a:off x="0" y="0"/>
-            <a:ext cx="12191695" cy="137160"/>
+            <a:ext cx="12191695" cy="73152"/>
           </a:xfrm>
           <a:prstGeom prst="rect">
             <a:avLst/>
@@ -3434,9 +4822,7 @@
             <a:srgbClr val="D4AF37"/>
           </a:solidFill>
           <a:ln>
-            <a:solidFill>
-              <a:srgbClr val="D4AF37"/>
-            </a:solidFill>
+            <a:noFill/>
           </a:ln>
         </p:spPr>
         <p:style>
@@ -3469,8 +4855,8 @@
         </p:nvSpPr>
         <p:spPr>
           <a:xfrm>
-            <a:off x="731520" y="457200"/>
-            <a:ext cx="10698480" cy="1280160"/>
+            <a:off x="731520" y="320040"/>
+            <a:ext cx="10698480" cy="320040"/>
           </a:xfrm>
           <a:prstGeom prst="rect">
             <a:avLst/>
@@ -3478,52 +4864,87 @@
           <a:noFill/>
         </p:spPr>
         <p:txBody>
+          <a:bodyPr wrap="none">
+            <a:spAutoFit/>
+          </a:bodyPr>
+          <a:lstStyle/>
+          <a:p>
+            <a:pPr>
+              <a:defRPr sz="1100" b="1">
+                <a:solidFill>
+                  <a:srgbClr val="D4AF37"/>
+                </a:solidFill>
+              </a:defRPr>
+            </a:pPr>
+            <a:r>
+              <a:t>ΟΛΟΚΛΗΡΩΣΗ &amp; ΑΠΟΔΡΑΣΗ</a:t>
+            </a:r>
+          </a:p>
+        </p:txBody>
+      </p:sp>
+      <p:sp>
+        <p:nvSpPr>
+          <p:cNvPr id="5" name="TextBox 4"/>
+          <p:cNvSpPr txBox="1"/>
+          <p:nvPr/>
+        </p:nvSpPr>
+        <p:spPr>
+          <a:xfrm>
+            <a:off x="731520" y="594360"/>
+            <a:ext cx="10698480" cy="1005840"/>
+          </a:xfrm>
+          <a:prstGeom prst="rect">
+            <a:avLst/>
+          </a:prstGeom>
+          <a:noFill/>
+        </p:spPr>
+        <p:txBody>
           <a:bodyPr wrap="square">
             <a:spAutoFit/>
           </a:bodyPr>
           <a:lstStyle/>
           <a:p>
             <a:pPr>
-              <a:defRPr sz="2800" b="1">
+              <a:defRPr sz="2600" b="1">
                 <a:solidFill>
                   <a:srgbClr val="FFFFFF"/>
                 </a:solidFill>
               </a:defRPr>
             </a:pPr>
             <a:r>
-              <a:t>9. Τεχνικές Βελτιστοποίησης (Optimization)</a:t>
-            </a:r>
-          </a:p>
-          <a:p>
-            <a:pPr>
-              <a:defRPr sz="1600" i="1">
-                <a:solidFill>
-                  <a:srgbClr val="D4AF37"/>
-                </a:solidFill>
-              </a:defRPr>
-            </a:pPr>
-            <a:r>
-              <a:t>Υψηλή Απόδοση &amp; Σταθερότητα</a:t>
-            </a:r>
-          </a:p>
-        </p:txBody>
-      </p:sp>
-      <p:sp>
-        <p:nvSpPr>
-          <p:cNvPr id="5" name="Rounded Rectangle 4"/>
+              <a:t>9. Μηχανισμός Εξόδου &amp; Αυτόματος Τερματισμός</a:t>
+            </a:r>
+          </a:p>
+          <a:p>
+            <a:pPr>
+              <a:defRPr sz="1400" i="1">
+                <a:solidFill>
+                  <a:srgbClr val="4ECDC4"/>
+                </a:solidFill>
+              </a:defRPr>
+            </a:pPr>
+            <a:r>
+              <a:t>Ξεκλείδωμα Μυστικής Πόρτας &amp; Victory Screen</a:t>
+            </a:r>
+          </a:p>
+        </p:txBody>
+      </p:sp>
+      <p:sp>
+        <p:nvSpPr>
+          <p:cNvPr id="6" name="Rounded Rectangle 5"/>
           <p:cNvSpPr/>
           <p:nvPr/>
         </p:nvSpPr>
         <p:spPr>
           <a:xfrm>
-            <a:off x="731520" y="1828800"/>
-            <a:ext cx="10698480" cy="4389120"/>
+            <a:off x="731520" y="1691640"/>
+            <a:ext cx="5166360" cy="4663440"/>
           </a:xfrm>
           <a:prstGeom prst="roundRect">
             <a:avLst/>
           </a:prstGeom>
           <a:solidFill>
-            <a:srgbClr val="1C2C46"/>
+            <a:srgbClr val="1C2541"/>
           </a:solidFill>
           <a:ln w="12700">
             <a:solidFill>
@@ -3546,66 +4967,198 @@
           </a:fontRef>
         </p:style>
         <p:txBody>
-          <a:bodyPr rtlCol="0" anchor="ctr" wrap="square" lIns="365760" rIns="365760" tIns="274320" bIns="274320"/>
+          <a:bodyPr rtlCol="0" anchor="ctr" wrap="square" lIns="320040" rIns="320040" tIns="274320" bIns="274320"/>
           <a:lstStyle/>
           <a:p>
             <a:pPr algn="ctr">
               <a:spcAft>
-                <a:spcPts val="1200"/>
-              </a:spcAft>
-              <a:defRPr sz="1500">
-                <a:solidFill>
-                  <a:srgbClr val="DCE1E6"/>
-                </a:solidFill>
-              </a:defRPr>
-            </a:pPr>
-            <a:r>
-              <a:t>•  Ελαχιστοποίηση Draw Calls μέσω ενιαίων PBR υλικών και επαναχρησιμοποίησης shaders.</a:t>
-            </a:r>
-          </a:p>
-          <a:p>
-            <a:pPr>
-              <a:spcAft>
-                <a:spcPts val="1200"/>
-              </a:spcAft>
-              <a:defRPr sz="1500">
-                <a:solidFill>
-                  <a:srgbClr val="DCE1E6"/>
-                </a:solidFill>
-              </a:defRPr>
-            </a:pPr>
-            <a:r>
-              <a:t>•  Χρήση Godot Jolt Physics για αποδοτικότατους ελέγχους συγκρούσεων χωρίς περιττό overhead.</a:t>
-            </a:r>
-          </a:p>
-          <a:p>
-            <a:pPr>
-              <a:spcAft>
-                <a:spcPts val="1200"/>
-              </a:spcAft>
-              <a:defRPr sz="1500">
-                <a:solidFill>
-                  <a:srgbClr val="DCE1E6"/>
-                </a:solidFill>
-              </a:defRPr>
-            </a:pPr>
-            <a:r>
-              <a:t>•  Procedural Primitive Geometry (Box, Cylinder, Sphere) με μηδενικό μέγεθος αρχείων.</a:t>
-            </a:r>
-          </a:p>
-          <a:p>
-            <a:pPr>
-              <a:spcAft>
-                <a:spcPts val="1200"/>
-              </a:spcAft>
-              <a:defRPr sz="1500">
-                <a:solidFill>
-                  <a:srgbClr val="DCE1E6"/>
-                </a:solidFill>
-              </a:defRPr>
-            </a:pPr>
-            <a:r>
-              <a:t>•  Αποφυγή polling loops: Όλες οι καταστάσεις ενημερώνονται ασύγχρονα μέσω Signals και Tweens.</a:t>
+                <a:spcPts val="1400"/>
+              </a:spcAft>
+              <a:defRPr sz="1700" b="1">
+                <a:solidFill>
+                  <a:srgbClr val="D4AF37"/>
+                </a:solidFill>
+              </a:defRPr>
+            </a:pPr>
+            <a:r>
+              <a:t>🛡️ Το Μυστικό Οικόσημο &amp; η Πόρτα</a:t>
+            </a:r>
+          </a:p>
+          <a:p>
+            <a:pPr>
+              <a:spcAft>
+                <a:spcPts val="900"/>
+              </a:spcAft>
+              <a:defRPr sz="1300">
+                <a:solidFill>
+                  <a:srgbClr val="DCE2EB"/>
+                </a:solidFill>
+              </a:defRPr>
+            </a:pPr>
+            <a:r>
+              <a:t>• Ξεκλείδωμα: Μετά την επίλυση του τριγώνου, το χρυσό οικόσημο (Secret Crest) γίνεται πράσινο.</a:t>
+            </a:r>
+          </a:p>
+          <a:p>
+            <a:pPr>
+              <a:spcAft>
+                <a:spcPts val="900"/>
+              </a:spcAft>
+              <a:defRPr sz="1300">
+                <a:solidFill>
+                  <a:srgbClr val="DCE2EB"/>
+                </a:solidFill>
+              </a:defRPr>
+            </a:pPr>
+            <a:r>
+              <a:t>• Προτροπή: Αλλάζει σε [E] Turn Secret Crest.</a:t>
+            </a:r>
+          </a:p>
+          <a:p>
+            <a:pPr>
+              <a:spcAft>
+                <a:spcPts val="900"/>
+              </a:spcAft>
+              <a:defRPr sz="1300">
+                <a:solidFill>
+                  <a:srgbClr val="DCE2EB"/>
+                </a:solidFill>
+              </a:defRPr>
+            </a:pPr>
+            <a:r>
+              <a:t>• Door Pivot Tween: Η βαριά ξύλινη βιβλιοθήκη-πόρτα περιστρέφεται 90° ομαλά σε 1.5 δευτερόλεπτο.</a:t>
+            </a:r>
+          </a:p>
+          <a:p>
+            <a:pPr>
+              <a:spcAft>
+                <a:spcPts val="900"/>
+              </a:spcAft>
+              <a:defRPr sz="1300">
+                <a:solidFill>
+                  <a:srgbClr val="DCE2EB"/>
+                </a:solidFill>
+              </a:defRPr>
+            </a:pPr>
+            <a:r>
+              <a:t>• Αποκάλυψη: Αποκαλύπτεται το φωτεινό πέρασμα διαφυγής.</a:t>
+            </a:r>
+          </a:p>
+        </p:txBody>
+      </p:sp>
+      <p:sp>
+        <p:nvSpPr>
+          <p:cNvPr id="7" name="Rounded Rectangle 6"/>
+          <p:cNvSpPr/>
+          <p:nvPr/>
+        </p:nvSpPr>
+        <p:spPr>
+          <a:xfrm>
+            <a:off x="6263640" y="1691640"/>
+            <a:ext cx="5166360" cy="4663440"/>
+          </a:xfrm>
+          <a:prstGeom prst="roundRect">
+            <a:avLst/>
+          </a:prstGeom>
+          <a:solidFill>
+            <a:srgbClr val="1C2541"/>
+          </a:solidFill>
+          <a:ln w="12700">
+            <a:solidFill>
+              <a:srgbClr val="4ECDC4"/>
+            </a:solidFill>
+          </a:ln>
+        </p:spPr>
+        <p:style>
+          <a:lnRef idx="1">
+            <a:schemeClr val="accent1"/>
+          </a:lnRef>
+          <a:fillRef idx="3">
+            <a:schemeClr val="accent1"/>
+          </a:fillRef>
+          <a:effectRef idx="2">
+            <a:schemeClr val="accent1"/>
+          </a:effectRef>
+          <a:fontRef idx="minor">
+            <a:schemeClr val="lt1"/>
+          </a:fontRef>
+        </p:style>
+        <p:txBody>
+          <a:bodyPr rtlCol="0" anchor="ctr" wrap="square" lIns="320040" rIns="320040" tIns="274320" bIns="274320"/>
+          <a:lstStyle/>
+          <a:p>
+            <a:pPr algn="ctr">
+              <a:spcAft>
+                <a:spcPts val="1400"/>
+              </a:spcAft>
+              <a:defRPr sz="1700" b="1">
+                <a:solidFill>
+                  <a:srgbClr val="4ECDC4"/>
+                </a:solidFill>
+              </a:defRPr>
+            </a:pPr>
+            <a:r>
+              <a:t>🏆 Οθόνη Νίκης &amp; Auto-Quit</a:t>
+            </a:r>
+          </a:p>
+          <a:p>
+            <a:pPr>
+              <a:spcAft>
+                <a:spcPts val="900"/>
+              </a:spcAft>
+              <a:defRPr sz="1300">
+                <a:solidFill>
+                  <a:srgbClr val="DCE2EB"/>
+                </a:solidFill>
+              </a:defRPr>
+            </a:pPr>
+            <a:r>
+              <a:t>• Area3D Trigger: Ανίχνευση διέλευσης του παίκτη από το κατώφλι της εξόδου.</a:t>
+            </a:r>
+          </a:p>
+          <a:p>
+            <a:pPr>
+              <a:spcAft>
+                <a:spcPts val="900"/>
+              </a:spcAft>
+              <a:defRPr sz="1300">
+                <a:solidFill>
+                  <a:srgbClr val="DCE2EB"/>
+                </a:solidFill>
+              </a:defRPr>
+            </a:pPr>
+            <a:r>
+              <a:t>• Victory CanvasLayer: Εμφάνιση οθόνης με μήνυμα «Συγχαρητήρια! Απέδρασες!».</a:t>
+            </a:r>
+          </a:p>
+          <a:p>
+            <a:pPr>
+              <a:spcAft>
+                <a:spcPts val="900"/>
+              </a:spcAft>
+              <a:defRPr sz="1300">
+                <a:solidFill>
+                  <a:srgbClr val="DCE2EB"/>
+                </a:solidFill>
+              </a:defRPr>
+            </a:pPr>
+            <a:r>
+              <a:t>• Αυτόματος Τερματισμός: Αντίστροφη μέτρηση 3 δευτερολέπτων και κλήση get_tree().quit().</a:t>
+            </a:r>
+          </a:p>
+          <a:p>
+            <a:pPr>
+              <a:spcAft>
+                <a:spcPts val="900"/>
+              </a:spcAft>
+              <a:defRPr sz="1300">
+                <a:solidFill>
+                  <a:srgbClr val="DCE2EB"/>
+                </a:solidFill>
+              </a:defRPr>
+            </a:pPr>
+            <a:r>
+              <a:t>• Ομαλό Κλείσιμο: Πλήρης, επαγγελματικός κύκλος ζωής της εφαρμογής.</a:t>
             </a:r>
           </a:p>
         </p:txBody>
@@ -3643,12 +5196,10 @@
             <a:avLst/>
           </a:prstGeom>
           <a:solidFill>
-            <a:srgbClr val="121E31"/>
+            <a:srgbClr val="0B132B"/>
           </a:solidFill>
           <a:ln>
-            <a:solidFill>
-              <a:srgbClr val="121E31"/>
-            </a:solidFill>
+            <a:noFill/>
           </a:ln>
         </p:spPr>
         <p:style>
@@ -3682,7 +5233,7 @@
         <p:spPr>
           <a:xfrm>
             <a:off x="0" y="0"/>
-            <a:ext cx="12191695" cy="137160"/>
+            <a:ext cx="12191695" cy="73152"/>
           </a:xfrm>
           <a:prstGeom prst="rect">
             <a:avLst/>
@@ -3691,9 +5242,7 @@
             <a:srgbClr val="D4AF37"/>
           </a:solidFill>
           <a:ln>
-            <a:solidFill>
-              <a:srgbClr val="D4AF37"/>
-            </a:solidFill>
+            <a:noFill/>
           </a:ln>
         </p:spPr>
         <p:style>
@@ -3726,8 +5275,8 @@
         </p:nvSpPr>
         <p:spPr>
           <a:xfrm>
-            <a:off x="731520" y="457200"/>
-            <a:ext cx="10698480" cy="1280160"/>
+            <a:off x="731520" y="320040"/>
+            <a:ext cx="10698480" cy="320040"/>
           </a:xfrm>
           <a:prstGeom prst="rect">
             <a:avLst/>
@@ -3735,52 +5284,87 @@
           <a:noFill/>
         </p:spPr>
         <p:txBody>
+          <a:bodyPr wrap="none">
+            <a:spAutoFit/>
+          </a:bodyPr>
+          <a:lstStyle/>
+          <a:p>
+            <a:pPr>
+              <a:defRPr sz="1100" b="1">
+                <a:solidFill>
+                  <a:srgbClr val="D4AF37"/>
+                </a:solidFill>
+              </a:defRPr>
+            </a:pPr>
+            <a:r>
+              <a:t>ΒΕΛΤΙΣΤΟΠΟΙΗΣΗ</a:t>
+            </a:r>
+          </a:p>
+        </p:txBody>
+      </p:sp>
+      <p:sp>
+        <p:nvSpPr>
+          <p:cNvPr id="5" name="TextBox 4"/>
+          <p:cNvSpPr txBox="1"/>
+          <p:nvPr/>
+        </p:nvSpPr>
+        <p:spPr>
+          <a:xfrm>
+            <a:off x="731520" y="594360"/>
+            <a:ext cx="10698480" cy="1005840"/>
+          </a:xfrm>
+          <a:prstGeom prst="rect">
+            <a:avLst/>
+          </a:prstGeom>
+          <a:noFill/>
+        </p:spPr>
+        <p:txBody>
           <a:bodyPr wrap="square">
             <a:spAutoFit/>
           </a:bodyPr>
           <a:lstStyle/>
           <a:p>
             <a:pPr>
-              <a:defRPr sz="2800" b="1">
+              <a:defRPr sz="2600" b="1">
                 <a:solidFill>
                   <a:srgbClr val="FFFFFF"/>
                 </a:solidFill>
               </a:defRPr>
             </a:pPr>
             <a:r>
-              <a:t>10. Αντιμετώπιση Κριτηρίων Αξιολόγησης</a:t>
-            </a:r>
-          </a:p>
-          <a:p>
-            <a:pPr>
-              <a:defRPr sz="1600" i="1">
-                <a:solidFill>
-                  <a:srgbClr val="D4AF37"/>
-                </a:solidFill>
-              </a:defRPr>
-            </a:pPr>
-            <a:r>
-              <a:t>Πλήρης Κάλυψη Προδιαγραφών Μαθήματος</a:t>
-            </a:r>
-          </a:p>
-        </p:txBody>
-      </p:sp>
-      <p:sp>
-        <p:nvSpPr>
-          <p:cNvPr id="5" name="Rounded Rectangle 4"/>
+              <a:t>10. Τεχνικές Βελτιστοποίησης (Optimization)</a:t>
+            </a:r>
+          </a:p>
+          <a:p>
+            <a:pPr>
+              <a:defRPr sz="1400" i="1">
+                <a:solidFill>
+                  <a:srgbClr val="4ECDC4"/>
+                </a:solidFill>
+              </a:defRPr>
+            </a:pPr>
+            <a:r>
+              <a:t>Ανάλυση Τεχνικών Βελτιστοποίησης σύμφωνα με τις Απαιτήσεις του Μαθήματος</a:t>
+            </a:r>
+          </a:p>
+        </p:txBody>
+      </p:sp>
+      <p:sp>
+        <p:nvSpPr>
+          <p:cNvPr id="6" name="Rounded Rectangle 5"/>
           <p:cNvSpPr/>
           <p:nvPr/>
         </p:nvSpPr>
         <p:spPr>
           <a:xfrm>
-            <a:off x="731520" y="1828800"/>
-            <a:ext cx="10698480" cy="4389120"/>
+            <a:off x="731520" y="1691640"/>
+            <a:ext cx="3364992" cy="4663440"/>
           </a:xfrm>
           <a:prstGeom prst="roundRect">
             <a:avLst/>
           </a:prstGeom>
           <a:solidFill>
-            <a:srgbClr val="1C2C46"/>
+            <a:srgbClr val="1C2541"/>
           </a:solidFill>
           <a:ln w="12700">
             <a:solidFill>
@@ -3803,21 +5387,132 @@
           </a:fontRef>
         </p:style>
         <p:txBody>
-          <a:bodyPr rtlCol="0" anchor="ctr" wrap="square" lIns="365760" rIns="365760" tIns="274320" bIns="274320"/>
+          <a:bodyPr rtlCol="0" anchor="ctr" wrap="square" lIns="256032" rIns="256032" tIns="274320" bIns="274320"/>
           <a:lstStyle/>
           <a:p>
             <a:pPr algn="ctr">
+              <a:defRPr sz="1600" b="1">
+                <a:solidFill>
+                  <a:srgbClr val="D4AF37"/>
+                </a:solidFill>
+              </a:defRPr>
+            </a:pPr>
+            <a:r>
+              <a:t>📦 Asset &amp; Geometry</a:t>
+            </a:r>
+          </a:p>
+          <a:p>
+            <a:pPr>
               <a:spcAft>
                 <a:spcPts val="1200"/>
               </a:spcAft>
-              <a:defRPr sz="1500">
-                <a:solidFill>
-                  <a:srgbClr val="DCE1E6"/>
-                </a:solidFill>
-              </a:defRPr>
-            </a:pPr>
-            <a:r>
-              <a:t>•  Αληθοφάνεια &amp; Αισθητική: Συνεπές οπτικό θέμα μυστικής βιβλιοθήκης με ατμοσφαιρικό φωτισμό.</a:t>
+              <a:defRPr sz="1400" b="1">
+                <a:solidFill>
+                  <a:srgbClr val="FFFFFF"/>
+                </a:solidFill>
+              </a:defRPr>
+            </a:pPr>
+            <a:r>
+              <a:t>Procedural Primitives</a:t>
+            </a:r>
+          </a:p>
+          <a:p>
+            <a:pPr>
+              <a:spcAft>
+                <a:spcPts val="800"/>
+              </a:spcAft>
+              <a:defRPr sz="1200">
+                <a:solidFill>
+                  <a:srgbClr val="DCE2EB"/>
+                </a:solidFill>
+              </a:defRPr>
+            </a:pPr>
+            <a:r>
+              <a:t>• Μηδενικό μέγεθος εξωτερικών 3D αρχείων (.obj/.gltf)</a:t>
+            </a:r>
+          </a:p>
+          <a:p>
+            <a:pPr>
+              <a:spcAft>
+                <a:spcPts val="800"/>
+              </a:spcAft>
+              <a:defRPr sz="1200">
+                <a:solidFill>
+                  <a:srgbClr val="DCE2EB"/>
+                </a:solidFill>
+              </a:defRPr>
+            </a:pPr>
+            <a:r>
+              <a:t>• Χρήση native Box/Cylinder/Sphere meshes</a:t>
+            </a:r>
+          </a:p>
+          <a:p>
+            <a:pPr>
+              <a:spcAft>
+                <a:spcPts val="800"/>
+              </a:spcAft>
+              <a:defRPr sz="1200">
+                <a:solidFill>
+                  <a:srgbClr val="DCE2EB"/>
+                </a:solidFill>
+              </a:defRPr>
+            </a:pPr>
+            <a:r>
+              <a:t>• Άμεση φόρτωση στη VRAM</a:t>
+            </a:r>
+          </a:p>
+        </p:txBody>
+      </p:sp>
+      <p:sp>
+        <p:nvSpPr>
+          <p:cNvPr id="7" name="Rounded Rectangle 6"/>
+          <p:cNvSpPr/>
+          <p:nvPr/>
+        </p:nvSpPr>
+        <p:spPr>
+          <a:xfrm>
+            <a:off x="4407407" y="1691640"/>
+            <a:ext cx="3364992" cy="4663440"/>
+          </a:xfrm>
+          <a:prstGeom prst="roundRect">
+            <a:avLst/>
+          </a:prstGeom>
+          <a:solidFill>
+            <a:srgbClr val="1C2541"/>
+          </a:solidFill>
+          <a:ln w="12700">
+            <a:solidFill>
+              <a:srgbClr val="4ECDC4"/>
+            </a:solidFill>
+          </a:ln>
+        </p:spPr>
+        <p:style>
+          <a:lnRef idx="1">
+            <a:schemeClr val="accent1"/>
+          </a:lnRef>
+          <a:fillRef idx="3">
+            <a:schemeClr val="accent1"/>
+          </a:fillRef>
+          <a:effectRef idx="2">
+            <a:schemeClr val="accent1"/>
+          </a:effectRef>
+          <a:fontRef idx="minor">
+            <a:schemeClr val="lt1"/>
+          </a:fontRef>
+        </p:style>
+        <p:txBody>
+          <a:bodyPr rtlCol="0" anchor="ctr" wrap="square" lIns="256032" rIns="256032" tIns="274320" bIns="274320"/>
+          <a:lstStyle/>
+          <a:p>
+            <a:pPr algn="ctr">
+              <a:defRPr sz="1600" b="1">
+                <a:solidFill>
+                  <a:srgbClr val="4ECDC4"/>
+                </a:solidFill>
+              </a:defRPr>
+            </a:pPr>
+            <a:r>
+              <a:t>🎨 Rendering &amp; Draw Calls</a:t>
             </a:r>
           </a:p>
           <a:p>
@@ -3825,14 +5520,113 @@
               <a:spcAft>
                 <a:spcPts val="1200"/>
               </a:spcAft>
-              <a:defRPr sz="1500">
-                <a:solidFill>
-                  <a:srgbClr val="DCE1E6"/>
-                </a:solidFill>
-              </a:defRPr>
-            </a:pPr>
-            <a:r>
-              <a:t>•  Κίνηση (Animation): Πλούσια χρήση Tweens σε πόρτες, βιβλία, ράβδους και 3D χέρι.</a:t>
+              <a:defRPr sz="1400" b="1">
+                <a:solidFill>
+                  <a:srgbClr val="FFFFFF"/>
+                </a:solidFill>
+              </a:defRPr>
+            </a:pPr>
+            <a:r>
+              <a:t>PBR Material Batching</a:t>
+            </a:r>
+          </a:p>
+          <a:p>
+            <a:pPr>
+              <a:spcAft>
+                <a:spcPts val="800"/>
+              </a:spcAft>
+              <a:defRPr sz="1200">
+                <a:solidFill>
+                  <a:srgbClr val="DCE2EB"/>
+                </a:solidFill>
+              </a:defRPr>
+            </a:pPr>
+            <a:r>
+              <a:t>• Επαναχρησιμοποίηση StandardMaterial3D</a:t>
+            </a:r>
+          </a:p>
+          <a:p>
+            <a:pPr>
+              <a:spcAft>
+                <a:spcPts val="800"/>
+              </a:spcAft>
+              <a:defRPr sz="1200">
+                <a:solidFill>
+                  <a:srgbClr val="DCE2EB"/>
+                </a:solidFill>
+              </a:defRPr>
+            </a:pPr>
+            <a:r>
+              <a:t>• Ελαχιστοποίηση shader program swaps</a:t>
+            </a:r>
+          </a:p>
+          <a:p>
+            <a:pPr>
+              <a:spcAft>
+                <a:spcPts val="800"/>
+              </a:spcAft>
+              <a:defRPr sz="1200">
+                <a:solidFill>
+                  <a:srgbClr val="DCE2EB"/>
+                </a:solidFill>
+              </a:defRPr>
+            </a:pPr>
+            <a:r>
+              <a:t>• Σταθερά 60+ FPS σε κάθε σύστημα</a:t>
+            </a:r>
+          </a:p>
+        </p:txBody>
+      </p:sp>
+      <p:sp>
+        <p:nvSpPr>
+          <p:cNvPr id="8" name="Rounded Rectangle 7"/>
+          <p:cNvSpPr/>
+          <p:nvPr/>
+        </p:nvSpPr>
+        <p:spPr>
+          <a:xfrm>
+            <a:off x="8083296" y="1691640"/>
+            <a:ext cx="3364992" cy="4663440"/>
+          </a:xfrm>
+          <a:prstGeom prst="roundRect">
+            <a:avLst/>
+          </a:prstGeom>
+          <a:solidFill>
+            <a:srgbClr val="1C2541"/>
+          </a:solidFill>
+          <a:ln w="12700">
+            <a:solidFill>
+              <a:srgbClr val="FFFFFF"/>
+            </a:solidFill>
+          </a:ln>
+        </p:spPr>
+        <p:style>
+          <a:lnRef idx="1">
+            <a:schemeClr val="accent1"/>
+          </a:lnRef>
+          <a:fillRef idx="3">
+            <a:schemeClr val="accent1"/>
+          </a:fillRef>
+          <a:effectRef idx="2">
+            <a:schemeClr val="accent1"/>
+          </a:effectRef>
+          <a:fontRef idx="minor">
+            <a:schemeClr val="lt1"/>
+          </a:fontRef>
+        </p:style>
+        <p:txBody>
+          <a:bodyPr rtlCol="0" anchor="ctr" wrap="square" lIns="256032" rIns="256032" tIns="274320" bIns="274320"/>
+          <a:lstStyle/>
+          <a:p>
+            <a:pPr algn="ctr">
+              <a:defRPr sz="1600" b="1">
+                <a:solidFill>
+                  <a:srgbClr val="FFFFFF"/>
+                </a:solidFill>
+              </a:defRPr>
+            </a:pPr>
+            <a:r>
+              <a:t>⚡ Logic &amp; Physics</a:t>
             </a:r>
           </a:p>
           <a:p>
@@ -3840,29 +5634,59 @@
               <a:spcAft>
                 <a:spcPts val="1200"/>
               </a:spcAft>
-              <a:defRPr sz="1500">
-                <a:solidFill>
-                  <a:srgbClr val="DCE1E6"/>
-                </a:solidFill>
-              </a:defRPr>
-            </a:pPr>
-            <a:r>
-              <a:t>•  Λειτουργικότητα &amp; Χρηστικότητα: Δυναμικά visual cues, διαισθητικός χειρισμός και άμεση απόκριση.</a:t>
-            </a:r>
-          </a:p>
-          <a:p>
-            <a:pPr>
-              <a:spcAft>
-                <a:spcPts val="1200"/>
-              </a:spcAft>
-              <a:defRPr sz="1500">
-                <a:solidFill>
-                  <a:srgbClr val="DCE1E6"/>
-                </a:solidFill>
-              </a:defRPr>
-            </a:pPr>
-            <a:r>
-              <a:t>•  Καθαρότητα Κώδικα: Πλήρως σχολιασμένα GDScript αρχεία με τήρηση προτύπων καθαρού κώδικα.</a:t>
+              <a:defRPr sz="1400" b="1">
+                <a:solidFill>
+                  <a:srgbClr val="FFFFFF"/>
+                </a:solidFill>
+              </a:defRPr>
+            </a:pPr>
+            <a:r>
+              <a:t>Signals &amp; Jolt Physics</a:t>
+            </a:r>
+          </a:p>
+          <a:p>
+            <a:pPr>
+              <a:spcAft>
+                <a:spcPts val="800"/>
+              </a:spcAft>
+              <a:defRPr sz="1200">
+                <a:solidFill>
+                  <a:srgbClr val="DCE2EB"/>
+                </a:solidFill>
+              </a:defRPr>
+            </a:pPr>
+            <a:r>
+              <a:t>• Jolt Physics: Ταχύτατο collision detection</a:t>
+            </a:r>
+          </a:p>
+          <a:p>
+            <a:pPr>
+              <a:spcAft>
+                <a:spcPts val="800"/>
+              </a:spcAft>
+              <a:defRPr sz="1200">
+                <a:solidFill>
+                  <a:srgbClr val="DCE2EB"/>
+                </a:solidFill>
+              </a:defRPr>
+            </a:pPr>
+            <a:r>
+              <a:t>• Ασύγχρονη επικοινωνία (μηδενικό polling loop)</a:t>
+            </a:r>
+          </a:p>
+          <a:p>
+            <a:pPr>
+              <a:spcAft>
+                <a:spcPts val="800"/>
+              </a:spcAft>
+              <a:defRPr sz="1200">
+                <a:solidFill>
+                  <a:srgbClr val="DCE2EB"/>
+                </a:solidFill>
+              </a:defRPr>
+            </a:pPr>
+            <a:r>
+              <a:t>• Καθαρή διαχείριση μνήμης &amp; Tweens</a:t>
             </a:r>
           </a:p>
         </p:txBody>
@@ -3900,12 +5724,10 @@
             <a:avLst/>
           </a:prstGeom>
           <a:solidFill>
-            <a:srgbClr val="121E31"/>
+            <a:srgbClr val="0B132B"/>
           </a:solidFill>
           <a:ln>
-            <a:solidFill>
-              <a:srgbClr val="121E31"/>
-            </a:solidFill>
+            <a:noFill/>
           </a:ln>
         </p:spPr>
         <p:style>
@@ -3939,7 +5761,7 @@
         <p:spPr>
           <a:xfrm>
             <a:off x="0" y="0"/>
-            <a:ext cx="12191695" cy="137160"/>
+            <a:ext cx="12191695" cy="73152"/>
           </a:xfrm>
           <a:prstGeom prst="rect">
             <a:avLst/>
@@ -3948,9 +5770,7 @@
             <a:srgbClr val="D4AF37"/>
           </a:solidFill>
           <a:ln>
-            <a:solidFill>
-              <a:srgbClr val="D4AF37"/>
-            </a:solidFill>
+            <a:noFill/>
           </a:ln>
         </p:spPr>
         <p:style>
@@ -3983,8 +5803,8 @@
         </p:nvSpPr>
         <p:spPr>
           <a:xfrm>
-            <a:off x="731520" y="457200"/>
-            <a:ext cx="10698480" cy="1280160"/>
+            <a:off x="731520" y="320040"/>
+            <a:ext cx="10698480" cy="320040"/>
           </a:xfrm>
           <a:prstGeom prst="rect">
             <a:avLst/>
@@ -3992,52 +5812,87 @@
           <a:noFill/>
         </p:spPr>
         <p:txBody>
+          <a:bodyPr wrap="none">
+            <a:spAutoFit/>
+          </a:bodyPr>
+          <a:lstStyle/>
+          <a:p>
+            <a:pPr>
+              <a:defRPr sz="1100" b="1">
+                <a:solidFill>
+                  <a:srgbClr val="D4AF37"/>
+                </a:solidFill>
+              </a:defRPr>
+            </a:pPr>
+            <a:r>
+              <a:t>ΚΡΙΤΗΡΙΑ ΑΞΙΟΛΟΓΗΣΗΣ</a:t>
+            </a:r>
+          </a:p>
+        </p:txBody>
+      </p:sp>
+      <p:sp>
+        <p:nvSpPr>
+          <p:cNvPr id="5" name="TextBox 4"/>
+          <p:cNvSpPr txBox="1"/>
+          <p:nvPr/>
+        </p:nvSpPr>
+        <p:spPr>
+          <a:xfrm>
+            <a:off x="731520" y="594360"/>
+            <a:ext cx="10698480" cy="1005840"/>
+          </a:xfrm>
+          <a:prstGeom prst="rect">
+            <a:avLst/>
+          </a:prstGeom>
+          <a:noFill/>
+        </p:spPr>
+        <p:txBody>
           <a:bodyPr wrap="square">
             <a:spAutoFit/>
           </a:bodyPr>
           <a:lstStyle/>
           <a:p>
             <a:pPr>
-              <a:defRPr sz="2800" b="1">
+              <a:defRPr sz="2600" b="1">
                 <a:solidFill>
                   <a:srgbClr val="FFFFFF"/>
                 </a:solidFill>
               </a:defRPr>
             </a:pPr>
             <a:r>
-              <a:t>11. Συνοπτικά Συμπεράσματα &amp; Demo</a:t>
-            </a:r>
-          </a:p>
-          <a:p>
-            <a:pPr>
-              <a:defRPr sz="1600" i="1">
-                <a:solidFill>
-                  <a:srgbClr val="D4AF37"/>
-                </a:solidFill>
-              </a:defRPr>
-            </a:pPr>
-            <a:r>
-              <a:t>Ολοκληρωμένη Εφαρμογή Escape Room</a:t>
-            </a:r>
-          </a:p>
-        </p:txBody>
-      </p:sp>
-      <p:sp>
-        <p:nvSpPr>
-          <p:cNvPr id="5" name="Rounded Rectangle 4"/>
+              <a:t>11. Ανταπόκριση στα Κριτήρια Αξιολόγησης</a:t>
+            </a:r>
+          </a:p>
+          <a:p>
+            <a:pPr>
+              <a:defRPr sz="1400" i="1">
+                <a:solidFill>
+                  <a:srgbClr val="4ECDC4"/>
+                </a:solidFill>
+              </a:defRPr>
+            </a:pPr>
+            <a:r>
+              <a:t>Πλήρης Κάλυψη των Απαιτήσεων της Εκφώνησης (ΠΑ.ΠΕΙ.)</a:t>
+            </a:r>
+          </a:p>
+        </p:txBody>
+      </p:sp>
+      <p:sp>
+        <p:nvSpPr>
+          <p:cNvPr id="6" name="Rounded Rectangle 5"/>
           <p:cNvSpPr/>
           <p:nvPr/>
         </p:nvSpPr>
         <p:spPr>
           <a:xfrm>
-            <a:off x="731520" y="1828800"/>
-            <a:ext cx="10698480" cy="4389120"/>
+            <a:off x="731520" y="1691640"/>
+            <a:ext cx="5166360" cy="4663440"/>
           </a:xfrm>
           <a:prstGeom prst="roundRect">
             <a:avLst/>
           </a:prstGeom>
           <a:solidFill>
-            <a:srgbClr val="1C2C46"/>
+            <a:srgbClr val="1C2541"/>
           </a:solidFill>
           <a:ln w="12700">
             <a:solidFill>
@@ -4060,21 +5915,582 @@
           </a:fontRef>
         </p:style>
         <p:txBody>
-          <a:bodyPr rtlCol="0" anchor="ctr" wrap="square" lIns="365760" rIns="365760" tIns="274320" bIns="274320"/>
+          <a:bodyPr rtlCol="0" anchor="ctr" wrap="square" lIns="320040" rIns="320040" tIns="274320" bIns="274320"/>
           <a:lstStyle/>
           <a:p>
             <a:pPr algn="ctr">
               <a:spcAft>
+                <a:spcPts val="1400"/>
+              </a:spcAft>
+              <a:defRPr sz="1700" b="1">
+                <a:solidFill>
+                  <a:srgbClr val="D4AF37"/>
+                </a:solidFill>
+              </a:defRPr>
+            </a:pPr>
+            <a:r>
+              <a:t>📋 Κριτήρια Σχεδίασης &amp; Υλοποίησης</a:t>
+            </a:r>
+          </a:p>
+          <a:p>
+            <a:pPr>
+              <a:spcAft>
+                <a:spcPts val="900"/>
+              </a:spcAft>
+              <a:defRPr sz="1300">
+                <a:solidFill>
+                  <a:srgbClr val="DCE2EB"/>
+                </a:solidFill>
+              </a:defRPr>
+            </a:pPr>
+            <a:r>
+              <a:t>• • Στοιχεία Μαθήματος: Πλήρης ενσωμάτωση τεχνικών 3D VR/Game development.</a:t>
+            </a:r>
+          </a:p>
+          <a:p>
+            <a:pPr>
+              <a:spcAft>
+                <a:spcPts val="900"/>
+              </a:spcAft>
+              <a:defRPr sz="1300">
+                <a:solidFill>
+                  <a:srgbClr val="DCE2EB"/>
+                </a:solidFill>
+              </a:defRPr>
+            </a:pPr>
+            <a:r>
+              <a:t>• • Αληθοφάνεια: Συνεπής ατμόσφαιρα μυστικής βιβλιοθήκης με ρεαλιστικά PBR υλικά.</a:t>
+            </a:r>
+          </a:p>
+          <a:p>
+            <a:pPr>
+              <a:spcAft>
+                <a:spcPts val="900"/>
+              </a:spcAft>
+              <a:defRPr sz="1300">
+                <a:solidFill>
+                  <a:srgbClr val="DCE2EB"/>
+                </a:solidFill>
+              </a:defRPr>
+            </a:pPr>
+            <a:r>
+              <a:t>• • Πληρότητα: Κλειστός, ολοκληρωμένος κύκλος παιχνιδιού χωρίς ασυνέχειες.</a:t>
+            </a:r>
+          </a:p>
+          <a:p>
+            <a:pPr>
+              <a:spcAft>
+                <a:spcPts val="900"/>
+              </a:spcAft>
+              <a:defRPr sz="1300">
+                <a:solidFill>
+                  <a:srgbClr val="DCE2EB"/>
+                </a:solidFill>
+              </a:defRPr>
+            </a:pPr>
+            <a:r>
+              <a:t>• • Αισθητική: Ευπαρουσίαστο περιβάλλον, διακριτικός φωτισμός και PBR ανακλάσεις.</a:t>
+            </a:r>
+          </a:p>
+        </p:txBody>
+      </p:sp>
+      <p:sp>
+        <p:nvSpPr>
+          <p:cNvPr id="7" name="Rounded Rectangle 6"/>
+          <p:cNvSpPr/>
+          <p:nvPr/>
+        </p:nvSpPr>
+        <p:spPr>
+          <a:xfrm>
+            <a:off x="6263640" y="1691640"/>
+            <a:ext cx="5166360" cy="4663440"/>
+          </a:xfrm>
+          <a:prstGeom prst="roundRect">
+            <a:avLst/>
+          </a:prstGeom>
+          <a:solidFill>
+            <a:srgbClr val="1C2541"/>
+          </a:solidFill>
+          <a:ln w="12700">
+            <a:solidFill>
+              <a:srgbClr val="4ECDC4"/>
+            </a:solidFill>
+          </a:ln>
+        </p:spPr>
+        <p:style>
+          <a:lnRef idx="1">
+            <a:schemeClr val="accent1"/>
+          </a:lnRef>
+          <a:fillRef idx="3">
+            <a:schemeClr val="accent1"/>
+          </a:fillRef>
+          <a:effectRef idx="2">
+            <a:schemeClr val="accent1"/>
+          </a:effectRef>
+          <a:fontRef idx="minor">
+            <a:schemeClr val="lt1"/>
+          </a:fontRef>
+        </p:style>
+        <p:txBody>
+          <a:bodyPr rtlCol="0" anchor="ctr" wrap="square" lIns="320040" rIns="320040" tIns="274320" bIns="274320"/>
+          <a:lstStyle/>
+          <a:p>
+            <a:pPr algn="ctr">
+              <a:spcAft>
+                <a:spcPts val="1400"/>
+              </a:spcAft>
+              <a:defRPr sz="1700" b="1">
+                <a:solidFill>
+                  <a:srgbClr val="4ECDC4"/>
+                </a:solidFill>
+              </a:defRPr>
+            </a:pPr>
+            <a:r>
+              <a:t>⚙️ Λειτουργικά &amp; Τεχνικά Κριτήρια</a:t>
+            </a:r>
+          </a:p>
+          <a:p>
+            <a:pPr>
+              <a:spcAft>
+                <a:spcPts val="900"/>
+              </a:spcAft>
+              <a:defRPr sz="1300">
+                <a:solidFill>
+                  <a:srgbClr val="DCE2EB"/>
+                </a:solidFill>
+              </a:defRPr>
+            </a:pPr>
+            <a:r>
+              <a:t>• • Κίνηση (Animation): Πλούσια χρήση Tweens σε πόρτες, βιβλία, ράβδους και 3D χέρι.</a:t>
+            </a:r>
+          </a:p>
+          <a:p>
+            <a:pPr>
+              <a:spcAft>
+                <a:spcPts val="900"/>
+              </a:spcAft>
+              <a:defRPr sz="1300">
+                <a:solidFill>
+                  <a:srgbClr val="DCE2EB"/>
+                </a:solidFill>
+              </a:defRPr>
+            </a:pPr>
+            <a:r>
+              <a:t>• • Λειτουργικότητα &amp; Χρηστικότητα: Διαισθητικός χειρισμός, adaptive crosshair και σαφείς προτροπές.</a:t>
+            </a:r>
+          </a:p>
+          <a:p>
+            <a:pPr>
+              <a:spcAft>
+                <a:spcPts val="900"/>
+              </a:spcAft>
+              <a:defRPr sz="1300">
+                <a:solidFill>
+                  <a:srgbClr val="DCE2EB"/>
+                </a:solidFill>
+              </a:defRPr>
+            </a:pPr>
+            <a:r>
+              <a:t>• • Δομή &amp; Λογική Γρίφων: Δύο διαδοχικά στάδια με προηγμένη μαθηματική επαλήθευση.</a:t>
+            </a:r>
+          </a:p>
+          <a:p>
+            <a:pPr>
+              <a:spcAft>
+                <a:spcPts val="900"/>
+              </a:spcAft>
+              <a:defRPr sz="1300">
+                <a:solidFill>
+                  <a:srgbClr val="DCE2EB"/>
+                </a:solidFill>
+              </a:defRPr>
+            </a:pPr>
+            <a:r>
+              <a:t>• • Ποιότητα Κώδικα: Καθαρός, αναλυτικά σχολιασμένος GDScript κώδικας.</a:t>
+            </a:r>
+          </a:p>
+        </p:txBody>
+      </p:sp>
+    </p:spTree>
+  </p:cSld>
+  <p:clrMapOvr>
+    <a:masterClrMapping/>
+  </p:clrMapOvr>
+</p:sld>
+</file>
+
+<file path=ppt/slides/slide13.xml><?xml version="1.0" encoding="utf-8"?>
+<p:sld xmlns:a="http://schemas.openxmlformats.org/drawingml/2006/main" xmlns:p="http://schemas.openxmlformats.org/presentationml/2006/main" xmlns:r="http://schemas.openxmlformats.org/officeDocument/2006/relationships">
+  <p:cSld>
+    <p:spTree>
+      <p:nvGrpSpPr>
+        <p:cNvPr id="1" name=""/>
+        <p:cNvGrpSpPr/>
+        <p:nvPr/>
+      </p:nvGrpSpPr>
+      <p:grpSpPr/>
+      <p:sp>
+        <p:nvSpPr>
+          <p:cNvPr id="2" name="Rectangle 1"/>
+          <p:cNvSpPr/>
+          <p:nvPr/>
+        </p:nvSpPr>
+        <p:spPr>
+          <a:xfrm>
+            <a:off x="0" y="0"/>
+            <a:ext cx="12191695" cy="6858000"/>
+          </a:xfrm>
+          <a:prstGeom prst="rect">
+            <a:avLst/>
+          </a:prstGeom>
+          <a:solidFill>
+            <a:srgbClr val="0B132B"/>
+          </a:solidFill>
+          <a:ln>
+            <a:noFill/>
+          </a:ln>
+        </p:spPr>
+        <p:style>
+          <a:lnRef idx="1">
+            <a:schemeClr val="accent1"/>
+          </a:lnRef>
+          <a:fillRef idx="3">
+            <a:schemeClr val="accent1"/>
+          </a:fillRef>
+          <a:effectRef idx="2">
+            <a:schemeClr val="accent1"/>
+          </a:effectRef>
+          <a:fontRef idx="minor">
+            <a:schemeClr val="lt1"/>
+          </a:fontRef>
+        </p:style>
+        <p:txBody>
+          <a:bodyPr rtlCol="0" anchor="ctr"/>
+          <a:lstStyle/>
+          <a:p>
+            <a:pPr algn="ctr"/>
+          </a:p>
+        </p:txBody>
+      </p:sp>
+      <p:sp>
+        <p:nvSpPr>
+          <p:cNvPr id="3" name="Rectangle 2"/>
+          <p:cNvSpPr/>
+          <p:nvPr/>
+        </p:nvSpPr>
+        <p:spPr>
+          <a:xfrm>
+            <a:off x="0" y="0"/>
+            <a:ext cx="12191695" cy="73152"/>
+          </a:xfrm>
+          <a:prstGeom prst="rect">
+            <a:avLst/>
+          </a:prstGeom>
+          <a:solidFill>
+            <a:srgbClr val="D4AF37"/>
+          </a:solidFill>
+          <a:ln>
+            <a:noFill/>
+          </a:ln>
+        </p:spPr>
+        <p:style>
+          <a:lnRef idx="1">
+            <a:schemeClr val="accent1"/>
+          </a:lnRef>
+          <a:fillRef idx="3">
+            <a:schemeClr val="accent1"/>
+          </a:fillRef>
+          <a:effectRef idx="2">
+            <a:schemeClr val="accent1"/>
+          </a:effectRef>
+          <a:fontRef idx="minor">
+            <a:schemeClr val="lt1"/>
+          </a:fontRef>
+        </p:style>
+        <p:txBody>
+          <a:bodyPr rtlCol="0" anchor="ctr"/>
+          <a:lstStyle/>
+          <a:p>
+            <a:pPr algn="ctr"/>
+          </a:p>
+        </p:txBody>
+      </p:sp>
+      <p:sp>
+        <p:nvSpPr>
+          <p:cNvPr id="4" name="TextBox 3"/>
+          <p:cNvSpPr txBox="1"/>
+          <p:nvPr/>
+        </p:nvSpPr>
+        <p:spPr>
+          <a:xfrm>
+            <a:off x="731520" y="320040"/>
+            <a:ext cx="10698480" cy="320040"/>
+          </a:xfrm>
+          <a:prstGeom prst="rect">
+            <a:avLst/>
+          </a:prstGeom>
+          <a:noFill/>
+        </p:spPr>
+        <p:txBody>
+          <a:bodyPr wrap="none">
+            <a:spAutoFit/>
+          </a:bodyPr>
+          <a:lstStyle/>
+          <a:p>
+            <a:pPr>
+              <a:defRPr sz="1100" b="1">
+                <a:solidFill>
+                  <a:srgbClr val="D4AF37"/>
+                </a:solidFill>
+              </a:defRPr>
+            </a:pPr>
+            <a:r>
+              <a:t>ΚΩΔΙΚΑΣ &amp; SCRIPTS</a:t>
+            </a:r>
+          </a:p>
+        </p:txBody>
+      </p:sp>
+      <p:sp>
+        <p:nvSpPr>
+          <p:cNvPr id="5" name="TextBox 4"/>
+          <p:cNvSpPr txBox="1"/>
+          <p:nvPr/>
+        </p:nvSpPr>
+        <p:spPr>
+          <a:xfrm>
+            <a:off x="731520" y="594360"/>
+            <a:ext cx="10698480" cy="1005840"/>
+          </a:xfrm>
+          <a:prstGeom prst="rect">
+            <a:avLst/>
+          </a:prstGeom>
+          <a:noFill/>
+        </p:spPr>
+        <p:txBody>
+          <a:bodyPr wrap="square">
+            <a:spAutoFit/>
+          </a:bodyPr>
+          <a:lstStyle/>
+          <a:p>
+            <a:pPr>
+              <a:defRPr sz="2600" b="1">
+                <a:solidFill>
+                  <a:srgbClr val="FFFFFF"/>
+                </a:solidFill>
+              </a:defRPr>
+            </a:pPr>
+            <a:r>
+              <a:t>12. Ανάλυση GDScript Scripts</a:t>
+            </a:r>
+          </a:p>
+          <a:p>
+            <a:pPr>
+              <a:defRPr sz="1400" i="1">
+                <a:solidFill>
+                  <a:srgbClr val="4ECDC4"/>
+                </a:solidFill>
+              </a:defRPr>
+            </a:pPr>
+            <a:r>
+              <a:t>Αρχιτεκτονική Κώδικα &amp; Διαχωρισμός Λειτουργιών</a:t>
+            </a:r>
+          </a:p>
+        </p:txBody>
+      </p:sp>
+      <p:sp>
+        <p:nvSpPr>
+          <p:cNvPr id="6" name="Rounded Rectangle 5"/>
+          <p:cNvSpPr/>
+          <p:nvPr/>
+        </p:nvSpPr>
+        <p:spPr>
+          <a:xfrm>
+            <a:off x="731520" y="1691640"/>
+            <a:ext cx="3364992" cy="4663440"/>
+          </a:xfrm>
+          <a:prstGeom prst="roundRect">
+            <a:avLst/>
+          </a:prstGeom>
+          <a:solidFill>
+            <a:srgbClr val="1C2541"/>
+          </a:solidFill>
+          <a:ln w="12700">
+            <a:solidFill>
+              <a:srgbClr val="D4AF37"/>
+            </a:solidFill>
+          </a:ln>
+        </p:spPr>
+        <p:style>
+          <a:lnRef idx="1">
+            <a:schemeClr val="accent1"/>
+          </a:lnRef>
+          <a:fillRef idx="3">
+            <a:schemeClr val="accent1"/>
+          </a:fillRef>
+          <a:effectRef idx="2">
+            <a:schemeClr val="accent1"/>
+          </a:effectRef>
+          <a:fontRef idx="minor">
+            <a:schemeClr val="lt1"/>
+          </a:fontRef>
+        </p:style>
+        <p:txBody>
+          <a:bodyPr rtlCol="0" anchor="ctr" wrap="square" lIns="256032" rIns="256032" tIns="274320" bIns="274320"/>
+          <a:lstStyle/>
+          <a:p>
+            <a:pPr algn="ctr">
+              <a:defRPr sz="1600" b="1">
+                <a:solidFill>
+                  <a:srgbClr val="D4AF37"/>
+                </a:solidFill>
+              </a:defRPr>
+            </a:pPr>
+            <a:r>
+              <a:t>🏃 player.gd</a:t>
+            </a:r>
+          </a:p>
+          <a:p>
+            <a:pPr>
+              <a:spcAft>
                 <a:spcPts val="1200"/>
               </a:spcAft>
-              <a:defRPr sz="1500">
-                <a:solidFill>
-                  <a:srgbClr val="DCE1E6"/>
-                </a:solidFill>
-              </a:defRPr>
-            </a:pPr>
-            <a:r>
-              <a:t>•  Επιτυχής υλοποίηση ενός πλήρους, αυτόνομου 3D παιχνιδιού απόδρασης σε Godot 4.</a:t>
+              <a:defRPr sz="1400" b="1">
+                <a:solidFill>
+                  <a:srgbClr val="FFFFFF"/>
+                </a:solidFill>
+              </a:defRPr>
+            </a:pPr>
+            <a:r>
+              <a:t>180 Γραμμές Κώδικα</a:t>
+            </a:r>
+          </a:p>
+          <a:p>
+            <a:pPr>
+              <a:spcAft>
+                <a:spcPts val="800"/>
+              </a:spcAft>
+              <a:defRPr sz="1200">
+                <a:solidFill>
+                  <a:srgbClr val="DCE2EB"/>
+                </a:solidFill>
+              </a:defRPr>
+            </a:pPr>
+            <a:r>
+              <a:t>• FPS Movement &amp; Mouse Look</a:t>
+            </a:r>
+          </a:p>
+          <a:p>
+            <a:pPr>
+              <a:spcAft>
+                <a:spcPts val="800"/>
+              </a:spcAft>
+              <a:defRPr sz="1200">
+                <a:solidFill>
+                  <a:srgbClr val="DCE2EB"/>
+                </a:solidFill>
+              </a:defRPr>
+            </a:pPr>
+            <a:r>
+              <a:t>• RayCast3D Interaction Loop</a:t>
+            </a:r>
+          </a:p>
+          <a:p>
+            <a:pPr>
+              <a:spcAft>
+                <a:spcPts val="800"/>
+              </a:spcAft>
+              <a:defRPr sz="1200">
+                <a:solidFill>
+                  <a:srgbClr val="DCE2EB"/>
+                </a:solidFill>
+              </a:defRPr>
+            </a:pPr>
+            <a:r>
+              <a:t>• 3D Hand Tweening Animation</a:t>
+            </a:r>
+          </a:p>
+          <a:p>
+            <a:pPr>
+              <a:spcAft>
+                <a:spcPts val="800"/>
+              </a:spcAft>
+              <a:defRPr sz="1200">
+                <a:solidFill>
+                  <a:srgbClr val="DCE2EB"/>
+                </a:solidFill>
+              </a:defRPr>
+            </a:pPr>
+            <a:r>
+              <a:t>• Adaptive UI Crosshair &amp; Prompts</a:t>
+            </a:r>
+          </a:p>
+          <a:p>
+            <a:pPr>
+              <a:spcAft>
+                <a:spcPts val="800"/>
+              </a:spcAft>
+              <a:defRPr sz="1200">
+                <a:solidFill>
+                  <a:srgbClr val="DCE2EB"/>
+                </a:solidFill>
+              </a:defRPr>
+            </a:pPr>
+            <a:r>
+              <a:t>• Escape &amp; Auto-Quit Trigger</a:t>
+            </a:r>
+          </a:p>
+        </p:txBody>
+      </p:sp>
+      <p:sp>
+        <p:nvSpPr>
+          <p:cNvPr id="7" name="Rounded Rectangle 6"/>
+          <p:cNvSpPr/>
+          <p:nvPr/>
+        </p:nvSpPr>
+        <p:spPr>
+          <a:xfrm>
+            <a:off x="4407407" y="1691640"/>
+            <a:ext cx="3364992" cy="4663440"/>
+          </a:xfrm>
+          <a:prstGeom prst="roundRect">
+            <a:avLst/>
+          </a:prstGeom>
+          <a:solidFill>
+            <a:srgbClr val="1C2541"/>
+          </a:solidFill>
+          <a:ln w="12700">
+            <a:solidFill>
+              <a:srgbClr val="4ECDC4"/>
+            </a:solidFill>
+          </a:ln>
+        </p:spPr>
+        <p:style>
+          <a:lnRef idx="1">
+            <a:schemeClr val="accent1"/>
+          </a:lnRef>
+          <a:fillRef idx="3">
+            <a:schemeClr val="accent1"/>
+          </a:fillRef>
+          <a:effectRef idx="2">
+            <a:schemeClr val="accent1"/>
+          </a:effectRef>
+          <a:fontRef idx="minor">
+            <a:schemeClr val="lt1"/>
+          </a:fontRef>
+        </p:style>
+        <p:txBody>
+          <a:bodyPr rtlCol="0" anchor="ctr" wrap="square" lIns="256032" rIns="256032" tIns="274320" bIns="274320"/>
+          <a:lstStyle/>
+          <a:p>
+            <a:pPr algn="ctr">
+              <a:defRPr sz="1600" b="1">
+                <a:solidFill>
+                  <a:srgbClr val="4ECDC4"/>
+                </a:solidFill>
+              </a:defRPr>
+            </a:pPr>
+            <a:r>
+              <a:t>🧠 game_manager.gd</a:t>
             </a:r>
           </a:p>
           <a:p>
@@ -4082,14 +6498,143 @@
               <a:spcAft>
                 <a:spcPts val="1200"/>
               </a:spcAft>
-              <a:defRPr sz="1500">
-                <a:solidFill>
-                  <a:srgbClr val="DCE1E6"/>
-                </a:solidFill>
-              </a:defRPr>
-            </a:pPr>
-            <a:r>
-              <a:t>•  GitHub Project: https://github.com/MrMpek/SecretLibrary-EscapeRoom</a:t>
+              <a:defRPr sz="1400" b="1">
+                <a:solidFill>
+                  <a:srgbClr val="FFFFFF"/>
+                </a:solidFill>
+              </a:defRPr>
+            </a:pPr>
+            <a:r>
+              <a:t>285 Γραμμές Κώδικα</a:t>
+            </a:r>
+          </a:p>
+          <a:p>
+            <a:pPr>
+              <a:spcAft>
+                <a:spcPts val="800"/>
+              </a:spcAft>
+              <a:defRPr sz="1200">
+                <a:solidFill>
+                  <a:srgbClr val="DCE2EB"/>
+                </a:solidFill>
+              </a:defRPr>
+            </a:pPr>
+            <a:r>
+              <a:t>• Bookshelf Sequence State Machine</a:t>
+            </a:r>
+          </a:p>
+          <a:p>
+            <a:pPr>
+              <a:spcAft>
+                <a:spcPts val="800"/>
+              </a:spcAft>
+              <a:defRPr sz="1200">
+                <a:solidFill>
+                  <a:srgbClr val="DCE2EB"/>
+                </a:solidFill>
+              </a:defRPr>
+            </a:pPr>
+            <a:r>
+              <a:t>• Triangle Puzzle Geometry Solver</a:t>
+            </a:r>
+          </a:p>
+          <a:p>
+            <a:pPr>
+              <a:spcAft>
+                <a:spcPts val="800"/>
+              </a:spcAft>
+              <a:defRPr sz="1200">
+                <a:solidFill>
+                  <a:srgbClr val="DCE2EB"/>
+                </a:solidFill>
+              </a:defRPr>
+            </a:pPr>
+            <a:r>
+              <a:t>• 180° Symmetry Permutation Logic</a:t>
+            </a:r>
+          </a:p>
+          <a:p>
+            <a:pPr>
+              <a:spcAft>
+                <a:spcPts val="800"/>
+              </a:spcAft>
+              <a:defRPr sz="1200">
+                <a:solidFill>
+                  <a:srgbClr val="DCE2EB"/>
+                </a:solidFill>
+              </a:defRPr>
+            </a:pPr>
+            <a:r>
+              <a:t>• Crystal Indicators Emission Control</a:t>
+            </a:r>
+          </a:p>
+          <a:p>
+            <a:pPr>
+              <a:spcAft>
+                <a:spcPts val="800"/>
+              </a:spcAft>
+              <a:defRPr sz="1200">
+                <a:solidFill>
+                  <a:srgbClr val="DCE2EB"/>
+                </a:solidFill>
+              </a:defRPr>
+            </a:pPr>
+            <a:r>
+              <a:t>• Secret Bookcase Door Animation</a:t>
+            </a:r>
+          </a:p>
+        </p:txBody>
+      </p:sp>
+      <p:sp>
+        <p:nvSpPr>
+          <p:cNvPr id="8" name="Rounded Rectangle 7"/>
+          <p:cNvSpPr/>
+          <p:nvPr/>
+        </p:nvSpPr>
+        <p:spPr>
+          <a:xfrm>
+            <a:off x="8083296" y="1691640"/>
+            <a:ext cx="3364992" cy="4663440"/>
+          </a:xfrm>
+          <a:prstGeom prst="roundRect">
+            <a:avLst/>
+          </a:prstGeom>
+          <a:solidFill>
+            <a:srgbClr val="1C2541"/>
+          </a:solidFill>
+          <a:ln w="12700">
+            <a:solidFill>
+              <a:srgbClr val="FFFFFF"/>
+            </a:solidFill>
+          </a:ln>
+        </p:spPr>
+        <p:style>
+          <a:lnRef idx="1">
+            <a:schemeClr val="accent1"/>
+          </a:lnRef>
+          <a:fillRef idx="3">
+            <a:schemeClr val="accent1"/>
+          </a:fillRef>
+          <a:effectRef idx="2">
+            <a:schemeClr val="accent1"/>
+          </a:effectRef>
+          <a:fontRef idx="minor">
+            <a:schemeClr val="lt1"/>
+          </a:fontRef>
+        </p:style>
+        <p:txBody>
+          <a:bodyPr rtlCol="0" anchor="ctr" wrap="square" lIns="256032" rIns="256032" tIns="274320" bIns="274320"/>
+          <a:lstStyle/>
+          <a:p>
+            <a:pPr algn="ctr">
+              <a:defRPr sz="1600" b="1">
+                <a:solidFill>
+                  <a:srgbClr val="FFFFFF"/>
+                </a:solidFill>
+              </a:defRPr>
+            </a:pPr>
+            <a:r>
+              <a:t>🔌 interactable.gd</a:t>
             </a:r>
           </a:p>
           <a:p>
@@ -4097,29 +6642,539 @@
               <a:spcAft>
                 <a:spcPts val="1200"/>
               </a:spcAft>
-              <a:defRPr sz="1500">
-                <a:solidFill>
-                  <a:srgbClr val="DCE1E6"/>
-                </a:solidFill>
-              </a:defRPr>
-            </a:pPr>
-            <a:r>
-              <a:t>•  Διαθέσιμα Παραδοτέα: Πλήρες Project, Τεχνική Έκθεση (.docx), Παρουσίαση (.pptx), Video Script.</a:t>
-            </a:r>
-          </a:p>
-          <a:p>
-            <a:pPr>
-              <a:spcAft>
-                <a:spcPts val="1200"/>
-              </a:spcAft>
-              <a:defRPr sz="1500">
-                <a:solidFill>
-                  <a:srgbClr val="DCE1E6"/>
-                </a:solidFill>
-              </a:defRPr>
-            </a:pPr>
-            <a:r>
-              <a:t>•  Ευχαριστώ για την προσοχή σας!</a:t>
+              <a:defRPr sz="1400" b="1">
+                <a:solidFill>
+                  <a:srgbClr val="FFFFFF"/>
+                </a:solidFill>
+              </a:defRPr>
+            </a:pPr>
+            <a:r>
+              <a:t>35 Γραμμές Κώδικα</a:t>
+            </a:r>
+          </a:p>
+          <a:p>
+            <a:pPr>
+              <a:spcAft>
+                <a:spcPts val="800"/>
+              </a:spcAft>
+              <a:defRPr sz="1200">
+                <a:solidFill>
+                  <a:srgbClr val="DCE2EB"/>
+                </a:solidFill>
+              </a:defRPr>
+            </a:pPr>
+            <a:r>
+              <a:t>• Επαναχρησιμοποιήσιμη Base Class</a:t>
+            </a:r>
+          </a:p>
+          <a:p>
+            <a:pPr>
+              <a:spcAft>
+                <a:spcPts val="800"/>
+              </a:spcAft>
+              <a:defRPr sz="1200">
+                <a:solidFill>
+                  <a:srgbClr val="DCE2EB"/>
+                </a:solidFill>
+              </a:defRPr>
+            </a:pPr>
+            <a:r>
+              <a:t>• Extension of CollisionObject3D</a:t>
+            </a:r>
+          </a:p>
+          <a:p>
+            <a:pPr>
+              <a:spcAft>
+                <a:spcPts val="800"/>
+              </a:spcAft>
+              <a:defRPr sz="1200">
+                <a:solidFill>
+                  <a:srgbClr val="DCE2EB"/>
+                </a:solidFill>
+              </a:defRPr>
+            </a:pPr>
+            <a:r>
+              <a:t>• prompt_message Property</a:t>
+            </a:r>
+          </a:p>
+          <a:p>
+            <a:pPr>
+              <a:spcAft>
+                <a:spcPts val="800"/>
+              </a:spcAft>
+              <a:defRPr sz="1200">
+                <a:solidFill>
+                  <a:srgbClr val="DCE2EB"/>
+                </a:solidFill>
+              </a:defRPr>
+            </a:pPr>
+            <a:r>
+              <a:t>• is_interactive State Toggle</a:t>
+            </a:r>
+          </a:p>
+          <a:p>
+            <a:pPr>
+              <a:spcAft>
+                <a:spcPts val="800"/>
+              </a:spcAft>
+              <a:defRPr sz="1200">
+                <a:solidFill>
+                  <a:srgbClr val="DCE2EB"/>
+                </a:solidFill>
+              </a:defRPr>
+            </a:pPr>
+            <a:r>
+              <a:t>• interacted(player) Signal Dispatch</a:t>
+            </a:r>
+          </a:p>
+        </p:txBody>
+      </p:sp>
+    </p:spTree>
+  </p:cSld>
+  <p:clrMapOvr>
+    <a:masterClrMapping/>
+  </p:clrMapOvr>
+</p:sld>
+</file>
+
+<file path=ppt/slides/slide14.xml><?xml version="1.0" encoding="utf-8"?>
+<p:sld xmlns:a="http://schemas.openxmlformats.org/drawingml/2006/main" xmlns:p="http://schemas.openxmlformats.org/presentationml/2006/main" xmlns:r="http://schemas.openxmlformats.org/officeDocument/2006/relationships">
+  <p:cSld>
+    <p:spTree>
+      <p:nvGrpSpPr>
+        <p:cNvPr id="1" name=""/>
+        <p:cNvGrpSpPr/>
+        <p:nvPr/>
+      </p:nvGrpSpPr>
+      <p:grpSpPr/>
+      <p:sp>
+        <p:nvSpPr>
+          <p:cNvPr id="2" name="Rectangle 1"/>
+          <p:cNvSpPr/>
+          <p:nvPr/>
+        </p:nvSpPr>
+        <p:spPr>
+          <a:xfrm>
+            <a:off x="0" y="0"/>
+            <a:ext cx="12191695" cy="6858000"/>
+          </a:xfrm>
+          <a:prstGeom prst="rect">
+            <a:avLst/>
+          </a:prstGeom>
+          <a:solidFill>
+            <a:srgbClr val="0B132B"/>
+          </a:solidFill>
+          <a:ln>
+            <a:noFill/>
+          </a:ln>
+        </p:spPr>
+        <p:style>
+          <a:lnRef idx="1">
+            <a:schemeClr val="accent1"/>
+          </a:lnRef>
+          <a:fillRef idx="3">
+            <a:schemeClr val="accent1"/>
+          </a:fillRef>
+          <a:effectRef idx="2">
+            <a:schemeClr val="accent1"/>
+          </a:effectRef>
+          <a:fontRef idx="minor">
+            <a:schemeClr val="lt1"/>
+          </a:fontRef>
+        </p:style>
+        <p:txBody>
+          <a:bodyPr rtlCol="0" anchor="ctr"/>
+          <a:lstStyle/>
+          <a:p>
+            <a:pPr algn="ctr"/>
+          </a:p>
+        </p:txBody>
+      </p:sp>
+      <p:sp>
+        <p:nvSpPr>
+          <p:cNvPr id="3" name="Rectangle 2"/>
+          <p:cNvSpPr/>
+          <p:nvPr/>
+        </p:nvSpPr>
+        <p:spPr>
+          <a:xfrm>
+            <a:off x="0" y="0"/>
+            <a:ext cx="12191695" cy="73152"/>
+          </a:xfrm>
+          <a:prstGeom prst="rect">
+            <a:avLst/>
+          </a:prstGeom>
+          <a:solidFill>
+            <a:srgbClr val="D4AF37"/>
+          </a:solidFill>
+          <a:ln>
+            <a:noFill/>
+          </a:ln>
+        </p:spPr>
+        <p:style>
+          <a:lnRef idx="1">
+            <a:schemeClr val="accent1"/>
+          </a:lnRef>
+          <a:fillRef idx="3">
+            <a:schemeClr val="accent1"/>
+          </a:fillRef>
+          <a:effectRef idx="2">
+            <a:schemeClr val="accent1"/>
+          </a:effectRef>
+          <a:fontRef idx="minor">
+            <a:schemeClr val="lt1"/>
+          </a:fontRef>
+        </p:style>
+        <p:txBody>
+          <a:bodyPr rtlCol="0" anchor="ctr"/>
+          <a:lstStyle/>
+          <a:p>
+            <a:pPr algn="ctr"/>
+          </a:p>
+        </p:txBody>
+      </p:sp>
+      <p:sp>
+        <p:nvSpPr>
+          <p:cNvPr id="4" name="TextBox 3"/>
+          <p:cNvSpPr txBox="1"/>
+          <p:nvPr/>
+        </p:nvSpPr>
+        <p:spPr>
+          <a:xfrm>
+            <a:off x="731520" y="320040"/>
+            <a:ext cx="10698480" cy="320040"/>
+          </a:xfrm>
+          <a:prstGeom prst="rect">
+            <a:avLst/>
+          </a:prstGeom>
+          <a:noFill/>
+        </p:spPr>
+        <p:txBody>
+          <a:bodyPr wrap="none">
+            <a:spAutoFit/>
+          </a:bodyPr>
+          <a:lstStyle/>
+          <a:p>
+            <a:pPr>
+              <a:defRPr sz="1100" b="1">
+                <a:solidFill>
+                  <a:srgbClr val="D4AF37"/>
+                </a:solidFill>
+              </a:defRPr>
+            </a:pPr>
+            <a:r>
+              <a:t>ΣΥΜΠΕΡΑΣΜΑΤΑ &amp; DEMO</a:t>
+            </a:r>
+          </a:p>
+        </p:txBody>
+      </p:sp>
+      <p:sp>
+        <p:nvSpPr>
+          <p:cNvPr id="5" name="TextBox 4"/>
+          <p:cNvSpPr txBox="1"/>
+          <p:nvPr/>
+        </p:nvSpPr>
+        <p:spPr>
+          <a:xfrm>
+            <a:off x="731520" y="594360"/>
+            <a:ext cx="10698480" cy="1005840"/>
+          </a:xfrm>
+          <a:prstGeom prst="rect">
+            <a:avLst/>
+          </a:prstGeom>
+          <a:noFill/>
+        </p:spPr>
+        <p:txBody>
+          <a:bodyPr wrap="square">
+            <a:spAutoFit/>
+          </a:bodyPr>
+          <a:lstStyle/>
+          <a:p>
+            <a:pPr>
+              <a:defRPr sz="2600" b="1">
+                <a:solidFill>
+                  <a:srgbClr val="FFFFFF"/>
+                </a:solidFill>
+              </a:defRPr>
+            </a:pPr>
+            <a:r>
+              <a:t>13. Συμπεράσματα &amp; Παραδοτέα</a:t>
+            </a:r>
+          </a:p>
+          <a:p>
+            <a:pPr>
+              <a:defRPr sz="1400" i="1">
+                <a:solidFill>
+                  <a:srgbClr val="4ECDC4"/>
+                </a:solidFill>
+              </a:defRPr>
+            </a:pPr>
+            <a:r>
+              <a:t>Ολοκληρωμένη Εφαρμογή Escape Room σε Godot 4</a:t>
+            </a:r>
+          </a:p>
+        </p:txBody>
+      </p:sp>
+      <p:sp>
+        <p:nvSpPr>
+          <p:cNvPr id="6" name="Rounded Rectangle 5"/>
+          <p:cNvSpPr/>
+          <p:nvPr/>
+        </p:nvSpPr>
+        <p:spPr>
+          <a:xfrm>
+            <a:off x="731520" y="1691640"/>
+            <a:ext cx="5166360" cy="4663440"/>
+          </a:xfrm>
+          <a:prstGeom prst="roundRect">
+            <a:avLst/>
+          </a:prstGeom>
+          <a:solidFill>
+            <a:srgbClr val="1C2541"/>
+          </a:solidFill>
+          <a:ln w="12700">
+            <a:solidFill>
+              <a:srgbClr val="D4AF37"/>
+            </a:solidFill>
+          </a:ln>
+        </p:spPr>
+        <p:style>
+          <a:lnRef idx="1">
+            <a:schemeClr val="accent1"/>
+          </a:lnRef>
+          <a:fillRef idx="3">
+            <a:schemeClr val="accent1"/>
+          </a:fillRef>
+          <a:effectRef idx="2">
+            <a:schemeClr val="accent1"/>
+          </a:effectRef>
+          <a:fontRef idx="minor">
+            <a:schemeClr val="lt1"/>
+          </a:fontRef>
+        </p:style>
+        <p:txBody>
+          <a:bodyPr rtlCol="0" anchor="ctr" wrap="square" lIns="320040" rIns="320040" tIns="274320" bIns="274320"/>
+          <a:lstStyle/>
+          <a:p>
+            <a:pPr algn="ctr">
+              <a:spcAft>
+                <a:spcPts val="1400"/>
+              </a:spcAft>
+              <a:defRPr sz="1700" b="1">
+                <a:solidFill>
+                  <a:srgbClr val="D4AF37"/>
+                </a:solidFill>
+              </a:defRPr>
+            </a:pPr>
+            <a:r>
+              <a:t>📦 Πλήρης Σουίτα Παραδοτέων</a:t>
+            </a:r>
+          </a:p>
+          <a:p>
+            <a:pPr>
+              <a:spcAft>
+                <a:spcPts val="900"/>
+              </a:spcAft>
+              <a:defRPr sz="1300">
+                <a:solidFill>
+                  <a:srgbClr val="DCE2EB"/>
+                </a:solidFill>
+              </a:defRPr>
+            </a:pPr>
+            <a:r>
+              <a:t>• 1. Πλήρες Godot 4 Project με όλο τον πηγαίο κώδικα και σκηνές.</a:t>
+            </a:r>
+          </a:p>
+          <a:p>
+            <a:pPr>
+              <a:spcAft>
+                <a:spcPts val="900"/>
+              </a:spcAft>
+              <a:defRPr sz="1300">
+                <a:solidFill>
+                  <a:srgbClr val="DCE2EB"/>
+                </a:solidFill>
+              </a:defRPr>
+            </a:pPr>
+            <a:r>
+              <a:t>• 2. Τεχνική Έκθεση &amp; Εγχειρίδιο (.docx) καλύπτοντας τα σημεία a–i.</a:t>
+            </a:r>
+          </a:p>
+          <a:p>
+            <a:pPr>
+              <a:spcAft>
+                <a:spcPts val="900"/>
+              </a:spcAft>
+              <a:defRPr sz="1300">
+                <a:solidFill>
+                  <a:srgbClr val="DCE2EB"/>
+                </a:solidFill>
+              </a:defRPr>
+            </a:pPr>
+            <a:r>
+              <a:t>• 3. Παρουσίαση PowerPoint 14 διαφανειών (.pptx).</a:t>
+            </a:r>
+          </a:p>
+          <a:p>
+            <a:pPr>
+              <a:spcAft>
+                <a:spcPts val="900"/>
+              </a:spcAft>
+              <a:defRPr sz="1300">
+                <a:solidFill>
+                  <a:srgbClr val="DCE2EB"/>
+                </a:solidFill>
+              </a:defRPr>
+            </a:pPr>
+            <a:r>
+              <a:t>• 4. Σενάριο Καταγραφής Βίντεο Voice-Over (VoiceOver_Video_Script.md).</a:t>
+            </a:r>
+          </a:p>
+          <a:p>
+            <a:pPr>
+              <a:spcAft>
+                <a:spcPts val="900"/>
+              </a:spcAft>
+              <a:defRPr sz="1300">
+                <a:solidFill>
+                  <a:srgbClr val="DCE2EB"/>
+                </a:solidFill>
+              </a:defRPr>
+            </a:pPr>
+            <a:r>
+              <a:t>• 5. Build / Executable εφαρμογής.</a:t>
+            </a:r>
+          </a:p>
+        </p:txBody>
+      </p:sp>
+      <p:sp>
+        <p:nvSpPr>
+          <p:cNvPr id="7" name="Rounded Rectangle 6"/>
+          <p:cNvSpPr/>
+          <p:nvPr/>
+        </p:nvSpPr>
+        <p:spPr>
+          <a:xfrm>
+            <a:off x="6263640" y="1691640"/>
+            <a:ext cx="5166360" cy="4663440"/>
+          </a:xfrm>
+          <a:prstGeom prst="roundRect">
+            <a:avLst/>
+          </a:prstGeom>
+          <a:solidFill>
+            <a:srgbClr val="1C2541"/>
+          </a:solidFill>
+          <a:ln w="12700">
+            <a:solidFill>
+              <a:srgbClr val="4ECDC4"/>
+            </a:solidFill>
+          </a:ln>
+        </p:spPr>
+        <p:style>
+          <a:lnRef idx="1">
+            <a:schemeClr val="accent1"/>
+          </a:lnRef>
+          <a:fillRef idx="3">
+            <a:schemeClr val="accent1"/>
+          </a:fillRef>
+          <a:effectRef idx="2">
+            <a:schemeClr val="accent1"/>
+          </a:effectRef>
+          <a:fontRef idx="minor">
+            <a:schemeClr val="lt1"/>
+          </a:fontRef>
+        </p:style>
+        <p:txBody>
+          <a:bodyPr rtlCol="0" anchor="ctr" wrap="square" lIns="320040" rIns="320040" tIns="274320" bIns="274320"/>
+          <a:lstStyle/>
+          <a:p>
+            <a:pPr algn="ctr">
+              <a:spcAft>
+                <a:spcPts val="1400"/>
+              </a:spcAft>
+              <a:defRPr sz="1700" b="1">
+                <a:solidFill>
+                  <a:srgbClr val="4ECDC4"/>
+                </a:solidFill>
+              </a:defRPr>
+            </a:pPr>
+            <a:r>
+              <a:t>🔗 Σύνδεσμοι &amp; Στοιχεία</a:t>
+            </a:r>
+          </a:p>
+          <a:p>
+            <a:pPr>
+              <a:spcAft>
+                <a:spcPts val="900"/>
+              </a:spcAft>
+              <a:defRPr sz="1300">
+                <a:solidFill>
+                  <a:srgbClr val="DCE2EB"/>
+                </a:solidFill>
+              </a:defRPr>
+            </a:pPr>
+            <a:r>
+              <a:t>• GitHub Repository: https://github.com/MrMpek/SecretLibrary-EscapeRoom</a:t>
+            </a:r>
+          </a:p>
+          <a:p>
+            <a:pPr>
+              <a:spcAft>
+                <a:spcPts val="900"/>
+              </a:spcAft>
+              <a:defRPr sz="1300">
+                <a:solidFill>
+                  <a:srgbClr val="DCE2EB"/>
+                </a:solidFill>
+              </a:defRPr>
+            </a:pPr>
+            <a:r>
+              <a:t>• Branch: main</a:t>
+            </a:r>
+          </a:p>
+          <a:p>
+            <a:pPr>
+              <a:spcAft>
+                <a:spcPts val="900"/>
+              </a:spcAft>
+              <a:defRPr sz="1300">
+                <a:solidFill>
+                  <a:srgbClr val="DCE2EB"/>
+                </a:solidFill>
+              </a:defRPr>
+            </a:pPr>
+            <a:r>
+              <a:t>• Φοιτητής: Παναγιώτης Μπεκιάρης</a:t>
+            </a:r>
+          </a:p>
+          <a:p>
+            <a:pPr>
+              <a:spcAft>
+                <a:spcPts val="900"/>
+              </a:spcAft>
+              <a:defRPr sz="1300">
+                <a:solidFill>
+                  <a:srgbClr val="DCE2EB"/>
+                </a:solidFill>
+              </a:defRPr>
+            </a:pPr>
+            <a:r>
+              <a:t>• ΠΜΣ Προηγμένα Συστήματα Πληροφορικής, Πανεπιστήμιο Πειραιώς</a:t>
+            </a:r>
+          </a:p>
+          <a:p>
+            <a:pPr>
+              <a:spcAft>
+                <a:spcPts val="900"/>
+              </a:spcAft>
+              <a:defRPr sz="1300">
+                <a:solidFill>
+                  <a:srgbClr val="DCE2EB"/>
+                </a:solidFill>
+              </a:defRPr>
+            </a:pPr>
+            <a:r>
+              <a:t>• Σας ευχαριστώ πολύ για την προσοχή σας!</a:t>
             </a:r>
           </a:p>
         </p:txBody>
@@ -4157,12 +7212,10 @@
             <a:avLst/>
           </a:prstGeom>
           <a:solidFill>
-            <a:srgbClr val="121E31"/>
+            <a:srgbClr val="0B132B"/>
           </a:solidFill>
           <a:ln>
-            <a:solidFill>
-              <a:srgbClr val="121E31"/>
-            </a:solidFill>
+            <a:noFill/>
           </a:ln>
         </p:spPr>
         <p:style>
@@ -4196,7 +7249,7 @@
         <p:spPr>
           <a:xfrm>
             <a:off x="0" y="0"/>
-            <a:ext cx="12191695" cy="137160"/>
+            <a:ext cx="12191695" cy="73152"/>
           </a:xfrm>
           <a:prstGeom prst="rect">
             <a:avLst/>
@@ -4205,9 +7258,7 @@
             <a:srgbClr val="D4AF37"/>
           </a:solidFill>
           <a:ln>
-            <a:solidFill>
-              <a:srgbClr val="D4AF37"/>
-            </a:solidFill>
+            <a:noFill/>
           </a:ln>
         </p:spPr>
         <p:style>
@@ -4240,8 +7291,8 @@
         </p:nvSpPr>
         <p:spPr>
           <a:xfrm>
-            <a:off x="731520" y="457200"/>
-            <a:ext cx="10698480" cy="1280160"/>
+            <a:off x="731520" y="320040"/>
+            <a:ext cx="10698480" cy="320040"/>
           </a:xfrm>
           <a:prstGeom prst="rect">
             <a:avLst/>
@@ -4249,27 +7300,62 @@
           <a:noFill/>
         </p:spPr>
         <p:txBody>
+          <a:bodyPr wrap="none">
+            <a:spAutoFit/>
+          </a:bodyPr>
+          <a:lstStyle/>
+          <a:p>
+            <a:pPr>
+              <a:defRPr sz="1100" b="1">
+                <a:solidFill>
+                  <a:srgbClr val="D4AF37"/>
+                </a:solidFill>
+              </a:defRPr>
+            </a:pPr>
+            <a:r>
+              <a:t>ΘΕΜΑΤΟΛΟΓΙΑ &amp; ΣΤΟΧΟΙ</a:t>
+            </a:r>
+          </a:p>
+        </p:txBody>
+      </p:sp>
+      <p:sp>
+        <p:nvSpPr>
+          <p:cNvPr id="5" name="TextBox 4"/>
+          <p:cNvSpPr txBox="1"/>
+          <p:nvPr/>
+        </p:nvSpPr>
+        <p:spPr>
+          <a:xfrm>
+            <a:off x="731520" y="594360"/>
+            <a:ext cx="10698480" cy="1005840"/>
+          </a:xfrm>
+          <a:prstGeom prst="rect">
+            <a:avLst/>
+          </a:prstGeom>
+          <a:noFill/>
+        </p:spPr>
+        <p:txBody>
           <a:bodyPr wrap="square">
             <a:spAutoFit/>
           </a:bodyPr>
           <a:lstStyle/>
           <a:p>
             <a:pPr>
-              <a:defRPr sz="2800" b="1">
+              <a:defRPr sz="2600" b="1">
                 <a:solidFill>
                   <a:srgbClr val="FFFFFF"/>
                 </a:solidFill>
               </a:defRPr>
             </a:pPr>
             <a:r>
-              <a:t>1. Σκοπός &amp; Επιλογή Θέματος</a:t>
-            </a:r>
-          </a:p>
-          <a:p>
-            <a:pPr>
-              <a:defRPr sz="1600" i="1">
-                <a:solidFill>
-                  <a:srgbClr val="D4AF37"/>
+              <a:t>1. Σκοπός Έργου &amp; Επιλογή Θέματος</a:t>
+            </a:r>
+          </a:p>
+          <a:p>
+            <a:pPr>
+              <a:defRPr sz="1400" i="1">
+                <a:solidFill>
+                  <a:srgbClr val="4ECDC4"/>
                 </a:solidFill>
               </a:defRPr>
             </a:pPr>
@@ -4281,20 +7367,20 @@
       </p:sp>
       <p:sp>
         <p:nvSpPr>
-          <p:cNvPr id="5" name="Rounded Rectangle 4"/>
+          <p:cNvPr id="6" name="Rounded Rectangle 5"/>
           <p:cNvSpPr/>
           <p:nvPr/>
         </p:nvSpPr>
         <p:spPr>
           <a:xfrm>
-            <a:off x="731520" y="1828800"/>
-            <a:ext cx="10698480" cy="4389120"/>
+            <a:off x="731520" y="1691640"/>
+            <a:ext cx="5166360" cy="4663440"/>
           </a:xfrm>
           <a:prstGeom prst="roundRect">
             <a:avLst/>
           </a:prstGeom>
           <a:solidFill>
-            <a:srgbClr val="1C2C46"/>
+            <a:srgbClr val="1C2541"/>
           </a:solidFill>
           <a:ln w="12700">
             <a:solidFill>
@@ -4317,66 +7403,213 @@
           </a:fontRef>
         </p:style>
         <p:txBody>
-          <a:bodyPr rtlCol="0" anchor="ctr" wrap="square" lIns="365760" rIns="365760" tIns="274320" bIns="274320"/>
+          <a:bodyPr rtlCol="0" anchor="ctr" wrap="square" lIns="320040" rIns="320040" tIns="274320" bIns="274320"/>
           <a:lstStyle/>
           <a:p>
             <a:pPr algn="ctr">
               <a:spcAft>
-                <a:spcPts val="1200"/>
-              </a:spcAft>
-              <a:defRPr sz="1500">
-                <a:solidFill>
-                  <a:srgbClr val="DCE1E6"/>
-                </a:solidFill>
-              </a:defRPr>
-            </a:pPr>
-            <a:r>
-              <a:t>•  Ανάπτυξη ενός διαδραστικού τρισδιάστατου περιβάλλοντος απόδρασης πρώτου προσώπου (FPS).</a:t>
-            </a:r>
-          </a:p>
-          <a:p>
-            <a:pPr>
-              <a:spcAft>
-                <a:spcPts val="1200"/>
-              </a:spcAft>
-              <a:defRPr sz="1500">
-                <a:solidFill>
-                  <a:srgbClr val="DCE1E6"/>
-                </a:solidFill>
-              </a:defRPr>
-            </a:pPr>
-            <a:r>
-              <a:t>•  Θεματολογία: Μυστική Βιβλιοθήκη (Secret Library) με ατμοσφαιρικό σχεδιασμό.</a:t>
-            </a:r>
-          </a:p>
-          <a:p>
-            <a:pPr>
-              <a:spcAft>
-                <a:spcPts val="1200"/>
-              </a:spcAft>
-              <a:defRPr sz="1500">
-                <a:solidFill>
-                  <a:srgbClr val="DCE1E6"/>
-                </a:solidFill>
-              </a:defRPr>
-            </a:pPr>
-            <a:r>
-              <a:t>•  Διαδοχική επίλυση μηχανικών &amp; γεωμετρικών γρίφων για την επίτευξη του στόχου απόδρασης.</a:t>
-            </a:r>
-          </a:p>
-          <a:p>
-            <a:pPr>
-              <a:spcAft>
-                <a:spcPts val="1200"/>
-              </a:spcAft>
-              <a:defRPr sz="1500">
-                <a:solidFill>
-                  <a:srgbClr val="DCE1E6"/>
-                </a:solidFill>
-              </a:defRPr>
-            </a:pPr>
-            <a:r>
-              <a:t>•  Συνδυασμός ρεαλιστικής φυσικής, ομαλών animations (Tweens) και σύγχρονης αρχιτεκτονικής λογισμικού.</a:t>
+                <a:spcPts val="1400"/>
+              </a:spcAft>
+              <a:defRPr sz="1700" b="1">
+                <a:solidFill>
+                  <a:srgbClr val="D4AF37"/>
+                </a:solidFill>
+              </a:defRPr>
+            </a:pPr>
+            <a:r>
+              <a:t>🎯 Κύριοι Στόχοι Ανάπτυξης</a:t>
+            </a:r>
+          </a:p>
+          <a:p>
+            <a:pPr>
+              <a:spcAft>
+                <a:spcPts val="900"/>
+              </a:spcAft>
+              <a:defRPr sz="1300">
+                <a:solidFill>
+                  <a:srgbClr val="DCE2EB"/>
+                </a:solidFill>
+              </a:defRPr>
+            </a:pPr>
+            <a:r>
+              <a:t>• Δημιουργία ατμοσφαιρικού τρισδιάστατου χώρου μυστικής βιβλιοθήκης.</a:t>
+            </a:r>
+          </a:p>
+          <a:p>
+            <a:pPr>
+              <a:spcAft>
+                <a:spcPts val="900"/>
+              </a:spcAft>
+              <a:defRPr sz="1300">
+                <a:solidFill>
+                  <a:srgbClr val="DCE2EB"/>
+                </a:solidFill>
+              </a:defRPr>
+            </a:pPr>
+            <a:r>
+              <a:t>• Προοπτική Πρώτου Προσώπου (FPS) με πλήρη έλεγχο 360° και ρεαλιστική φυσική.</a:t>
+            </a:r>
+          </a:p>
+          <a:p>
+            <a:pPr>
+              <a:spcAft>
+                <a:spcPts val="900"/>
+              </a:spcAft>
+              <a:defRPr sz="1300">
+                <a:solidFill>
+                  <a:srgbClr val="DCE2EB"/>
+                </a:solidFill>
+              </a:defRPr>
+            </a:pPr>
+            <a:r>
+              <a:t>• Σύστημα αλληλεπίδρασης με RayCast3D και τρισδιάστατη αναπαράσταση χεριού.</a:t>
+            </a:r>
+          </a:p>
+          <a:p>
+            <a:pPr>
+              <a:spcAft>
+                <a:spcPts val="900"/>
+              </a:spcAft>
+              <a:defRPr sz="1300">
+                <a:solidFill>
+                  <a:srgbClr val="DCE2EB"/>
+                </a:solidFill>
+              </a:defRPr>
+            </a:pPr>
+            <a:r>
+              <a:t>• Διαδοχική επίλυση μηχανικών &amp; γεωμετρικών γρίφων δύο επιπέδων.</a:t>
+            </a:r>
+          </a:p>
+          <a:p>
+            <a:pPr>
+              <a:spcAft>
+                <a:spcPts val="900"/>
+              </a:spcAft>
+              <a:defRPr sz="1300">
+                <a:solidFill>
+                  <a:srgbClr val="DCE2EB"/>
+                </a:solidFill>
+              </a:defRPr>
+            </a:pPr>
+            <a:r>
+              <a:t>• Πλήρης κύκλος παιχνιδιού: εξερεύνηση ➔ γρίφοι ➔ απόδραση ➔ αυτόματος τερματισμός.</a:t>
+            </a:r>
+          </a:p>
+        </p:txBody>
+      </p:sp>
+      <p:sp>
+        <p:nvSpPr>
+          <p:cNvPr id="7" name="Rounded Rectangle 6"/>
+          <p:cNvSpPr/>
+          <p:nvPr/>
+        </p:nvSpPr>
+        <p:spPr>
+          <a:xfrm>
+            <a:off x="6263640" y="1691640"/>
+            <a:ext cx="5166360" cy="4663440"/>
+          </a:xfrm>
+          <a:prstGeom prst="roundRect">
+            <a:avLst/>
+          </a:prstGeom>
+          <a:solidFill>
+            <a:srgbClr val="1C2541"/>
+          </a:solidFill>
+          <a:ln w="12700">
+            <a:solidFill>
+              <a:srgbClr val="4ECDC4"/>
+            </a:solidFill>
+          </a:ln>
+        </p:spPr>
+        <p:style>
+          <a:lnRef idx="1">
+            <a:schemeClr val="accent1"/>
+          </a:lnRef>
+          <a:fillRef idx="3">
+            <a:schemeClr val="accent1"/>
+          </a:fillRef>
+          <a:effectRef idx="2">
+            <a:schemeClr val="accent1"/>
+          </a:effectRef>
+          <a:fontRef idx="minor">
+            <a:schemeClr val="lt1"/>
+          </a:fontRef>
+        </p:style>
+        <p:txBody>
+          <a:bodyPr rtlCol="0" anchor="ctr" wrap="square" lIns="320040" rIns="320040" tIns="274320" bIns="274320"/>
+          <a:lstStyle/>
+          <a:p>
+            <a:pPr algn="ctr">
+              <a:spcAft>
+                <a:spcPts val="1400"/>
+              </a:spcAft>
+              <a:defRPr sz="1700" b="1">
+                <a:solidFill>
+                  <a:srgbClr val="4ECDC4"/>
+                </a:solidFill>
+              </a:defRPr>
+            </a:pPr>
+            <a:r>
+              <a:t>🏛️ Θεματική &amp; Αισθητική Ταυτότητα</a:t>
+            </a:r>
+          </a:p>
+          <a:p>
+            <a:pPr>
+              <a:spcAft>
+                <a:spcPts val="900"/>
+              </a:spcAft>
+              <a:defRPr sz="1300">
+                <a:solidFill>
+                  <a:srgbClr val="DCE2EB"/>
+                </a:solidFill>
+              </a:defRPr>
+            </a:pPr>
+            <a:r>
+              <a:t>• Αρχιτεκτονική κλασικής βιβλιοθήκης με σκούρο ξύλο μαόνι και χρυσό μπρούτζο.</a:t>
+            </a:r>
+          </a:p>
+          <a:p>
+            <a:pPr>
+              <a:spcAft>
+                <a:spcPts val="900"/>
+              </a:spcAft>
+              <a:defRPr sz="1300">
+                <a:solidFill>
+                  <a:srgbClr val="DCE2EB"/>
+                </a:solidFill>
+              </a:defRPr>
+            </a:pPr>
+            <a:r>
+              <a:t>• Πανομοιότυπα δερματόδετα βιβλία για απόκρυψη του μηχανισμού.</a:t>
+            </a:r>
+          </a:p>
+          <a:p>
+            <a:pPr>
+              <a:spcAft>
+                <a:spcPts val="900"/>
+              </a:spcAft>
+              <a:defRPr sz="1300">
+                <a:solidFill>
+                  <a:srgbClr val="DCE2EB"/>
+                </a:solidFill>
+              </a:defRPr>
+            </a:pPr>
+            <a:r>
+              <a:t>• Κρυφό πέρασμα πίσω από περιστρεφόμενη βιβλιοθήκη-πόρτα.</a:t>
+            </a:r>
+          </a:p>
+          <a:p>
+            <a:pPr>
+              <a:spcAft>
+                <a:spcPts val="900"/>
+              </a:spcAft>
+              <a:defRPr sz="1300">
+                <a:solidFill>
+                  <a:srgbClr val="DCE2EB"/>
+                </a:solidFill>
+              </a:defRPr>
+            </a:pPr>
+            <a:r>
+              <a:t>• Δυναμικός φωτισμός PBR που αναδεικνύει τις λεπτομέρειες των υλικών.</a:t>
             </a:r>
           </a:p>
         </p:txBody>
@@ -4414,12 +7647,10 @@
             <a:avLst/>
           </a:prstGeom>
           <a:solidFill>
-            <a:srgbClr val="121E31"/>
+            <a:srgbClr val="0B132B"/>
           </a:solidFill>
           <a:ln>
-            <a:solidFill>
-              <a:srgbClr val="121E31"/>
-            </a:solidFill>
+            <a:noFill/>
           </a:ln>
         </p:spPr>
         <p:style>
@@ -4453,7 +7684,7 @@
         <p:spPr>
           <a:xfrm>
             <a:off x="0" y="0"/>
-            <a:ext cx="12191695" cy="137160"/>
+            <a:ext cx="12191695" cy="73152"/>
           </a:xfrm>
           <a:prstGeom prst="rect">
             <a:avLst/>
@@ -4462,9 +7693,7 @@
             <a:srgbClr val="D4AF37"/>
           </a:solidFill>
           <a:ln>
-            <a:solidFill>
-              <a:srgbClr val="D4AF37"/>
-            </a:solidFill>
+            <a:noFill/>
           </a:ln>
         </p:spPr>
         <p:style>
@@ -4497,8 +7726,8 @@
         </p:nvSpPr>
         <p:spPr>
           <a:xfrm>
-            <a:off x="731520" y="457200"/>
-            <a:ext cx="10698480" cy="1280160"/>
+            <a:off x="731520" y="320040"/>
+            <a:ext cx="10698480" cy="320040"/>
           </a:xfrm>
           <a:prstGeom prst="rect">
             <a:avLst/>
@@ -4506,13 +7735,48 @@
           <a:noFill/>
         </p:spPr>
         <p:txBody>
+          <a:bodyPr wrap="none">
+            <a:spAutoFit/>
+          </a:bodyPr>
+          <a:lstStyle/>
+          <a:p>
+            <a:pPr>
+              <a:defRPr sz="1100" b="1">
+                <a:solidFill>
+                  <a:srgbClr val="D4AF37"/>
+                </a:solidFill>
+              </a:defRPr>
+            </a:pPr>
+            <a:r>
+              <a:t>ΤΕΧΝΟΛΟΓΙΚΟ ΥΠΟΒΑΘΡΟ</a:t>
+            </a:r>
+          </a:p>
+        </p:txBody>
+      </p:sp>
+      <p:sp>
+        <p:nvSpPr>
+          <p:cNvPr id="5" name="TextBox 4"/>
+          <p:cNvSpPr txBox="1"/>
+          <p:nvPr/>
+        </p:nvSpPr>
+        <p:spPr>
+          <a:xfrm>
+            <a:off x="731520" y="594360"/>
+            <a:ext cx="10698480" cy="1005840"/>
+          </a:xfrm>
+          <a:prstGeom prst="rect">
+            <a:avLst/>
+          </a:prstGeom>
+          <a:noFill/>
+        </p:spPr>
+        <p:txBody>
           <a:bodyPr wrap="square">
             <a:spAutoFit/>
           </a:bodyPr>
           <a:lstStyle/>
           <a:p>
             <a:pPr>
-              <a:defRPr sz="2800" b="1">
+              <a:defRPr sz="2600" b="1">
                 <a:solidFill>
                   <a:srgbClr val="FFFFFF"/>
                 </a:solidFill>
@@ -4524,34 +7788,34 @@
           </a:p>
           <a:p>
             <a:pPr>
-              <a:defRPr sz="1600" i="1">
-                <a:solidFill>
-                  <a:srgbClr val="D4AF37"/>
-                </a:solidFill>
-              </a:defRPr>
-            </a:pPr>
-            <a:r>
-              <a:t>Σύγχρονο Game Development Stack</a:t>
-            </a:r>
-          </a:p>
-        </p:txBody>
-      </p:sp>
-      <p:sp>
-        <p:nvSpPr>
-          <p:cNvPr id="5" name="Rounded Rectangle 4"/>
+              <a:defRPr sz="1400" i="1">
+                <a:solidFill>
+                  <a:srgbClr val="4ECDC4"/>
+                </a:solidFill>
+              </a:defRPr>
+            </a:pPr>
+            <a:r>
+              <a:t>Σύγχρονο Open-Source Game Development Stack</a:t>
+            </a:r>
+          </a:p>
+        </p:txBody>
+      </p:sp>
+      <p:sp>
+        <p:nvSpPr>
+          <p:cNvPr id="6" name="Rounded Rectangle 5"/>
           <p:cNvSpPr/>
           <p:nvPr/>
         </p:nvSpPr>
         <p:spPr>
           <a:xfrm>
-            <a:off x="731520" y="1828800"/>
-            <a:ext cx="10698480" cy="4389120"/>
+            <a:off x="731520" y="1691640"/>
+            <a:ext cx="3364992" cy="4663440"/>
           </a:xfrm>
           <a:prstGeom prst="roundRect">
             <a:avLst/>
           </a:prstGeom>
           <a:solidFill>
-            <a:srgbClr val="1C2C46"/>
+            <a:srgbClr val="1C2541"/>
           </a:solidFill>
           <a:ln w="12700">
             <a:solidFill>
@@ -4574,21 +7838,132 @@
           </a:fontRef>
         </p:style>
         <p:txBody>
-          <a:bodyPr rtlCol="0" anchor="ctr" wrap="square" lIns="365760" rIns="365760" tIns="274320" bIns="274320"/>
+          <a:bodyPr rtlCol="0" anchor="ctr" wrap="square" lIns="256032" rIns="256032" tIns="274320" bIns="274320"/>
           <a:lstStyle/>
           <a:p>
             <a:pPr algn="ctr">
+              <a:defRPr sz="1600" b="1">
+                <a:solidFill>
+                  <a:srgbClr val="D4AF37"/>
+                </a:solidFill>
+              </a:defRPr>
+            </a:pPr>
+            <a:r>
+              <a:t>🎮 Game Engine</a:t>
+            </a:r>
+          </a:p>
+          <a:p>
+            <a:pPr>
               <a:spcAft>
                 <a:spcPts val="1200"/>
               </a:spcAft>
-              <a:defRPr sz="1500">
-                <a:solidFill>
-                  <a:srgbClr val="DCE1E6"/>
-                </a:solidFill>
-              </a:defRPr>
-            </a:pPr>
-            <a:r>
-              <a:t>•  Game Engine: Godot Engine 4.x (Forward+ Renderer).</a:t>
+              <a:defRPr sz="1400" b="1">
+                <a:solidFill>
+                  <a:srgbClr val="FFFFFF"/>
+                </a:solidFill>
+              </a:defRPr>
+            </a:pPr>
+            <a:r>
+              <a:t>Godot Engine 4.7</a:t>
+            </a:r>
+          </a:p>
+          <a:p>
+            <a:pPr>
+              <a:spcAft>
+                <a:spcPts val="800"/>
+              </a:spcAft>
+              <a:defRPr sz="1200">
+                <a:solidFill>
+                  <a:srgbClr val="DCE2EB"/>
+                </a:solidFill>
+              </a:defRPr>
+            </a:pPr>
+            <a:r>
+              <a:t>• Forward+ 3D Renderer</a:t>
+            </a:r>
+          </a:p>
+          <a:p>
+            <a:pPr>
+              <a:spcAft>
+                <a:spcPts val="800"/>
+              </a:spcAft>
+              <a:defRPr sz="1200">
+                <a:solidFill>
+                  <a:srgbClr val="DCE2EB"/>
+                </a:solidFill>
+              </a:defRPr>
+            </a:pPr>
+            <a:r>
+              <a:t>• Σύγχρονο σύστημα σκηνών &amp; κόμβων</a:t>
+            </a:r>
+          </a:p>
+          <a:p>
+            <a:pPr>
+              <a:spcAft>
+                <a:spcPts val="800"/>
+              </a:spcAft>
+              <a:defRPr sz="1200">
+                <a:solidFill>
+                  <a:srgbClr val="DCE2EB"/>
+                </a:solidFill>
+              </a:defRPr>
+            </a:pPr>
+            <a:r>
+              <a:t>• Ελαφρύ runtime &amp; ταχύτατο export</a:t>
+            </a:r>
+          </a:p>
+        </p:txBody>
+      </p:sp>
+      <p:sp>
+        <p:nvSpPr>
+          <p:cNvPr id="7" name="Rounded Rectangle 6"/>
+          <p:cNvSpPr/>
+          <p:nvPr/>
+        </p:nvSpPr>
+        <p:spPr>
+          <a:xfrm>
+            <a:off x="4407407" y="1691640"/>
+            <a:ext cx="3364992" cy="4663440"/>
+          </a:xfrm>
+          <a:prstGeom prst="roundRect">
+            <a:avLst/>
+          </a:prstGeom>
+          <a:solidFill>
+            <a:srgbClr val="1C2541"/>
+          </a:solidFill>
+          <a:ln w="12700">
+            <a:solidFill>
+              <a:srgbClr val="4ECDC4"/>
+            </a:solidFill>
+          </a:ln>
+        </p:spPr>
+        <p:style>
+          <a:lnRef idx="1">
+            <a:schemeClr val="accent1"/>
+          </a:lnRef>
+          <a:fillRef idx="3">
+            <a:schemeClr val="accent1"/>
+          </a:fillRef>
+          <a:effectRef idx="2">
+            <a:schemeClr val="accent1"/>
+          </a:effectRef>
+          <a:fontRef idx="minor">
+            <a:schemeClr val="lt1"/>
+          </a:fontRef>
+        </p:style>
+        <p:txBody>
+          <a:bodyPr rtlCol="0" anchor="ctr" wrap="square" lIns="256032" rIns="256032" tIns="274320" bIns="274320"/>
+          <a:lstStyle/>
+          <a:p>
+            <a:pPr algn="ctr">
+              <a:defRPr sz="1600" b="1">
+                <a:solidFill>
+                  <a:srgbClr val="4ECDC4"/>
+                </a:solidFill>
+              </a:defRPr>
+            </a:pPr>
+            <a:r>
+              <a:t>💻 Programming Language</a:t>
             </a:r>
           </a:p>
           <a:p>
@@ -4596,14 +7971,113 @@
               <a:spcAft>
                 <a:spcPts val="1200"/>
               </a:spcAft>
-              <a:defRPr sz="1500">
-                <a:solidFill>
-                  <a:srgbClr val="DCE1E6"/>
-                </a:solidFill>
-              </a:defRPr>
-            </a:pPr>
-            <a:r>
-              <a:t>•  Γλώσσα Προγραμματισμού: GDScript (αντικειμενοστραφής, ταχεία εκτέλεση, πλήρως σχολιασμένη).</a:t>
+              <a:defRPr sz="1400" b="1">
+                <a:solidFill>
+                  <a:srgbClr val="FFFFFF"/>
+                </a:solidFill>
+              </a:defRPr>
+            </a:pPr>
+            <a:r>
+              <a:t>GDScript 2.0</a:t>
+            </a:r>
+          </a:p>
+          <a:p>
+            <a:pPr>
+              <a:spcAft>
+                <a:spcPts val="800"/>
+              </a:spcAft>
+              <a:defRPr sz="1200">
+                <a:solidFill>
+                  <a:srgbClr val="DCE2EB"/>
+                </a:solidFill>
+              </a:defRPr>
+            </a:pPr>
+            <a:r>
+              <a:t>• Native ταχύτητα εκτέλεσης</a:t>
+            </a:r>
+          </a:p>
+          <a:p>
+            <a:pPr>
+              <a:spcAft>
+                <a:spcPts val="800"/>
+              </a:spcAft>
+              <a:defRPr sz="1200">
+                <a:solidFill>
+                  <a:srgbClr val="DCE2EB"/>
+                </a:solidFill>
+              </a:defRPr>
+            </a:pPr>
+            <a:r>
+              <a:t>• Αρχιτεκτονική Observer μέσω Signals</a:t>
+            </a:r>
+          </a:p>
+          <a:p>
+            <a:pPr>
+              <a:spcAft>
+                <a:spcPts val="800"/>
+              </a:spcAft>
+              <a:defRPr sz="1200">
+                <a:solidFill>
+                  <a:srgbClr val="DCE2EB"/>
+                </a:solidFill>
+              </a:defRPr>
+            </a:pPr>
+            <a:r>
+              <a:t>• Πλήρως σχολιασμένος, modular κώδικας</a:t>
+            </a:r>
+          </a:p>
+        </p:txBody>
+      </p:sp>
+      <p:sp>
+        <p:nvSpPr>
+          <p:cNvPr id="8" name="Rounded Rectangle 7"/>
+          <p:cNvSpPr/>
+          <p:nvPr/>
+        </p:nvSpPr>
+        <p:spPr>
+          <a:xfrm>
+            <a:off x="8083296" y="1691640"/>
+            <a:ext cx="3364992" cy="4663440"/>
+          </a:xfrm>
+          <a:prstGeom prst="roundRect">
+            <a:avLst/>
+          </a:prstGeom>
+          <a:solidFill>
+            <a:srgbClr val="1C2541"/>
+          </a:solidFill>
+          <a:ln w="12700">
+            <a:solidFill>
+              <a:srgbClr val="FFFFFF"/>
+            </a:solidFill>
+          </a:ln>
+        </p:spPr>
+        <p:style>
+          <a:lnRef idx="1">
+            <a:schemeClr val="accent1"/>
+          </a:lnRef>
+          <a:fillRef idx="3">
+            <a:schemeClr val="accent1"/>
+          </a:fillRef>
+          <a:effectRef idx="2">
+            <a:schemeClr val="accent1"/>
+          </a:effectRef>
+          <a:fontRef idx="minor">
+            <a:schemeClr val="lt1"/>
+          </a:fontRef>
+        </p:style>
+        <p:txBody>
+          <a:bodyPr rtlCol="0" anchor="ctr" wrap="square" lIns="256032" rIns="256032" tIns="274320" bIns="274320"/>
+          <a:lstStyle/>
+          <a:p>
+            <a:pPr algn="ctr">
+              <a:defRPr sz="1600" b="1">
+                <a:solidFill>
+                  <a:srgbClr val="FFFFFF"/>
+                </a:solidFill>
+              </a:defRPr>
+            </a:pPr>
+            <a:r>
+              <a:t>⚙️ Physics &amp; Control</a:t>
             </a:r>
           </a:p>
           <a:p>
@@ -4611,44 +8085,59 @@
               <a:spcAft>
                 <a:spcPts val="1200"/>
               </a:spcAft>
-              <a:defRPr sz="1500">
-                <a:solidFill>
-                  <a:srgbClr val="DCE1E6"/>
-                </a:solidFill>
-              </a:defRPr>
-            </a:pPr>
-            <a:r>
-              <a:t>•  Physics Engine: Godot Jolt 3D Physics (κορυφαία απόδοση και ακρίβεια συγκρούσεων).</a:t>
-            </a:r>
-          </a:p>
-          <a:p>
-            <a:pPr>
-              <a:spcAft>
-                <a:spcPts val="1200"/>
-              </a:spcAft>
-              <a:defRPr sz="1500">
-                <a:solidFill>
-                  <a:srgbClr val="DCE1E6"/>
-                </a:solidFill>
-              </a:defRPr>
-            </a:pPr>
-            <a:r>
-              <a:t>•  3D Asset Design: Godot Procedural Primitive Meshes &amp; PBR Materials.</a:t>
-            </a:r>
-          </a:p>
-          <a:p>
-            <a:pPr>
-              <a:spcAft>
-                <a:spcPts val="1200"/>
-              </a:spcAft>
-              <a:defRPr sz="1500">
-                <a:solidFill>
-                  <a:srgbClr val="DCE1E6"/>
-                </a:solidFill>
-              </a:defRPr>
-            </a:pPr>
-            <a:r>
-              <a:t>•  Version Control &amp; Collaboration: Git &amp; GitHub Repository (MrMpek/SecretLibrary-EscapeRoom).</a:t>
+              <a:defRPr sz="1400" b="1">
+                <a:solidFill>
+                  <a:srgbClr val="FFFFFF"/>
+                </a:solidFill>
+              </a:defRPr>
+            </a:pPr>
+            <a:r>
+              <a:t>Jolt 3D &amp; Git</a:t>
+            </a:r>
+          </a:p>
+          <a:p>
+            <a:pPr>
+              <a:spcAft>
+                <a:spcPts val="800"/>
+              </a:spcAft>
+              <a:defRPr sz="1200">
+                <a:solidFill>
+                  <a:srgbClr val="DCE2EB"/>
+                </a:solidFill>
+              </a:defRPr>
+            </a:pPr>
+            <a:r>
+              <a:t>• Jolt Physics: Κορυφαία απόδοση συγκρούσεων</a:t>
+            </a:r>
+          </a:p>
+          <a:p>
+            <a:pPr>
+              <a:spcAft>
+                <a:spcPts val="800"/>
+              </a:spcAft>
+              <a:defRPr sz="1200">
+                <a:solidFill>
+                  <a:srgbClr val="DCE2EB"/>
+                </a:solidFill>
+              </a:defRPr>
+            </a:pPr>
+            <a:r>
+              <a:t>• PBR Materials &amp; Procedural Primitives</a:t>
+            </a:r>
+          </a:p>
+          <a:p>
+            <a:pPr>
+              <a:spcAft>
+                <a:spcPts val="800"/>
+              </a:spcAft>
+              <a:defRPr sz="1200">
+                <a:solidFill>
+                  <a:srgbClr val="DCE2EB"/>
+                </a:solidFill>
+              </a:defRPr>
+            </a:pPr>
+            <a:r>
+              <a:t>• GitHub Repository: MrMpek/SecretLibrary</a:t>
             </a:r>
           </a:p>
         </p:txBody>
@@ -4686,12 +8175,10 @@
             <a:avLst/>
           </a:prstGeom>
           <a:solidFill>
-            <a:srgbClr val="121E31"/>
+            <a:srgbClr val="0B132B"/>
           </a:solidFill>
           <a:ln>
-            <a:solidFill>
-              <a:srgbClr val="121E31"/>
-            </a:solidFill>
+            <a:noFill/>
           </a:ln>
         </p:spPr>
         <p:style>
@@ -4725,7 +8212,7 @@
         <p:spPr>
           <a:xfrm>
             <a:off x="0" y="0"/>
-            <a:ext cx="12191695" cy="137160"/>
+            <a:ext cx="12191695" cy="73152"/>
           </a:xfrm>
           <a:prstGeom prst="rect">
             <a:avLst/>
@@ -4734,9 +8221,7 @@
             <a:srgbClr val="D4AF37"/>
           </a:solidFill>
           <a:ln>
-            <a:solidFill>
-              <a:srgbClr val="D4AF37"/>
-            </a:solidFill>
+            <a:noFill/>
           </a:ln>
         </p:spPr>
         <p:style>
@@ -4769,8 +8254,8 @@
         </p:nvSpPr>
         <p:spPr>
           <a:xfrm>
-            <a:off x="731520" y="457200"/>
-            <a:ext cx="10698480" cy="1280160"/>
+            <a:off x="731520" y="320040"/>
+            <a:ext cx="10698480" cy="320040"/>
           </a:xfrm>
           <a:prstGeom prst="rect">
             <a:avLst/>
@@ -4778,52 +8263,87 @@
           <a:noFill/>
         </p:spPr>
         <p:txBody>
+          <a:bodyPr wrap="none">
+            <a:spAutoFit/>
+          </a:bodyPr>
+          <a:lstStyle/>
+          <a:p>
+            <a:pPr>
+              <a:defRPr sz="1100" b="1">
+                <a:solidFill>
+                  <a:srgbClr val="D4AF37"/>
+                </a:solidFill>
+              </a:defRPr>
+            </a:pPr>
+            <a:r>
+              <a:t>ΑΡΧΙΤΕΚΤΟΝΙΚΗ ΣΚΗΝΗΣ</a:t>
+            </a:r>
+          </a:p>
+        </p:txBody>
+      </p:sp>
+      <p:sp>
+        <p:nvSpPr>
+          <p:cNvPr id="5" name="TextBox 4"/>
+          <p:cNvSpPr txBox="1"/>
+          <p:nvPr/>
+        </p:nvSpPr>
+        <p:spPr>
+          <a:xfrm>
+            <a:off x="731520" y="594360"/>
+            <a:ext cx="10698480" cy="1005840"/>
+          </a:xfrm>
+          <a:prstGeom prst="rect">
+            <a:avLst/>
+          </a:prstGeom>
+          <a:noFill/>
+        </p:spPr>
+        <p:txBody>
           <a:bodyPr wrap="square">
             <a:spAutoFit/>
           </a:bodyPr>
           <a:lstStyle/>
           <a:p>
             <a:pPr>
-              <a:defRPr sz="2800" b="1">
+              <a:defRPr sz="2600" b="1">
                 <a:solidFill>
                   <a:srgbClr val="FFFFFF"/>
                 </a:solidFill>
               </a:defRPr>
             </a:pPr>
             <a:r>
-              <a:t>3. Αρχιτεκτονική Σκηνής (Scene Hierarchy)</a:t>
-            </a:r>
-          </a:p>
-          <a:p>
-            <a:pPr>
-              <a:defRPr sz="1600" i="1">
-                <a:solidFill>
-                  <a:srgbClr val="D4AF37"/>
-                </a:solidFill>
-              </a:defRPr>
-            </a:pPr>
-            <a:r>
-              <a:t>Δομή Κόμβων &amp; Διαχωρισμός Ευθυνών</a:t>
-            </a:r>
-          </a:p>
-        </p:txBody>
-      </p:sp>
-      <p:sp>
-        <p:nvSpPr>
-          <p:cNvPr id="5" name="Rounded Rectangle 4"/>
+              <a:t>3. Δομή Σκηνής (Scene Hierarchy)</a:t>
+            </a:r>
+          </a:p>
+          <a:p>
+            <a:pPr>
+              <a:defRPr sz="1400" i="1">
+                <a:solidFill>
+                  <a:srgbClr val="4ECDC4"/>
+                </a:solidFill>
+              </a:defRPr>
+            </a:pPr>
+            <a:r>
+              <a:t>Διαχωρισμός Ευθυνών &amp; Ιεραρχία Κόμβων στο main.tscn</a:t>
+            </a:r>
+          </a:p>
+        </p:txBody>
+      </p:sp>
+      <p:sp>
+        <p:nvSpPr>
+          <p:cNvPr id="6" name="Rounded Rectangle 5"/>
           <p:cNvSpPr/>
           <p:nvPr/>
         </p:nvSpPr>
         <p:spPr>
           <a:xfrm>
-            <a:off x="731520" y="1828800"/>
-            <a:ext cx="10698480" cy="4389120"/>
+            <a:off x="731520" y="1691640"/>
+            <a:ext cx="5166360" cy="4663440"/>
           </a:xfrm>
           <a:prstGeom prst="roundRect">
             <a:avLst/>
           </a:prstGeom>
           <a:solidFill>
-            <a:srgbClr val="1C2C46"/>
+            <a:srgbClr val="1C2541"/>
           </a:solidFill>
           <a:ln w="12700">
             <a:solidFill>
@@ -4846,81 +8366,273 @@
           </a:fontRef>
         </p:style>
         <p:txBody>
-          <a:bodyPr rtlCol="0" anchor="ctr" wrap="square" lIns="365760" rIns="365760" tIns="274320" bIns="274320"/>
+          <a:bodyPr rtlCol="0" anchor="ctr" wrap="square" lIns="320040" rIns="320040" tIns="274320" bIns="274320"/>
           <a:lstStyle/>
           <a:p>
             <a:pPr algn="ctr">
               <a:spcAft>
-                <a:spcPts val="1200"/>
-              </a:spcAft>
-              <a:defRPr sz="1500">
-                <a:solidFill>
-                  <a:srgbClr val="DCE1E6"/>
-                </a:solidFill>
-              </a:defRPr>
-            </a:pPr>
-            <a:r>
-              <a:t>•  Environment Node: Τοίχοι, πάτωμα, οροφή και PBR φωτισμός δωματίου (OmniLight3D / DirectionalLight3D).</a:t>
-            </a:r>
-          </a:p>
-          <a:p>
-            <a:pPr>
-              <a:spcAft>
-                <a:spcPts val="1200"/>
-              </a:spcAft>
-              <a:defRPr sz="1500">
-                <a:solidFill>
-                  <a:srgbClr val="DCE1E6"/>
-                </a:solidFill>
-              </a:defRPr>
-            </a:pPr>
-            <a:r>
-              <a:t>•  ControlConsole: Κεντρική ξύλινη βιβλιοθήκη με 3 διαδραστικά βιβλία και φωτεινούς κρυστάλλους.</a:t>
-            </a:r>
-          </a:p>
-          <a:p>
-            <a:pPr>
-              <a:spcAft>
-                <a:spcPts val="1200"/>
-              </a:spcAft>
-              <a:defRPr sz="1500">
-                <a:solidFill>
-                  <a:srgbClr val="DCE1E6"/>
-                </a:solidFill>
-              </a:defRPr>
-            </a:pPr>
-            <a:r>
-              <a:t>•  PuzzleTable: Κεντρικό ξύλινο τραπέζι με 3 περιστρεφόμενες χρυσές ράβδους.</a:t>
-            </a:r>
-          </a:p>
-          <a:p>
-            <a:pPr>
-              <a:spcAft>
-                <a:spcPts val="1200"/>
-              </a:spcAft>
-              <a:defRPr sz="1500">
-                <a:solidFill>
-                  <a:srgbClr val="DCE1E6"/>
-                </a:solidFill>
-              </a:defRPr>
-            </a:pPr>
-            <a:r>
-              <a:t>•  ExitDoorPivot: Περιστρεφόμενη πόρτα-βιβλιοθήκη με AccessPanel (χρυσό οικόσημο) και Area3D εξόδου.</a:t>
-            </a:r>
-          </a:p>
-          <a:p>
-            <a:pPr>
-              <a:spcAft>
-                <a:spcPts val="1200"/>
-              </a:spcAft>
-              <a:defRPr sz="1500">
-                <a:solidFill>
-                  <a:srgbClr val="DCE1E6"/>
-                </a:solidFill>
-              </a:defRPr>
-            </a:pPr>
-            <a:r>
-              <a:t>•  Player &amp; UI: CharacterBody3D με Camera3D, 3D Hand και CanvasLayer UI.</a:t>
+                <a:spcPts val="1400"/>
+              </a:spcAft>
+              <a:defRPr sz="1700" b="1">
+                <a:solidFill>
+                  <a:srgbClr val="D4AF37"/>
+                </a:solidFill>
+              </a:defRPr>
+            </a:pPr>
+            <a:r>
+              <a:t>🌲 Δενδρική Δομή Κόμβων</a:t>
+            </a:r>
+          </a:p>
+          <a:p>
+            <a:pPr>
+              <a:spcAft>
+                <a:spcPts val="900"/>
+              </a:spcAft>
+              <a:defRPr sz="1300">
+                <a:solidFill>
+                  <a:srgbClr val="DCE2EB"/>
+                </a:solidFill>
+              </a:defRPr>
+            </a:pPr>
+            <a:r>
+              <a:t>• Main (Node3D): Ρίζα της σκηνής.</a:t>
+            </a:r>
+          </a:p>
+          <a:p>
+            <a:pPr>
+              <a:spcAft>
+                <a:spcPts val="900"/>
+              </a:spcAft>
+              <a:defRPr sz="1300">
+                <a:solidFill>
+                  <a:srgbClr val="DCE2EB"/>
+                </a:solidFill>
+              </a:defRPr>
+            </a:pPr>
+            <a:r>
+              <a:t>• ├── WorldEnvironment &amp; Lights: Ατμοσφαιρικός φωτισμός.</a:t>
+            </a:r>
+          </a:p>
+          <a:p>
+            <a:pPr>
+              <a:spcAft>
+                <a:spcPts val="900"/>
+              </a:spcAft>
+              <a:defRPr sz="1300">
+                <a:solidFill>
+                  <a:srgbClr val="DCE2EB"/>
+                </a:solidFill>
+              </a:defRPr>
+            </a:pPr>
+            <a:r>
+              <a:t>• ├── Architecture: Πάτωμα, τοίχοι, οροφή.</a:t>
+            </a:r>
+          </a:p>
+          <a:p>
+            <a:pPr>
+              <a:spcAft>
+                <a:spcPts val="900"/>
+              </a:spcAft>
+              <a:defRPr sz="1300">
+                <a:solidFill>
+                  <a:srgbClr val="DCE2EB"/>
+                </a:solidFill>
+              </a:defRPr>
+            </a:pPr>
+            <a:r>
+              <a:t>• ├── ControlConsole: Κεντρική βιβλιοθήκη &amp; 3 βιβλία.</a:t>
+            </a:r>
+          </a:p>
+          <a:p>
+            <a:pPr>
+              <a:spcAft>
+                <a:spcPts val="900"/>
+              </a:spcAft>
+              <a:defRPr sz="1300">
+                <a:solidFill>
+                  <a:srgbClr val="DCE2EB"/>
+                </a:solidFill>
+              </a:defRPr>
+            </a:pPr>
+            <a:r>
+              <a:t>• ├── PuzzleTable: Τραπέζι με 3 περιστρεφόμενες ράβδους.</a:t>
+            </a:r>
+          </a:p>
+          <a:p>
+            <a:pPr>
+              <a:spcAft>
+                <a:spcPts val="900"/>
+              </a:spcAft>
+              <a:defRPr sz="1300">
+                <a:solidFill>
+                  <a:srgbClr val="DCE2EB"/>
+                </a:solidFill>
+              </a:defRPr>
+            </a:pPr>
+            <a:r>
+              <a:t>• ├── ExitDoorPivot: Περιστρεφόμενη πόρτα &amp; οικόσημο.</a:t>
+            </a:r>
+          </a:p>
+          <a:p>
+            <a:pPr>
+              <a:spcAft>
+                <a:spcPts val="900"/>
+              </a:spcAft>
+              <a:defRPr sz="1300">
+                <a:solidFill>
+                  <a:srgbClr val="DCE2EB"/>
+                </a:solidFill>
+              </a:defRPr>
+            </a:pPr>
+            <a:r>
+              <a:t>• ├── Player: CharacterBody3D, Camera3D &amp; 3D Hand.</a:t>
+            </a:r>
+          </a:p>
+          <a:p>
+            <a:pPr>
+              <a:spcAft>
+                <a:spcPts val="900"/>
+              </a:spcAft>
+              <a:defRPr sz="1300">
+                <a:solidFill>
+                  <a:srgbClr val="DCE2EB"/>
+                </a:solidFill>
+              </a:defRPr>
+            </a:pPr>
+            <a:r>
+              <a:t>• ├── GameManager: Κεντρικός ελεγκτής λογικής.</a:t>
+            </a:r>
+          </a:p>
+          <a:p>
+            <a:pPr>
+              <a:spcAft>
+                <a:spcPts val="900"/>
+              </a:spcAft>
+              <a:defRPr sz="1300">
+                <a:solidFill>
+                  <a:srgbClr val="DCE2EB"/>
+                </a:solidFill>
+              </a:defRPr>
+            </a:pPr>
+            <a:r>
+              <a:t>• └── UI: CanvasLayer (Crosshair, Prompts, Victory).</a:t>
+            </a:r>
+          </a:p>
+        </p:txBody>
+      </p:sp>
+      <p:sp>
+        <p:nvSpPr>
+          <p:cNvPr id="7" name="Rounded Rectangle 6"/>
+          <p:cNvSpPr/>
+          <p:nvPr/>
+        </p:nvSpPr>
+        <p:spPr>
+          <a:xfrm>
+            <a:off x="6263640" y="1691640"/>
+            <a:ext cx="5166360" cy="4663440"/>
+          </a:xfrm>
+          <a:prstGeom prst="roundRect">
+            <a:avLst/>
+          </a:prstGeom>
+          <a:solidFill>
+            <a:srgbClr val="1C2541"/>
+          </a:solidFill>
+          <a:ln w="12700">
+            <a:solidFill>
+              <a:srgbClr val="4ECDC4"/>
+            </a:solidFill>
+          </a:ln>
+        </p:spPr>
+        <p:style>
+          <a:lnRef idx="1">
+            <a:schemeClr val="accent1"/>
+          </a:lnRef>
+          <a:fillRef idx="3">
+            <a:schemeClr val="accent1"/>
+          </a:fillRef>
+          <a:effectRef idx="2">
+            <a:schemeClr val="accent1"/>
+          </a:effectRef>
+          <a:fontRef idx="minor">
+            <a:schemeClr val="lt1"/>
+          </a:fontRef>
+        </p:style>
+        <p:txBody>
+          <a:bodyPr rtlCol="0" anchor="ctr" wrap="square" lIns="320040" rIns="320040" tIns="274320" bIns="274320"/>
+          <a:lstStyle/>
+          <a:p>
+            <a:pPr algn="ctr">
+              <a:spcAft>
+                <a:spcPts val="1400"/>
+              </a:spcAft>
+              <a:defRPr sz="1700" b="1">
+                <a:solidFill>
+                  <a:srgbClr val="4ECDC4"/>
+                </a:solidFill>
+              </a:defRPr>
+            </a:pPr>
+            <a:r>
+              <a:t>💡 Αρχιτεκτονικά Πλεονεκτήματα</a:t>
+            </a:r>
+          </a:p>
+          <a:p>
+            <a:pPr>
+              <a:spcAft>
+                <a:spcPts val="900"/>
+              </a:spcAft>
+              <a:defRPr sz="1300">
+                <a:solidFill>
+                  <a:srgbClr val="DCE2EB"/>
+                </a:solidFill>
+              </a:defRPr>
+            </a:pPr>
+            <a:r>
+              <a:t>• Modular Σχεδιασμός: Κάθε διαδραστικό στοιχείο λειτουργεί αυτόνομα.</a:t>
+            </a:r>
+          </a:p>
+          <a:p>
+            <a:pPr>
+              <a:spcAft>
+                <a:spcPts val="900"/>
+              </a:spcAft>
+              <a:defRPr sz="1300">
+                <a:solidFill>
+                  <a:srgbClr val="DCE2EB"/>
+                </a:solidFill>
+              </a:defRPr>
+            </a:pPr>
+            <a:r>
+              <a:t>• Signals Decoupling: Αποφυγή κυκλικών εξαρτήσεων μεταξύ κλάσεων.</a:t>
+            </a:r>
+          </a:p>
+          <a:p>
+            <a:pPr>
+              <a:spcAft>
+                <a:spcPts val="900"/>
+              </a:spcAft>
+              <a:defRPr sz="1300">
+                <a:solidFill>
+                  <a:srgbClr val="DCE2EB"/>
+                </a:solidFill>
+              </a:defRPr>
+            </a:pPr>
+            <a:r>
+              <a:t>• Dynamic Node Resolution: Αυτόματη σύνδεση κόμβων κατά το runtime (_ready).</a:t>
+            </a:r>
+          </a:p>
+          <a:p>
+            <a:pPr>
+              <a:spcAft>
+                <a:spcPts val="900"/>
+              </a:spcAft>
+              <a:defRPr sz="1300">
+                <a:solidFill>
+                  <a:srgbClr val="DCE2EB"/>
+                </a:solidFill>
+              </a:defRPr>
+            </a:pPr>
+            <a:r>
+              <a:t>• Zero External Assets: Όλη η γεωμετρία δημιουργείται από procedural primitives.</a:t>
             </a:r>
           </a:p>
         </p:txBody>
@@ -4958,12 +8670,10 @@
             <a:avLst/>
           </a:prstGeom>
           <a:solidFill>
-            <a:srgbClr val="121E31"/>
+            <a:srgbClr val="0B132B"/>
           </a:solidFill>
           <a:ln>
-            <a:solidFill>
-              <a:srgbClr val="121E31"/>
-            </a:solidFill>
+            <a:noFill/>
           </a:ln>
         </p:spPr>
         <p:style>
@@ -4997,7 +8707,7 @@
         <p:spPr>
           <a:xfrm>
             <a:off x="0" y="0"/>
-            <a:ext cx="12191695" cy="137160"/>
+            <a:ext cx="12191695" cy="73152"/>
           </a:xfrm>
           <a:prstGeom prst="rect">
             <a:avLst/>
@@ -5006,9 +8716,7 @@
             <a:srgbClr val="D4AF37"/>
           </a:solidFill>
           <a:ln>
-            <a:solidFill>
-              <a:srgbClr val="D4AF37"/>
-            </a:solidFill>
+            <a:noFill/>
           </a:ln>
         </p:spPr>
         <p:style>
@@ -5041,8 +8749,8 @@
         </p:nvSpPr>
         <p:spPr>
           <a:xfrm>
-            <a:off x="731520" y="457200"/>
-            <a:ext cx="10698480" cy="1280160"/>
+            <a:off x="731520" y="320040"/>
+            <a:ext cx="10698480" cy="320040"/>
           </a:xfrm>
           <a:prstGeom prst="rect">
             <a:avLst/>
@@ -5050,52 +8758,87 @@
           <a:noFill/>
         </p:spPr>
         <p:txBody>
+          <a:bodyPr wrap="none">
+            <a:spAutoFit/>
+          </a:bodyPr>
+          <a:lstStyle/>
+          <a:p>
+            <a:pPr>
+              <a:defRPr sz="1100" b="1">
+                <a:solidFill>
+                  <a:srgbClr val="D4AF37"/>
+                </a:solidFill>
+              </a:defRPr>
+            </a:pPr>
+            <a:r>
+              <a:t>ΧΕΙΡΙΣΜΟΣ ΠΑΙΚΤΗ</a:t>
+            </a:r>
+          </a:p>
+        </p:txBody>
+      </p:sp>
+      <p:sp>
+        <p:nvSpPr>
+          <p:cNvPr id="5" name="TextBox 4"/>
+          <p:cNvSpPr txBox="1"/>
+          <p:nvPr/>
+        </p:nvSpPr>
+        <p:spPr>
+          <a:xfrm>
+            <a:off x="731520" y="594360"/>
+            <a:ext cx="10698480" cy="1005840"/>
+          </a:xfrm>
+          <a:prstGeom prst="rect">
+            <a:avLst/>
+          </a:prstGeom>
+          <a:noFill/>
+        </p:spPr>
+        <p:txBody>
           <a:bodyPr wrap="square">
             <a:spAutoFit/>
           </a:bodyPr>
           <a:lstStyle/>
           <a:p>
             <a:pPr>
-              <a:defRPr sz="2800" b="1">
+              <a:defRPr sz="2600" b="1">
                 <a:solidFill>
                   <a:srgbClr val="FFFFFF"/>
                 </a:solidFill>
               </a:defRPr>
             </a:pPr>
             <a:r>
-              <a:t>4. FPS Controller &amp; 3D Procedural Hand</a:t>
-            </a:r>
-          </a:p>
-          <a:p>
-            <a:pPr>
-              <a:defRPr sz="1600" i="1">
-                <a:solidFill>
-                  <a:srgbClr val="D4AF37"/>
-                </a:solidFill>
-              </a:defRPr>
-            </a:pPr>
-            <a:r>
-              <a:t>Ρεαλιστικός Χειρισμός Πρώτου Προσώπου</a:t>
-            </a:r>
-          </a:p>
-        </p:txBody>
-      </p:sp>
-      <p:sp>
-        <p:nvSpPr>
-          <p:cNvPr id="5" name="Rounded Rectangle 4"/>
+              <a:t>4. FPS Controller &amp; Κίνηση Πρώτου Προσώπου</a:t>
+            </a:r>
+          </a:p>
+          <a:p>
+            <a:pPr>
+              <a:defRPr sz="1400" i="1">
+                <a:solidFill>
+                  <a:srgbClr val="4ECDC4"/>
+                </a:solidFill>
+              </a:defRPr>
+            </a:pPr>
+            <a:r>
+              <a:t>Υλοποίηση στο script player.gd</a:t>
+            </a:r>
+          </a:p>
+        </p:txBody>
+      </p:sp>
+      <p:sp>
+        <p:nvSpPr>
+          <p:cNvPr id="6" name="Rounded Rectangle 5"/>
           <p:cNvSpPr/>
           <p:nvPr/>
         </p:nvSpPr>
         <p:spPr>
           <a:xfrm>
-            <a:off x="731520" y="1828800"/>
-            <a:ext cx="10698480" cy="4389120"/>
+            <a:off x="731520" y="1691640"/>
+            <a:ext cx="5166360" cy="4663440"/>
           </a:xfrm>
           <a:prstGeom prst="roundRect">
             <a:avLst/>
           </a:prstGeom>
           <a:solidFill>
-            <a:srgbClr val="1C2C46"/>
+            <a:srgbClr val="1C2541"/>
           </a:solidFill>
           <a:ln w="12700">
             <a:solidFill>
@@ -5118,81 +8861,198 @@
           </a:fontRef>
         </p:style>
         <p:txBody>
-          <a:bodyPr rtlCol="0" anchor="ctr" wrap="square" lIns="365760" rIns="365760" tIns="274320" bIns="274320"/>
+          <a:bodyPr rtlCol="0" anchor="ctr" wrap="square" lIns="320040" rIns="320040" tIns="274320" bIns="274320"/>
           <a:lstStyle/>
           <a:p>
             <a:pPr algn="ctr">
               <a:spcAft>
-                <a:spcPts val="1200"/>
-              </a:spcAft>
-              <a:defRPr sz="1500">
-                <a:solidFill>
-                  <a:srgbClr val="DCE1E6"/>
-                </a:solidFill>
-              </a:defRPr>
-            </a:pPr>
-            <a:r>
-              <a:t>•  Mouse Look 360° με περιορισμό κλίσης (-80° έως +80°) για αποφυγή αποπροσανατολισμού.</a:t>
-            </a:r>
-          </a:p>
-          <a:p>
-            <a:pPr>
-              <a:spcAft>
-                <a:spcPts val="1200"/>
-              </a:spcAft>
-              <a:defRPr sz="1500">
-                <a:solidFill>
-                  <a:srgbClr val="DCE1E6"/>
-                </a:solidFill>
-              </a:defRPr>
-            </a:pPr>
-            <a:r>
-              <a:t>•  Ανεξαρτησία Πληκτρολογίου: Υποστήριξη Physical Keycode (KEY_E) και Left Click για Mac/Windows.</a:t>
-            </a:r>
-          </a:p>
-          <a:p>
-            <a:pPr>
-              <a:spcAft>
-                <a:spcPts val="1200"/>
-              </a:spcAft>
-              <a:defRPr sz="1500">
-                <a:solidFill>
-                  <a:srgbClr val="DCE1E6"/>
-                </a:solidFill>
-              </a:defRPr>
-            </a:pPr>
-            <a:r>
-              <a:t>•  3D Hand Model: Μοντελοποίηση παλάμης με 5 ξεχωριστά δάχτυλα και ρεαλιστικό χρώμα δέρματος.</a:t>
-            </a:r>
-          </a:p>
-          <a:p>
-            <a:pPr>
-              <a:spcAft>
-                <a:spcPts val="1200"/>
-              </a:spcAft>
-              <a:defRPr sz="1500">
-                <a:solidFill>
-                  <a:srgbClr val="DCE1E6"/>
-                </a:solidFill>
-              </a:defRPr>
-            </a:pPr>
-            <a:r>
-              <a:t>•  Hand Reach Tween: Ομαλή κίνηση απλώματος του χεριού προς τα εμπρός σε κάθε αλληλεπίδραση.</a:t>
-            </a:r>
-          </a:p>
-          <a:p>
-            <a:pPr>
-              <a:spcAft>
-                <a:spcPts val="1200"/>
-              </a:spcAft>
-              <a:defRPr sz="1500">
-                <a:solidFill>
-                  <a:srgbClr val="DCE1E6"/>
-                </a:solidFill>
-              </a:defRPr>
-            </a:pPr>
-            <a:r>
-              <a:t>•  Dynamic Crosshair: Αυτόματη μετατροπή του στόχαστρου από '+' σε '🫱' κατά την εστίαση σε αντικείμενα.</a:t>
+                <a:spcPts val="1400"/>
+              </a:spcAft>
+              <a:defRPr sz="1700" b="1">
+                <a:solidFill>
+                  <a:srgbClr val="D4AF37"/>
+                </a:solidFill>
+              </a:defRPr>
+            </a:pPr>
+            <a:r>
+              <a:t>🕹️ Χειρισμός &amp; Κάμερα</a:t>
+            </a:r>
+          </a:p>
+          <a:p>
+            <a:pPr>
+              <a:spcAft>
+                <a:spcPts val="900"/>
+              </a:spcAft>
+              <a:defRPr sz="1300">
+                <a:solidFill>
+                  <a:srgbClr val="DCE2EB"/>
+                </a:solidFill>
+              </a:defRPr>
+            </a:pPr>
+            <a:r>
+              <a:t>• FPS Mouse Look: Περιστροφή κάμερας 360° στον οριζόντιο άξονα.</a:t>
+            </a:r>
+          </a:p>
+          <a:p>
+            <a:pPr>
+              <a:spcAft>
+                <a:spcPts val="900"/>
+              </a:spcAft>
+              <a:defRPr sz="1300">
+                <a:solidFill>
+                  <a:srgbClr val="DCE2EB"/>
+                </a:solidFill>
+              </a:defRPr>
+            </a:pPr>
+            <a:r>
+              <a:t>• Pitch Clamping: Περιορισμός κατακόρυφης κλίσης (-80° έως +80°) για αποφυγή αποπροσανατολισμού.</a:t>
+            </a:r>
+          </a:p>
+          <a:p>
+            <a:pPr>
+              <a:spcAft>
+                <a:spcPts val="900"/>
+              </a:spcAft>
+              <a:defRPr sz="1300">
+                <a:solidFill>
+                  <a:srgbClr val="DCE2EB"/>
+                </a:solidFill>
+              </a:defRPr>
+            </a:pPr>
+            <a:r>
+              <a:t>• Ομαλή Κίνηση: Vector3 normalisation και move_and_slide() με εφαρμογή βαρύτητας.</a:t>
+            </a:r>
+          </a:p>
+          <a:p>
+            <a:pPr>
+              <a:spcAft>
+                <a:spcPts val="900"/>
+              </a:spcAft>
+              <a:defRPr sz="1300">
+                <a:solidFill>
+                  <a:srgbClr val="DCE2EB"/>
+                </a:solidFill>
+              </a:defRPr>
+            </a:pPr>
+            <a:r>
+              <a:t>• Mouse Capture: Αυτόματο κλείδωμα του κέρσορα με αριστερό κλικ &amp; απελευθέρωση με Escape.</a:t>
+            </a:r>
+          </a:p>
+        </p:txBody>
+      </p:sp>
+      <p:sp>
+        <p:nvSpPr>
+          <p:cNvPr id="7" name="Rounded Rectangle 6"/>
+          <p:cNvSpPr/>
+          <p:nvPr/>
+        </p:nvSpPr>
+        <p:spPr>
+          <a:xfrm>
+            <a:off x="6263640" y="1691640"/>
+            <a:ext cx="5166360" cy="4663440"/>
+          </a:xfrm>
+          <a:prstGeom prst="roundRect">
+            <a:avLst/>
+          </a:prstGeom>
+          <a:solidFill>
+            <a:srgbClr val="1C2541"/>
+          </a:solidFill>
+          <a:ln w="12700">
+            <a:solidFill>
+              <a:srgbClr val="4ECDC4"/>
+            </a:solidFill>
+          </a:ln>
+        </p:spPr>
+        <p:style>
+          <a:lnRef idx="1">
+            <a:schemeClr val="accent1"/>
+          </a:lnRef>
+          <a:fillRef idx="3">
+            <a:schemeClr val="accent1"/>
+          </a:fillRef>
+          <a:effectRef idx="2">
+            <a:schemeClr val="accent1"/>
+          </a:effectRef>
+          <a:fontRef idx="minor">
+            <a:schemeClr val="lt1"/>
+          </a:fontRef>
+        </p:style>
+        <p:txBody>
+          <a:bodyPr rtlCol="0" anchor="ctr" wrap="square" lIns="320040" rIns="320040" tIns="274320" bIns="274320"/>
+          <a:lstStyle/>
+          <a:p>
+            <a:pPr algn="ctr">
+              <a:spcAft>
+                <a:spcPts val="1400"/>
+              </a:spcAft>
+              <a:defRPr sz="1700" b="1">
+                <a:solidFill>
+                  <a:srgbClr val="4ECDC4"/>
+                </a:solidFill>
+              </a:defRPr>
+            </a:pPr>
+            <a:r>
+              <a:t>⌨️ Ανεξαρτησία Διάταξης Πληκτρολογίου</a:t>
+            </a:r>
+          </a:p>
+          <a:p>
+            <a:pPr>
+              <a:spcAft>
+                <a:spcPts val="900"/>
+              </a:spcAft>
+              <a:defRPr sz="1300">
+                <a:solidFill>
+                  <a:srgbClr val="DCE2EB"/>
+                </a:solidFill>
+              </a:defRPr>
+            </a:pPr>
+            <a:r>
+              <a:t>• Πρόβλημα: Σε macOS/Windows με ελληνικό πληκτρολόγιο, το πλήκτρο E παράγει διαφορετικό keycode.</a:t>
+            </a:r>
+          </a:p>
+          <a:p>
+            <a:pPr>
+              <a:spcAft>
+                <a:spcPts val="900"/>
+              </a:spcAft>
+              <a:defRPr sz="1300">
+                <a:solidFill>
+                  <a:srgbClr val="DCE2EB"/>
+                </a:solidFill>
+              </a:defRPr>
+            </a:pPr>
+            <a:r>
+              <a:t>• Λύση: Έλεγχος event.physical_keycode == KEY_E (Physical Scancode).</a:t>
+            </a:r>
+          </a:p>
+          <a:p>
+            <a:pPr>
+              <a:spcAft>
+                <a:spcPts val="900"/>
+              </a:spcAft>
+              <a:defRPr sz="1300">
+                <a:solidFill>
+                  <a:srgbClr val="DCE2EB"/>
+                </a:solidFill>
+              </a:defRPr>
+            </a:pPr>
+            <a:r>
+              <a:t>• Διπλή Υποστήριξη: Πλήρης δυνατότητα αλληλεπίδρασης και μέσω Αριστερού Κλικ.</a:t>
+            </a:r>
+          </a:p>
+          <a:p>
+            <a:pPr>
+              <a:spcAft>
+                <a:spcPts val="900"/>
+              </a:spcAft>
+              <a:defRPr sz="1300">
+                <a:solidFill>
+                  <a:srgbClr val="DCE2EB"/>
+                </a:solidFill>
+              </a:defRPr>
+            </a:pPr>
+            <a:r>
+              <a:t>• Αποτέλεσμα: 100% αξιόπιστος χειρισμός ανεξαρτήτως ενεργής γλώσσας συστήματος.</a:t>
             </a:r>
           </a:p>
         </p:txBody>
@@ -5230,12 +9090,10 @@
             <a:avLst/>
           </a:prstGeom>
           <a:solidFill>
-            <a:srgbClr val="121E31"/>
+            <a:srgbClr val="0B132B"/>
           </a:solidFill>
           <a:ln>
-            <a:solidFill>
-              <a:srgbClr val="121E31"/>
-            </a:solidFill>
+            <a:noFill/>
           </a:ln>
         </p:spPr>
         <p:style>
@@ -5269,7 +9127,7 @@
         <p:spPr>
           <a:xfrm>
             <a:off x="0" y="0"/>
-            <a:ext cx="12191695" cy="137160"/>
+            <a:ext cx="12191695" cy="73152"/>
           </a:xfrm>
           <a:prstGeom prst="rect">
             <a:avLst/>
@@ -5278,9 +9136,7 @@
             <a:srgbClr val="D4AF37"/>
           </a:solidFill>
           <a:ln>
-            <a:solidFill>
-              <a:srgbClr val="D4AF37"/>
-            </a:solidFill>
+            <a:noFill/>
           </a:ln>
         </p:spPr>
         <p:style>
@@ -5313,8 +9169,8 @@
         </p:nvSpPr>
         <p:spPr>
           <a:xfrm>
-            <a:off x="731520" y="457200"/>
-            <a:ext cx="10698480" cy="1280160"/>
+            <a:off x="731520" y="320040"/>
+            <a:ext cx="10698480" cy="320040"/>
           </a:xfrm>
           <a:prstGeom prst="rect">
             <a:avLst/>
@@ -5322,52 +9178,87 @@
           <a:noFill/>
         </p:spPr>
         <p:txBody>
+          <a:bodyPr wrap="none">
+            <a:spAutoFit/>
+          </a:bodyPr>
+          <a:lstStyle/>
+          <a:p>
+            <a:pPr>
+              <a:defRPr sz="1100" b="1">
+                <a:solidFill>
+                  <a:srgbClr val="D4AF37"/>
+                </a:solidFill>
+              </a:defRPr>
+            </a:pPr>
+            <a:r>
+              <a:t>ΑΛΛΗΛΕΠΙΔΡΑΣΗ &amp; ΑΙΣΘΗΤΙΚΗ</a:t>
+            </a:r>
+          </a:p>
+        </p:txBody>
+      </p:sp>
+      <p:sp>
+        <p:nvSpPr>
+          <p:cNvPr id="5" name="TextBox 4"/>
+          <p:cNvSpPr txBox="1"/>
+          <p:nvPr/>
+        </p:nvSpPr>
+        <p:spPr>
+          <a:xfrm>
+            <a:off x="731520" y="594360"/>
+            <a:ext cx="10698480" cy="1005840"/>
+          </a:xfrm>
+          <a:prstGeom prst="rect">
+            <a:avLst/>
+          </a:prstGeom>
+          <a:noFill/>
+        </p:spPr>
+        <p:txBody>
           <a:bodyPr wrap="square">
             <a:spAutoFit/>
           </a:bodyPr>
           <a:lstStyle/>
           <a:p>
             <a:pPr>
-              <a:defRPr sz="2800" b="1">
+              <a:defRPr sz="2600" b="1">
                 <a:solidFill>
                   <a:srgbClr val="FFFFFF"/>
                 </a:solidFill>
               </a:defRPr>
             </a:pPr>
             <a:r>
-              <a:t>5. Σύστημα Αλληλεπίδρασης (RayCast &amp; Signals)</a:t>
-            </a:r>
-          </a:p>
-          <a:p>
-            <a:pPr>
-              <a:defRPr sz="1600" i="1">
-                <a:solidFill>
-                  <a:srgbClr val="D4AF37"/>
-                </a:solidFill>
-              </a:defRPr>
-            </a:pPr>
-            <a:r>
-              <a:t>Αποσυζευγμένη Αρχιτεκτονική Συμβάντων (Observer Pattern)</a:t>
-            </a:r>
-          </a:p>
-        </p:txBody>
-      </p:sp>
-      <p:sp>
-        <p:nvSpPr>
-          <p:cNvPr id="5" name="Rounded Rectangle 4"/>
+              <a:t>5. Τρισδιάστατο Χέρι Πρώτου Προσώπου</a:t>
+            </a:r>
+          </a:p>
+          <a:p>
+            <a:pPr>
+              <a:defRPr sz="1400" i="1">
+                <a:solidFill>
+                  <a:srgbClr val="4ECDC4"/>
+                </a:solidFill>
+              </a:defRPr>
+            </a:pPr>
+            <a:r>
+              <a:t>Procedural 3D Hand Model &amp; Animation</a:t>
+            </a:r>
+          </a:p>
+        </p:txBody>
+      </p:sp>
+      <p:sp>
+        <p:nvSpPr>
+          <p:cNvPr id="6" name="Rounded Rectangle 5"/>
           <p:cNvSpPr/>
           <p:nvPr/>
         </p:nvSpPr>
         <p:spPr>
           <a:xfrm>
-            <a:off x="731520" y="1828800"/>
-            <a:ext cx="10698480" cy="4389120"/>
+            <a:off x="731520" y="1691640"/>
+            <a:ext cx="5166360" cy="4663440"/>
           </a:xfrm>
           <a:prstGeom prst="roundRect">
             <a:avLst/>
           </a:prstGeom>
           <a:solidFill>
-            <a:srgbClr val="1C2C46"/>
+            <a:srgbClr val="1C2541"/>
           </a:solidFill>
           <a:ln w="12700">
             <a:solidFill>
@@ -5390,66 +9281,183 @@
           </a:fontRef>
         </p:style>
         <p:txBody>
-          <a:bodyPr rtlCol="0" anchor="ctr" wrap="square" lIns="365760" rIns="365760" tIns="274320" bIns="274320"/>
+          <a:bodyPr rtlCol="0" anchor="ctr" wrap="square" lIns="320040" rIns="320040" tIns="274320" bIns="274320"/>
           <a:lstStyle/>
           <a:p>
             <a:pPr algn="ctr">
               <a:spcAft>
-                <a:spcPts val="1200"/>
-              </a:spcAft>
-              <a:defRPr sz="1500">
-                <a:solidFill>
-                  <a:srgbClr val="DCE1E6"/>
-                </a:solidFill>
-              </a:defRPr>
-            </a:pPr>
-            <a:r>
-              <a:t>•  Κλάση Interactable (interactable.gd): Επέκταση CollisionObject3D για όλα τα διαδραστικά στοιχεία.</a:t>
-            </a:r>
-          </a:p>
-          <a:p>
-            <a:pPr>
-              <a:spcAft>
-                <a:spcPts val="1200"/>
-              </a:spcAft>
-              <a:defRPr sz="1500">
-                <a:solidFill>
-                  <a:srgbClr val="DCE1E6"/>
-                </a:solidFill>
-              </a:defRPr>
-            </a:pPr>
-            <a:r>
-              <a:t>•  Συνεχής έλεγχος μέσω RayCast3D (εμβέλεια 2.5 μέτρων) από το κέντρο της κάμερας.</a:t>
-            </a:r>
-          </a:p>
-          <a:p>
-            <a:pPr>
-              <a:spcAft>
-                <a:spcPts val="1200"/>
-              </a:spcAft>
-              <a:defRPr sz="1500">
-                <a:solidFill>
-                  <a:srgbClr val="DCE1E6"/>
-                </a:solidFill>
-              </a:defRPr>
-            </a:pPr>
-            <a:r>
-              <a:t>•  Εκπομπή σήματος interacted(player) προς τον κεντρικό GameManager.</a:t>
-            </a:r>
-          </a:p>
-          <a:p>
-            <a:pPr>
-              <a:spcAft>
-                <a:spcPts val="1200"/>
-              </a:spcAft>
-              <a:defRPr sz="1500">
-                <a:solidFill>
-                  <a:srgbClr val="DCE1E6"/>
-                </a:solidFill>
-              </a:defRPr>
-            </a:pPr>
-            <a:r>
-              <a:t>•  Δυναμική ανάκτηση και απόδοση μηνυμάτων προτροπής (π.χ. '[E] Pull Book', '[E] Rotate Piece').</a:t>
+                <a:spcPts val="1400"/>
+              </a:spcAft>
+              <a:defRPr sz="1700" b="1">
+                <a:solidFill>
+                  <a:srgbClr val="D4AF37"/>
+                </a:solidFill>
+              </a:defRPr>
+            </a:pPr>
+            <a:r>
+              <a:t>🖐️ Γεωμετρία &amp; Ανατομία Χεριού</a:t>
+            </a:r>
+          </a:p>
+          <a:p>
+            <a:pPr>
+              <a:spcAft>
+                <a:spcPts val="900"/>
+              </a:spcAft>
+              <a:defRPr sz="1300">
+                <a:solidFill>
+                  <a:srgbClr val="DCE2EB"/>
+                </a:solidFill>
+              </a:defRPr>
+            </a:pPr>
+            <a:r>
+              <a:t>• Ανθρώπινη Ανατομία: Κατασκευή παλάμης (BoxMesh) και 5 ξεχωριστών δαχτύλων.</a:t>
+            </a:r>
+          </a:p>
+          <a:p>
+            <a:pPr>
+              <a:spcAft>
+                <a:spcPts val="900"/>
+              </a:spcAft>
+              <a:defRPr sz="1300">
+                <a:solidFill>
+                  <a:srgbClr val="DCE2EB"/>
+                </a:solidFill>
+              </a:defRPr>
+            </a:pPr>
+            <a:r>
+              <a:t>• Αρθρωτός Αντίχειρας: Τοποθέτηση στο πλάι με φυσική κλίση 35°.</a:t>
+            </a:r>
+          </a:p>
+          <a:p>
+            <a:pPr>
+              <a:spcAft>
+                <a:spcPts val="900"/>
+              </a:spcAft>
+              <a:defRPr sz="1300">
+                <a:solidFill>
+                  <a:srgbClr val="DCE2EB"/>
+                </a:solidFill>
+              </a:defRPr>
+            </a:pPr>
+            <a:r>
+              <a:t>• Μανίκι &amp; Δέρμα: Σκούρο μπλε κυλινδρικό μανίκι με ρεαλιστικό ροδακινί/μπεζ τόνο δέρματος.</a:t>
+            </a:r>
+          </a:p>
+          <a:p>
+            <a:pPr>
+              <a:spcAft>
+                <a:spcPts val="900"/>
+              </a:spcAft>
+              <a:defRPr sz="1300">
+                <a:solidFill>
+                  <a:srgbClr val="DCE2EB"/>
+                </a:solidFill>
+              </a:defRPr>
+            </a:pPr>
+            <a:r>
+              <a:t>• Camera Attachment: Τοποθετημένο στο HandPivot της Camera3D για φυσική προοπτική.</a:t>
+            </a:r>
+          </a:p>
+        </p:txBody>
+      </p:sp>
+      <p:sp>
+        <p:nvSpPr>
+          <p:cNvPr id="7" name="Rounded Rectangle 6"/>
+          <p:cNvSpPr/>
+          <p:nvPr/>
+        </p:nvSpPr>
+        <p:spPr>
+          <a:xfrm>
+            <a:off x="6263640" y="1691640"/>
+            <a:ext cx="5166360" cy="4663440"/>
+          </a:xfrm>
+          <a:prstGeom prst="roundRect">
+            <a:avLst/>
+          </a:prstGeom>
+          <a:solidFill>
+            <a:srgbClr val="1C2541"/>
+          </a:solidFill>
+          <a:ln w="12700">
+            <a:solidFill>
+              <a:srgbClr val="4ECDC4"/>
+            </a:solidFill>
+          </a:ln>
+        </p:spPr>
+        <p:style>
+          <a:lnRef idx="1">
+            <a:schemeClr val="accent1"/>
+          </a:lnRef>
+          <a:fillRef idx="3">
+            <a:schemeClr val="accent1"/>
+          </a:fillRef>
+          <a:effectRef idx="2">
+            <a:schemeClr val="accent1"/>
+          </a:effectRef>
+          <a:fontRef idx="minor">
+            <a:schemeClr val="lt1"/>
+          </a:fontRef>
+        </p:style>
+        <p:txBody>
+          <a:bodyPr rtlCol="0" anchor="ctr" wrap="square" lIns="320040" rIns="320040" tIns="274320" bIns="274320"/>
+          <a:lstStyle/>
+          <a:p>
+            <a:pPr algn="ctr">
+              <a:spcAft>
+                <a:spcPts val="1400"/>
+              </a:spcAft>
+              <a:defRPr sz="1700" b="1">
+                <a:solidFill>
+                  <a:srgbClr val="4ECDC4"/>
+                </a:solidFill>
+              </a:defRPr>
+            </a:pPr>
+            <a:r>
+              <a:t>✨ Tween Animation Απλώματος</a:t>
+            </a:r>
+          </a:p>
+          <a:p>
+            <a:pPr>
+              <a:spcAft>
+                <a:spcPts val="900"/>
+              </a:spcAft>
+              <a:defRPr sz="1300">
+                <a:solidFill>
+                  <a:srgbClr val="DCE2EB"/>
+                </a:solidFill>
+              </a:defRPr>
+            </a:pPr>
+            <a:r>
+              <a:t>• Reach Forward: Σε κάθε πάτημα αλληλεπίδρασης, το χέρι κινείται προς τα εμπρός (0.1s).</a:t>
+            </a:r>
+          </a:p>
+          <a:p>
+            <a:pPr>
+              <a:spcAft>
+                <a:spcPts val="900"/>
+              </a:spcAft>
+              <a:defRPr sz="1300">
+                <a:solidFill>
+                  <a:srgbClr val="DCE2EB"/>
+                </a:solidFill>
+              </a:defRPr>
+            </a:pPr>
+            <a:r>
+              <a:t>• Smooth Return: Επιστροφή στην αρχική θέση ηρεμίας (0.15s) με Sine easing.</a:t>
+            </a:r>
+          </a:p>
+          <a:p>
+            <a:pPr>
+              <a:spcAft>
+                <a:spcPts val="900"/>
+              </a:spcAft>
+              <a:defRPr sz="1300">
+                <a:solidFill>
+                  <a:srgbClr val="DCE2EB"/>
+                </a:solidFill>
+              </a:defRPr>
+            </a:pPr>
+            <a:r>
+              <a:t>• Οπτική Επιβεβαίωση: Άμεση και ικανοποιητική αίσθηση ότι ο παίκτης αγγίζει τον κόσμο.</a:t>
             </a:r>
           </a:p>
         </p:txBody>
@@ -5487,12 +9495,10 @@
             <a:avLst/>
           </a:prstGeom>
           <a:solidFill>
-            <a:srgbClr val="121E31"/>
+            <a:srgbClr val="0B132B"/>
           </a:solidFill>
           <a:ln>
-            <a:solidFill>
-              <a:srgbClr val="121E31"/>
-            </a:solidFill>
+            <a:noFill/>
           </a:ln>
         </p:spPr>
         <p:style>
@@ -5526,7 +9532,7 @@
         <p:spPr>
           <a:xfrm>
             <a:off x="0" y="0"/>
-            <a:ext cx="12191695" cy="137160"/>
+            <a:ext cx="12191695" cy="73152"/>
           </a:xfrm>
           <a:prstGeom prst="rect">
             <a:avLst/>
@@ -5535,9 +9541,7 @@
             <a:srgbClr val="D4AF37"/>
           </a:solidFill>
           <a:ln>
-            <a:solidFill>
-              <a:srgbClr val="D4AF37"/>
-            </a:solidFill>
+            <a:noFill/>
           </a:ln>
         </p:spPr>
         <p:style>
@@ -5570,8 +9574,8 @@
         </p:nvSpPr>
         <p:spPr>
           <a:xfrm>
-            <a:off x="731520" y="457200"/>
-            <a:ext cx="10698480" cy="1280160"/>
+            <a:off x="731520" y="320040"/>
+            <a:ext cx="10698480" cy="320040"/>
           </a:xfrm>
           <a:prstGeom prst="rect">
             <a:avLst/>
@@ -5579,52 +9583,87 @@
           <a:noFill/>
         </p:spPr>
         <p:txBody>
+          <a:bodyPr wrap="none">
+            <a:spAutoFit/>
+          </a:bodyPr>
+          <a:lstStyle/>
+          <a:p>
+            <a:pPr>
+              <a:defRPr sz="1100" b="1">
+                <a:solidFill>
+                  <a:srgbClr val="D4AF37"/>
+                </a:solidFill>
+              </a:defRPr>
+            </a:pPr>
+            <a:r>
+              <a:t>ΣΥΣΤΗΜΑ ΑΝΙΧΝΕΥΣΗΣ</a:t>
+            </a:r>
+          </a:p>
+        </p:txBody>
+      </p:sp>
+      <p:sp>
+        <p:nvSpPr>
+          <p:cNvPr id="5" name="TextBox 4"/>
+          <p:cNvSpPr txBox="1"/>
+          <p:nvPr/>
+        </p:nvSpPr>
+        <p:spPr>
+          <a:xfrm>
+            <a:off x="731520" y="594360"/>
+            <a:ext cx="10698480" cy="1005840"/>
+          </a:xfrm>
+          <a:prstGeom prst="rect">
+            <a:avLst/>
+          </a:prstGeom>
+          <a:noFill/>
+        </p:spPr>
+        <p:txBody>
           <a:bodyPr wrap="square">
             <a:spAutoFit/>
           </a:bodyPr>
           <a:lstStyle/>
           <a:p>
             <a:pPr>
-              <a:defRPr sz="2800" b="1">
+              <a:defRPr sz="2600" b="1">
                 <a:solidFill>
                   <a:srgbClr val="FFFFFF"/>
                 </a:solidFill>
               </a:defRPr>
             </a:pPr>
             <a:r>
-              <a:t>6. 1ος Γρίφος: Το Μυστικό Βιβλιοστάσιο</a:t>
-            </a:r>
-          </a:p>
-          <a:p>
-            <a:pPr>
-              <a:defRPr sz="1600" i="1">
-                <a:solidFill>
-                  <a:srgbClr val="D4AF37"/>
-                </a:solidFill>
-              </a:defRPr>
-            </a:pPr>
-            <a:r>
-              <a:t>Αλληλουχία Πανομοιότυπων Βιβλίων</a:t>
-            </a:r>
-          </a:p>
-        </p:txBody>
-      </p:sp>
-      <p:sp>
-        <p:nvSpPr>
-          <p:cNvPr id="5" name="Rounded Rectangle 4"/>
+              <a:t>6. Ανίχνευση Αντικειμένων &amp; Δυναμικό UI</a:t>
+            </a:r>
+          </a:p>
+          <a:p>
+            <a:pPr>
+              <a:defRPr sz="1400" i="1">
+                <a:solidFill>
+                  <a:srgbClr val="4ECDC4"/>
+                </a:solidFill>
+              </a:defRPr>
+            </a:pPr>
+            <a:r>
+              <a:t>RayCast3D, Signals &amp; Adaptive Crosshair</a:t>
+            </a:r>
+          </a:p>
+        </p:txBody>
+      </p:sp>
+      <p:sp>
+        <p:nvSpPr>
+          <p:cNvPr id="6" name="Rounded Rectangle 5"/>
           <p:cNvSpPr/>
           <p:nvPr/>
         </p:nvSpPr>
         <p:spPr>
           <a:xfrm>
-            <a:off x="731520" y="1828800"/>
-            <a:ext cx="10698480" cy="4389120"/>
+            <a:off x="731520" y="1691640"/>
+            <a:ext cx="5166360" cy="4663440"/>
           </a:xfrm>
           <a:prstGeom prst="roundRect">
             <a:avLst/>
           </a:prstGeom>
           <a:solidFill>
-            <a:srgbClr val="1C2C46"/>
+            <a:srgbClr val="1C2541"/>
           </a:solidFill>
           <a:ln w="12700">
             <a:solidFill>
@@ -5647,81 +9686,198 @@
           </a:fontRef>
         </p:style>
         <p:txBody>
-          <a:bodyPr rtlCol="0" anchor="ctr" wrap="square" lIns="365760" rIns="365760" tIns="274320" bIns="274320"/>
+          <a:bodyPr rtlCol="0" anchor="ctr" wrap="square" lIns="320040" rIns="320040" tIns="274320" bIns="274320"/>
           <a:lstStyle/>
           <a:p>
             <a:pPr algn="ctr">
               <a:spcAft>
-                <a:spcPts val="1200"/>
-              </a:spcAft>
-              <a:defRPr sz="1500">
-                <a:solidFill>
-                  <a:srgbClr val="DCE1E6"/>
-                </a:solidFill>
-              </a:defRPr>
-            </a:pPr>
-            <a:r>
-              <a:t>•  3 Πανομοιότυπα Βιβλία (Antique Brown Leather) τοποθετημένα στο ράφι της βιβλιοθήκης.</a:t>
-            </a:r>
-          </a:p>
-          <a:p>
-            <a:pPr>
-              <a:spcAft>
-                <a:spcPts val="1200"/>
-              </a:spcAft>
-              <a:defRPr sz="1500">
-                <a:solidFill>
-                  <a:srgbClr val="DCE1E6"/>
-                </a:solidFill>
-              </a:defRPr>
-            </a:pPr>
-            <a:r>
-              <a:t>•  Μυστική Σειρά Ενεργοποίησης: Αριστερό (1) ➔ Δεξί (3) ➔ Μεσαίο (2).</a:t>
-            </a:r>
-          </a:p>
-          <a:p>
-            <a:pPr>
-              <a:spcAft>
-                <a:spcPts val="1200"/>
-              </a:spcAft>
-              <a:defRPr sz="1500">
-                <a:solidFill>
-                  <a:srgbClr val="DCE1E6"/>
-                </a:solidFill>
-              </a:defRPr>
-            </a:pPr>
-            <a:r>
-              <a:t>•  Ομαλή κλίση των βιβλίων κατά το τράβηγμα μέσω Tween rotation.</a:t>
-            </a:r>
-          </a:p>
-          <a:p>
-            <a:pPr>
-              <a:spcAft>
-                <a:spcPts val="1200"/>
-              </a:spcAft>
-              <a:defRPr sz="1500">
-                <a:solidFill>
-                  <a:srgbClr val="DCE1E6"/>
-                </a:solidFill>
-              </a:defRPr>
-            </a:pPr>
-            <a:r>
-              <a:t>•  Οπτική Ένδειξη: 3 φωτεινοί κρύσταλλοι ανάβουν πράσινοι σε σωστό βήμα ή αναβοσβήνουν κόκκινοι σε λάθος.</a:t>
-            </a:r>
-          </a:p>
-          <a:p>
-            <a:pPr>
-              <a:spcAft>
-                <a:spcPts val="1200"/>
-              </a:spcAft>
-              <a:defRPr sz="1500">
-                <a:solidFill>
-                  <a:srgbClr val="DCE1E6"/>
-                </a:solidFill>
-              </a:defRPr>
-            </a:pPr>
-            <a:r>
-              <a:t>•  Επιτυχία: Αυτόματη αποκάλυψη των εξαρτημάτων του 2ου γρίφου στο τραπέζι.</a:t>
+                <a:spcPts val="1400"/>
+              </a:spcAft>
+              <a:defRPr sz="1700" b="1">
+                <a:solidFill>
+                  <a:srgbClr val="D4AF37"/>
+                </a:solidFill>
+              </a:defRPr>
+            </a:pPr>
+            <a:r>
+              <a:t>🎯 Μηχανισμός RayCast3D</a:t>
+            </a:r>
+          </a:p>
+          <a:p>
+            <a:pPr>
+              <a:spcAft>
+                <a:spcPts val="900"/>
+              </a:spcAft>
+              <a:defRPr sz="1300">
+                <a:solidFill>
+                  <a:srgbClr val="DCE2EB"/>
+                </a:solidFill>
+              </a:defRPr>
+            </a:pPr>
+            <a:r>
+              <a:t>• Ακτίνα Ανίχνευσης: Μήκους 2.5 μέτρων από το κέντρο της κάμερας.</a:t>
+            </a:r>
+          </a:p>
+          <a:p>
+            <a:pPr>
+              <a:spcAft>
+                <a:spcPts val="900"/>
+              </a:spcAft>
+              <a:defRPr sz="1300">
+                <a:solidFill>
+                  <a:srgbClr val="DCE2EB"/>
+                </a:solidFill>
+              </a:defRPr>
+            </a:pPr>
+            <a:r>
+              <a:t>• Κλάση Interactable: Βασική κλάση επέκτασης StaticBody3D με σήμα interacted(player).</a:t>
+            </a:r>
+          </a:p>
+          <a:p>
+            <a:pPr>
+              <a:spcAft>
+                <a:spcPts val="900"/>
+              </a:spcAft>
+              <a:defRPr sz="1300">
+                <a:solidFill>
+                  <a:srgbClr val="DCE2EB"/>
+                </a:solidFill>
+              </a:defRPr>
+            </a:pPr>
+            <a:r>
+              <a:t>• Έλεγχος Εγκυρότητας: Ανίχνευση μεθόδου interact() και κατάστασης is_interactive.</a:t>
+            </a:r>
+          </a:p>
+          <a:p>
+            <a:pPr>
+              <a:spcAft>
+                <a:spcPts val="900"/>
+              </a:spcAft>
+              <a:defRPr sz="1300">
+                <a:solidFill>
+                  <a:srgbClr val="DCE2EB"/>
+                </a:solidFill>
+              </a:defRPr>
+            </a:pPr>
+            <a:r>
+              <a:t>• Αποσύνδεση: Ο παίκτης δεν γνωρίζει τη λογική του αντικειμένου, απλώς καλεί την interact().</a:t>
+            </a:r>
+          </a:p>
+        </p:txBody>
+      </p:sp>
+      <p:sp>
+        <p:nvSpPr>
+          <p:cNvPr id="7" name="Rounded Rectangle 6"/>
+          <p:cNvSpPr/>
+          <p:nvPr/>
+        </p:nvSpPr>
+        <p:spPr>
+          <a:xfrm>
+            <a:off x="6263640" y="1691640"/>
+            <a:ext cx="5166360" cy="4663440"/>
+          </a:xfrm>
+          <a:prstGeom prst="roundRect">
+            <a:avLst/>
+          </a:prstGeom>
+          <a:solidFill>
+            <a:srgbClr val="1C2541"/>
+          </a:solidFill>
+          <a:ln w="12700">
+            <a:solidFill>
+              <a:srgbClr val="4ECDC4"/>
+            </a:solidFill>
+          </a:ln>
+        </p:spPr>
+        <p:style>
+          <a:lnRef idx="1">
+            <a:schemeClr val="accent1"/>
+          </a:lnRef>
+          <a:fillRef idx="3">
+            <a:schemeClr val="accent1"/>
+          </a:fillRef>
+          <a:effectRef idx="2">
+            <a:schemeClr val="accent1"/>
+          </a:effectRef>
+          <a:fontRef idx="minor">
+            <a:schemeClr val="lt1"/>
+          </a:fontRef>
+        </p:style>
+        <p:txBody>
+          <a:bodyPr rtlCol="0" anchor="ctr" wrap="square" lIns="320040" rIns="320040" tIns="274320" bIns="274320"/>
+          <a:lstStyle/>
+          <a:p>
+            <a:pPr algn="ctr">
+              <a:spcAft>
+                <a:spcPts val="1400"/>
+              </a:spcAft>
+              <a:defRPr sz="1700" b="1">
+                <a:solidFill>
+                  <a:srgbClr val="4ECDC4"/>
+                </a:solidFill>
+              </a:defRPr>
+            </a:pPr>
+            <a:r>
+              <a:t>👁️ Δυναμικό UI Στόχαστρο</a:t>
+            </a:r>
+          </a:p>
+          <a:p>
+            <a:pPr>
+              <a:spcAft>
+                <a:spcPts val="900"/>
+              </a:spcAft>
+              <a:defRPr sz="1300">
+                <a:solidFill>
+                  <a:srgbClr val="DCE2EB"/>
+                </a:solidFill>
+              </a:defRPr>
+            </a:pPr>
+            <a:r>
+              <a:t>• Κατάσταση Ηρεμίας: Διακριτικό κεντρικό στόχαστρο σταυρού (+).</a:t>
+            </a:r>
+          </a:p>
+          <a:p>
+            <a:pPr>
+              <a:spcAft>
+                <a:spcPts val="900"/>
+              </a:spcAft>
+              <a:defRPr sz="1300">
+                <a:solidFill>
+                  <a:srgbClr val="DCE2EB"/>
+                </a:solidFill>
+              </a:defRPr>
+            </a:pPr>
+            <a:r>
+              <a:t>• Κατάσταση Εστίασης: Αυτόματη μετατροπή σε εικονίδιο χεριού (🫱) όταν σημαδεύουμε αντικείμενο.</a:t>
+            </a:r>
+          </a:p>
+          <a:p>
+            <a:pPr>
+              <a:spcAft>
+                <a:spcPts val="900"/>
+              </a:spcAft>
+              <a:defRPr sz="1300">
+                <a:solidFill>
+                  <a:srgbClr val="DCE2EB"/>
+                </a:solidFill>
+              </a:defRPr>
+            </a:pPr>
+            <a:r>
+              <a:t>• Interaction Prompt: Εμφάνιση προτροπής context (π.χ. '[E] Pull Book', '[E] Rotate Piece').</a:t>
+            </a:r>
+          </a:p>
+          <a:p>
+            <a:pPr>
+              <a:spcAft>
+                <a:spcPts val="900"/>
+              </a:spcAft>
+              <a:defRPr sz="1300">
+                <a:solidFill>
+                  <a:srgbClr val="DCE2EB"/>
+                </a:solidFill>
+              </a:defRPr>
+            </a:pPr>
+            <a:r>
+              <a:t>• Καθαρότητα: Αυτόματη απόκρυψη όταν ο παίκτης απομακρύνεται.</a:t>
             </a:r>
           </a:p>
         </p:txBody>
@@ -5759,12 +9915,10 @@
             <a:avLst/>
           </a:prstGeom>
           <a:solidFill>
-            <a:srgbClr val="121E31"/>
+            <a:srgbClr val="0B132B"/>
           </a:solidFill>
           <a:ln>
-            <a:solidFill>
-              <a:srgbClr val="121E31"/>
-            </a:solidFill>
+            <a:noFill/>
           </a:ln>
         </p:spPr>
         <p:style>
@@ -5798,7 +9952,7 @@
         <p:spPr>
           <a:xfrm>
             <a:off x="0" y="0"/>
-            <a:ext cx="12191695" cy="137160"/>
+            <a:ext cx="12191695" cy="73152"/>
           </a:xfrm>
           <a:prstGeom prst="rect">
             <a:avLst/>
@@ -5807,9 +9961,7 @@
             <a:srgbClr val="D4AF37"/>
           </a:solidFill>
           <a:ln>
-            <a:solidFill>
-              <a:srgbClr val="D4AF37"/>
-            </a:solidFill>
+            <a:noFill/>
           </a:ln>
         </p:spPr>
         <p:style>
@@ -5842,8 +9994,8 @@
         </p:nvSpPr>
         <p:spPr>
           <a:xfrm>
-            <a:off x="731520" y="457200"/>
-            <a:ext cx="10698480" cy="1280160"/>
+            <a:off x="731520" y="320040"/>
+            <a:ext cx="10698480" cy="320040"/>
           </a:xfrm>
           <a:prstGeom prst="rect">
             <a:avLst/>
@@ -5851,52 +10003,87 @@
           <a:noFill/>
         </p:spPr>
         <p:txBody>
+          <a:bodyPr wrap="none">
+            <a:spAutoFit/>
+          </a:bodyPr>
+          <a:lstStyle/>
+          <a:p>
+            <a:pPr>
+              <a:defRPr sz="1100" b="1">
+                <a:solidFill>
+                  <a:srgbClr val="D4AF37"/>
+                </a:solidFill>
+              </a:defRPr>
+            </a:pPr>
+            <a:r>
+              <a:t>1ΟΣ ΓΡΙΦΟΣ</a:t>
+            </a:r>
+          </a:p>
+        </p:txBody>
+      </p:sp>
+      <p:sp>
+        <p:nvSpPr>
+          <p:cNvPr id="5" name="TextBox 4"/>
+          <p:cNvSpPr txBox="1"/>
+          <p:nvPr/>
+        </p:nvSpPr>
+        <p:spPr>
+          <a:xfrm>
+            <a:off x="731520" y="594360"/>
+            <a:ext cx="10698480" cy="1005840"/>
+          </a:xfrm>
+          <a:prstGeom prst="rect">
+            <a:avLst/>
+          </a:prstGeom>
+          <a:noFill/>
+        </p:spPr>
+        <p:txBody>
           <a:bodyPr wrap="square">
             <a:spAutoFit/>
           </a:bodyPr>
           <a:lstStyle/>
           <a:p>
             <a:pPr>
-              <a:defRPr sz="2800" b="1">
+              <a:defRPr sz="2600" b="1">
                 <a:solidFill>
                   <a:srgbClr val="FFFFFF"/>
                 </a:solidFill>
               </a:defRPr>
             </a:pPr>
             <a:r>
-              <a:t>7. 2ος Γρίφος: Το Γεωμετρικό Παζλ Τριγώνου</a:t>
-            </a:r>
-          </a:p>
-          <a:p>
-            <a:pPr>
-              <a:defRPr sz="1600" i="1">
-                <a:solidFill>
-                  <a:srgbClr val="D4AF37"/>
-                </a:solidFill>
-              </a:defRPr>
-            </a:pPr>
-            <a:r>
-              <a:t>Έξυπνος Αλγόριθμος Μεταθέσεων &amp; Συμμετρίας</a:t>
-            </a:r>
-          </a:p>
-        </p:txBody>
-      </p:sp>
-      <p:sp>
-        <p:nvSpPr>
-          <p:cNvPr id="5" name="Rounded Rectangle 4"/>
+              <a:t>7. 1ος Γρίφος: Το Μυστικό Βιβλιοστάσιο</a:t>
+            </a:r>
+          </a:p>
+          <a:p>
+            <a:pPr>
+              <a:defRPr sz="1400" i="1">
+                <a:solidFill>
+                  <a:srgbClr val="4ECDC4"/>
+                </a:solidFill>
+              </a:defRPr>
+            </a:pPr>
+            <a:r>
+              <a:t>Αλληλουχία Πανομοιότυπων Βιβλίων &amp; Οπτική Ανατροφοδότηση</a:t>
+            </a:r>
+          </a:p>
+        </p:txBody>
+      </p:sp>
+      <p:sp>
+        <p:nvSpPr>
+          <p:cNvPr id="6" name="Rounded Rectangle 5"/>
           <p:cNvSpPr/>
           <p:nvPr/>
         </p:nvSpPr>
         <p:spPr>
           <a:xfrm>
-            <a:off x="731520" y="1828800"/>
-            <a:ext cx="10698480" cy="4389120"/>
+            <a:off x="731520" y="1691640"/>
+            <a:ext cx="5166360" cy="4663440"/>
           </a:xfrm>
           <a:prstGeom prst="roundRect">
             <a:avLst/>
           </a:prstGeom>
           <a:solidFill>
-            <a:srgbClr val="1C2C46"/>
+            <a:srgbClr val="1C2541"/>
           </a:solidFill>
           <a:ln w="12700">
             <a:solidFill>
@@ -5919,81 +10106,198 @@
           </a:fontRef>
         </p:style>
         <p:txBody>
-          <a:bodyPr rtlCol="0" anchor="ctr" wrap="square" lIns="365760" rIns="365760" tIns="274320" bIns="274320"/>
+          <a:bodyPr rtlCol="0" anchor="ctr" wrap="square" lIns="320040" rIns="320040" tIns="274320" bIns="274320"/>
           <a:lstStyle/>
           <a:p>
             <a:pPr algn="ctr">
               <a:spcAft>
-                <a:spcPts val="1200"/>
-              </a:spcAft>
-              <a:defRPr sz="1500">
-                <a:solidFill>
-                  <a:srgbClr val="DCE1E6"/>
-                </a:solidFill>
-              </a:defRPr>
-            </a:pPr>
-            <a:r>
-              <a:t>•  Εμφάνιση 3 χρυσών ράβδων πάνω στο κεντρικό ξύλινο τραπέζι σε τυχαίες αρχικές γωνίες.</a:t>
-            </a:r>
-          </a:p>
-          <a:p>
-            <a:pPr>
-              <a:spcAft>
-                <a:spcPts val="1200"/>
-              </a:spcAft>
-              <a:defRPr sz="1500">
-                <a:solidFill>
-                  <a:srgbClr val="DCE1E6"/>
-                </a:solidFill>
-              </a:defRPr>
-            </a:pPr>
-            <a:r>
-              <a:t>•  Περιστροφή ανά 60°: Κάθε πάτημα περιστρέφει τη στοχευμένη ράβδο flat πάνω στο τραπέζι.</a:t>
-            </a:r>
-          </a:p>
-          <a:p>
-            <a:pPr>
-              <a:spcAft>
-                <a:spcPts val="1200"/>
-              </a:spcAft>
-              <a:defRPr sz="1500">
-                <a:solidFill>
-                  <a:srgbClr val="DCE1E6"/>
-                </a:solidFill>
-              </a:defRPr>
-            </a:pPr>
-            <a:r>
-              <a:t>•  Αλγόριθμος check_triangle_puzzle(): Ταξινόμηση γωνιών σε 3 κλάσεις (Οριζόντια, Slash /, Backslash \).</a:t>
-            </a:r>
-          </a:p>
-          <a:p>
-            <a:pPr>
-              <a:spcAft>
-                <a:spcPts val="1200"/>
-              </a:spcAft>
-              <a:defRPr sz="1500">
-                <a:solidFill>
-                  <a:srgbClr val="DCE1E6"/>
-                </a:solidFill>
-              </a:defRPr>
-            </a:pPr>
-            <a:r>
-              <a:t>•  Υποστήριξη Συμμετρίας 180°: Αποδοχή οποιασδήποτε έγκυρης γεωμετρικής σύνθεσης τριγώνου.</a:t>
-            </a:r>
-          </a:p>
-          <a:p>
-            <a:pPr>
-              <a:spcAft>
-                <a:spcPts val="1200"/>
-              </a:spcAft>
-              <a:defRPr sz="1500">
-                <a:solidFill>
-                  <a:srgbClr val="DCE1E6"/>
-                </a:solidFill>
-              </a:defRPr>
-            </a:pPr>
-            <a:r>
-              <a:t>•  Επίλυση: Ξεκλείδωμα του χρυσού οικοσήμου και πράσινη ένδειξη εξόδου.</a:t>
+                <a:spcPts val="1400"/>
+              </a:spcAft>
+              <a:defRPr sz="1700" b="1">
+                <a:solidFill>
+                  <a:srgbClr val="D4AF37"/>
+                </a:solidFill>
+              </a:defRPr>
+            </a:pPr>
+            <a:r>
+              <a:t>📚 Μηχανισμός Βιβλιοθήκης</a:t>
+            </a:r>
+          </a:p>
+          <a:p>
+            <a:pPr>
+              <a:spcAft>
+                <a:spcPts val="900"/>
+              </a:spcAft>
+              <a:defRPr sz="1300">
+                <a:solidFill>
+                  <a:srgbClr val="DCE2EB"/>
+                </a:solidFill>
+              </a:defRPr>
+            </a:pPr>
+            <a:r>
+              <a:t>• 3 Πανομοιότυπα Βιβλία: Ενιαία εμφάνιση παλαιωμένου καφέ δέρματος (Antique Brown Leather).</a:t>
+            </a:r>
+          </a:p>
+          <a:p>
+            <a:pPr>
+              <a:spcAft>
+                <a:spcPts val="900"/>
+              </a:spcAft>
+              <a:defRPr sz="1300">
+                <a:solidFill>
+                  <a:srgbClr val="DCE2EB"/>
+                </a:solidFill>
+              </a:defRPr>
+            </a:pPr>
+            <a:r>
+              <a:t>• Κοινή Προτροπή: Όλα εμφανίζουν [E] Pull Book για να μην προδίδουν τη λύση.</a:t>
+            </a:r>
+          </a:p>
+          <a:p>
+            <a:pPr>
+              <a:spcAft>
+                <a:spcPts val="900"/>
+              </a:spcAft>
+              <a:defRPr sz="1300">
+                <a:solidFill>
+                  <a:srgbClr val="DCE2EB"/>
+                </a:solidFill>
+              </a:defRPr>
+            </a:pPr>
+            <a:r>
+              <a:t>• Σωστή Σειρά Ενεργοποίησης: Αριστερό (1) ➔ Δεξί (3) ➔ Μεσαίο (2).</a:t>
+            </a:r>
+          </a:p>
+          <a:p>
+            <a:pPr>
+              <a:spcAft>
+                <a:spcPts val="900"/>
+              </a:spcAft>
+              <a:defRPr sz="1300">
+                <a:solidFill>
+                  <a:srgbClr val="DCE2EB"/>
+                </a:solidFill>
+              </a:defRPr>
+            </a:pPr>
+            <a:r>
+              <a:t>• Κλίση Βιβλίου: Κάθε επιλεγμένο βιβλίο περιστρέφεται ομαλά (Tween) προς τα έξω.</a:t>
+            </a:r>
+          </a:p>
+        </p:txBody>
+      </p:sp>
+      <p:sp>
+        <p:nvSpPr>
+          <p:cNvPr id="7" name="Rounded Rectangle 6"/>
+          <p:cNvSpPr/>
+          <p:nvPr/>
+        </p:nvSpPr>
+        <p:spPr>
+          <a:xfrm>
+            <a:off x="6263640" y="1691640"/>
+            <a:ext cx="5166360" cy="4663440"/>
+          </a:xfrm>
+          <a:prstGeom prst="roundRect">
+            <a:avLst/>
+          </a:prstGeom>
+          <a:solidFill>
+            <a:srgbClr val="1C2541"/>
+          </a:solidFill>
+          <a:ln w="12700">
+            <a:solidFill>
+              <a:srgbClr val="4ECDC4"/>
+            </a:solidFill>
+          </a:ln>
+        </p:spPr>
+        <p:style>
+          <a:lnRef idx="1">
+            <a:schemeClr val="accent1"/>
+          </a:lnRef>
+          <a:fillRef idx="3">
+            <a:schemeClr val="accent1"/>
+          </a:fillRef>
+          <a:effectRef idx="2">
+            <a:schemeClr val="accent1"/>
+          </a:effectRef>
+          <a:fontRef idx="minor">
+            <a:schemeClr val="lt1"/>
+          </a:fontRef>
+        </p:style>
+        <p:txBody>
+          <a:bodyPr rtlCol="0" anchor="ctr" wrap="square" lIns="320040" rIns="320040" tIns="274320" bIns="274320"/>
+          <a:lstStyle/>
+          <a:p>
+            <a:pPr algn="ctr">
+              <a:spcAft>
+                <a:spcPts val="1400"/>
+              </a:spcAft>
+              <a:defRPr sz="1700" b="1">
+                <a:solidFill>
+                  <a:srgbClr val="4ECDC4"/>
+                </a:solidFill>
+              </a:defRPr>
+            </a:pPr>
+            <a:r>
+              <a:t>💎 Φωτεινοί Κρύσταλλοι Ένδειξης</a:t>
+            </a:r>
+          </a:p>
+          <a:p>
+            <a:pPr>
+              <a:spcAft>
+                <a:spcPts val="900"/>
+              </a:spcAft>
+              <a:defRPr sz="1300">
+                <a:solidFill>
+                  <a:srgbClr val="DCE2EB"/>
+                </a:solidFill>
+              </a:defRPr>
+            </a:pPr>
+            <a:r>
+              <a:t>• 3 Ενσωματωμένοι Κρύσταλλοι πάνω από τη βιβλιοθήκη με Emission shaders.</a:t>
+            </a:r>
+          </a:p>
+          <a:p>
+            <a:pPr>
+              <a:spcAft>
+                <a:spcPts val="900"/>
+              </a:spcAft>
+              <a:defRPr sz="1300">
+                <a:solidFill>
+                  <a:srgbClr val="DCE2EB"/>
+                </a:solidFill>
+              </a:defRPr>
+            </a:pPr>
+            <a:r>
+              <a:t>• Σωστό Βήμα: Ο αντίστοιχος κρύσταλλος ανάβει μόνιμα πράσινος.</a:t>
+            </a:r>
+          </a:p>
+          <a:p>
+            <a:pPr>
+              <a:spcAft>
+                <a:spcPts val="900"/>
+              </a:spcAft>
+              <a:defRPr sz="1300">
+                <a:solidFill>
+                  <a:srgbClr val="DCE2EB"/>
+                </a:solidFill>
+              </a:defRPr>
+            </a:pPr>
+            <a:r>
+              <a:t>• Λάθος Βήμα: Όλοι οι κρύσταλλοι αναβοσβήνουν κόκκινοι και η σειρά μηδενίζεται.</a:t>
+            </a:r>
+          </a:p>
+          <a:p>
+            <a:pPr>
+              <a:spcAft>
+                <a:spcPts val="900"/>
+              </a:spcAft>
+              <a:defRPr sz="1300">
+                <a:solidFill>
+                  <a:srgbClr val="DCE2EB"/>
+                </a:solidFill>
+              </a:defRPr>
+            </a:pPr>
+            <a:r>
+              <a:t>• Επίλυση: Αυτόματη εμφάνιση του 2ου γρίφου στο κεντρικό τραπέζι.</a:t>
             </a:r>
           </a:p>
         </p:txBody>
@@ -6031,12 +10335,10 @@
             <a:avLst/>
           </a:prstGeom>
           <a:solidFill>
-            <a:srgbClr val="121E31"/>
+            <a:srgbClr val="0B132B"/>
           </a:solidFill>
           <a:ln>
-            <a:solidFill>
-              <a:srgbClr val="121E31"/>
-            </a:solidFill>
+            <a:noFill/>
           </a:ln>
         </p:spPr>
         <p:style>
@@ -6070,7 +10372,7 @@
         <p:spPr>
           <a:xfrm>
             <a:off x="0" y="0"/>
-            <a:ext cx="12191695" cy="137160"/>
+            <a:ext cx="12191695" cy="73152"/>
           </a:xfrm>
           <a:prstGeom prst="rect">
             <a:avLst/>
@@ -6079,9 +10381,7 @@
             <a:srgbClr val="D4AF37"/>
           </a:solidFill>
           <a:ln>
-            <a:solidFill>
-              <a:srgbClr val="D4AF37"/>
-            </a:solidFill>
+            <a:noFill/>
           </a:ln>
         </p:spPr>
         <p:style>
@@ -6114,8 +10414,8 @@
         </p:nvSpPr>
         <p:spPr>
           <a:xfrm>
-            <a:off x="731520" y="457200"/>
-            <a:ext cx="10698480" cy="1280160"/>
+            <a:off x="731520" y="320040"/>
+            <a:ext cx="10698480" cy="320040"/>
           </a:xfrm>
           <a:prstGeom prst="rect">
             <a:avLst/>
@@ -6123,52 +10423,87 @@
           <a:noFill/>
         </p:spPr>
         <p:txBody>
+          <a:bodyPr wrap="none">
+            <a:spAutoFit/>
+          </a:bodyPr>
+          <a:lstStyle/>
+          <a:p>
+            <a:pPr>
+              <a:defRPr sz="1100" b="1">
+                <a:solidFill>
+                  <a:srgbClr val="D4AF37"/>
+                </a:solidFill>
+              </a:defRPr>
+            </a:pPr>
+            <a:r>
+              <a:t>2ΟΣ ΓΡΙΦΟΣ</a:t>
+            </a:r>
+          </a:p>
+        </p:txBody>
+      </p:sp>
+      <p:sp>
+        <p:nvSpPr>
+          <p:cNvPr id="5" name="TextBox 4"/>
+          <p:cNvSpPr txBox="1"/>
+          <p:nvPr/>
+        </p:nvSpPr>
+        <p:spPr>
+          <a:xfrm>
+            <a:off x="731520" y="594360"/>
+            <a:ext cx="10698480" cy="1005840"/>
+          </a:xfrm>
+          <a:prstGeom prst="rect">
+            <a:avLst/>
+          </a:prstGeom>
+          <a:noFill/>
+        </p:spPr>
+        <p:txBody>
           <a:bodyPr wrap="square">
             <a:spAutoFit/>
           </a:bodyPr>
           <a:lstStyle/>
           <a:p>
             <a:pPr>
-              <a:defRPr sz="2800" b="1">
+              <a:defRPr sz="2600" b="1">
                 <a:solidFill>
                   <a:srgbClr val="FFFFFF"/>
                 </a:solidFill>
               </a:defRPr>
             </a:pPr>
             <a:r>
-              <a:t>8. Μηχανισμός Εξόδου &amp; Τερματισμός</a:t>
-            </a:r>
-          </a:p>
-          <a:p>
-            <a:pPr>
-              <a:defRPr sz="1600" i="1">
-                <a:solidFill>
-                  <a:srgbClr val="D4AF37"/>
-                </a:solidFill>
-              </a:defRPr>
-            </a:pPr>
-            <a:r>
-              <a:t>Ολοκλήρωση της Εμπειρίας Απόδρασης</a:t>
-            </a:r>
-          </a:p>
-        </p:txBody>
-      </p:sp>
-      <p:sp>
-        <p:nvSpPr>
-          <p:cNvPr id="5" name="Rounded Rectangle 4"/>
+              <a:t>8. 2ος Γρίφος: Το Γεωμετρικό Παζλ Τριγώνου</a:t>
+            </a:r>
+          </a:p>
+          <a:p>
+            <a:pPr>
+              <a:defRPr sz="1400" i="1">
+                <a:solidFill>
+                  <a:srgbClr val="4ECDC4"/>
+                </a:solidFill>
+              </a:defRPr>
+            </a:pPr>
+            <a:r>
+              <a:t>Έξυπνος Αλγόριθμος Μεταθέσεων &amp; Συμμετρίας 180°</a:t>
+            </a:r>
+          </a:p>
+        </p:txBody>
+      </p:sp>
+      <p:sp>
+        <p:nvSpPr>
+          <p:cNvPr id="6" name="Rounded Rectangle 5"/>
           <p:cNvSpPr/>
           <p:nvPr/>
         </p:nvSpPr>
         <p:spPr>
           <a:xfrm>
-            <a:off x="731520" y="1828800"/>
-            <a:ext cx="10698480" cy="4389120"/>
+            <a:off x="731520" y="1691640"/>
+            <a:ext cx="5166360" cy="4663440"/>
           </a:xfrm>
           <a:prstGeom prst="roundRect">
             <a:avLst/>
           </a:prstGeom>
           <a:solidFill>
-            <a:srgbClr val="1C2C46"/>
+            <a:srgbClr val="1C2541"/>
           </a:solidFill>
           <a:ln w="12700">
             <a:solidFill>
@@ -6191,66 +10526,198 @@
           </a:fontRef>
         </p:style>
         <p:txBody>
-          <a:bodyPr rtlCol="0" anchor="ctr" wrap="square" lIns="365760" rIns="365760" tIns="274320" bIns="274320"/>
+          <a:bodyPr rtlCol="0" anchor="ctr" wrap="square" lIns="320040" rIns="320040" tIns="274320" bIns="274320"/>
           <a:lstStyle/>
           <a:p>
             <a:pPr algn="ctr">
               <a:spcAft>
-                <a:spcPts val="1200"/>
-              </a:spcAft>
-              <a:defRPr sz="1500">
-                <a:solidFill>
-                  <a:srgbClr val="DCE1E6"/>
-                </a:solidFill>
-              </a:defRPr>
-            </a:pPr>
-            <a:r>
-              <a:t>•  Ενεργοποίηση του Secret Crest στον τοίχο ('[E] Turn Secret Crest').</a:t>
-            </a:r>
-          </a:p>
-          <a:p>
-            <a:pPr>
-              <a:spcAft>
-                <a:spcPts val="1200"/>
-              </a:spcAft>
-              <a:defRPr sz="1500">
-                <a:solidFill>
-                  <a:srgbClr val="DCE1E6"/>
-                </a:solidFill>
-              </a:defRPr>
-            </a:pPr>
-            <a:r>
-              <a:t>•  Ομαλό άνοιγμα της μυστικής βιβλιοθήκης-πόρτας κατά 90° (1.5s Ease-Out Tween).</a:t>
-            </a:r>
-          </a:p>
-          <a:p>
-            <a:pPr>
-              <a:spcAft>
-                <a:spcPts val="1200"/>
-              </a:spcAft>
-              <a:defRPr sz="1500">
-                <a:solidFill>
-                  <a:srgbClr val="DCE1E6"/>
-                </a:solidFill>
-              </a:defRPr>
-            </a:pPr>
-            <a:r>
-              <a:t>•  Ανίχνευση διαφυγής μέσω Area3D (body_entered signal).</a:t>
-            </a:r>
-          </a:p>
-          <a:p>
-            <a:pPr>
-              <a:spcAft>
-                <a:spcPts val="1200"/>
-              </a:spcAft>
-              <a:defRPr sz="1500">
-                <a:solidFill>
-                  <a:srgbClr val="DCE1E6"/>
-                </a:solidFill>
-              </a:defRPr>
-            </a:pPr>
-            <a:r>
-              <a:t>•  Εμφάνιση οθόνης νίκης ('Συγχαρητήρια! Απέδρασες!') και αυτόματος τερματισμός (get_tree().quit()) μετά από 3s.</a:t>
+                <a:spcPts val="1400"/>
+              </a:spcAft>
+              <a:defRPr sz="1700" b="1">
+                <a:solidFill>
+                  <a:srgbClr val="D4AF37"/>
+                </a:solidFill>
+              </a:defRPr>
+            </a:pPr>
+            <a:r>
+              <a:t>📐 Το Τραπέζι &amp; οι 3 Χρυσές Ράβδοι</a:t>
+            </a:r>
+          </a:p>
+          <a:p>
+            <a:pPr>
+              <a:spcAft>
+                <a:spcPts val="900"/>
+              </a:spcAft>
+              <a:defRPr sz="1300">
+                <a:solidFill>
+                  <a:srgbClr val="DCE2EB"/>
+                </a:solidFill>
+              </a:defRPr>
+            </a:pPr>
+            <a:r>
+              <a:t>• Εμφάνιση Παζλ: Εμφανίζονται 3 χρυσές μπρούτζινες ράβδοι στο κεντρικό ξύλινο τραπέζι.</a:t>
+            </a:r>
+          </a:p>
+          <a:p>
+            <a:pPr>
+              <a:spcAft>
+                <a:spcPts val="900"/>
+              </a:spcAft>
+              <a:defRPr sz="1300">
+                <a:solidFill>
+                  <a:srgbClr val="DCE2EB"/>
+                </a:solidFill>
+              </a:defRPr>
+            </a:pPr>
+            <a:r>
+              <a:t>• Τυχαίες Αρχικές Γωνίες: Οι ράβδοι ξεκινούν ανακατεμένες (120°, 0°, 60°).</a:t>
+            </a:r>
+          </a:p>
+          <a:p>
+            <a:pPr>
+              <a:spcAft>
+                <a:spcPts val="900"/>
+              </a:spcAft>
+              <a:defRPr sz="1300">
+                <a:solidFill>
+                  <a:srgbClr val="DCE2EB"/>
+                </a:solidFill>
+              </a:defRPr>
+            </a:pPr>
+            <a:r>
+              <a:t>• Περιστροφή ανά 60°: Κάθε αλληλεπίδραση περιστρέφει τη ράβδο flat πάνω στο τραπέζι.</a:t>
+            </a:r>
+          </a:p>
+          <a:p>
+            <a:pPr>
+              <a:spcAft>
+                <a:spcPts val="900"/>
+              </a:spcAft>
+              <a:defRPr sz="1300">
+                <a:solidFill>
+                  <a:srgbClr val="DCE2EB"/>
+                </a:solidFill>
+              </a:defRPr>
+            </a:pPr>
+            <a:r>
+              <a:t>• Στόχος: Ευθυγράμμιση των ράβδων ώστε να σχηματίσουν ένα πλήρες τρίγωνο.</a:t>
+            </a:r>
+          </a:p>
+        </p:txBody>
+      </p:sp>
+      <p:sp>
+        <p:nvSpPr>
+          <p:cNvPr id="7" name="Rounded Rectangle 6"/>
+          <p:cNvSpPr/>
+          <p:nvPr/>
+        </p:nvSpPr>
+        <p:spPr>
+          <a:xfrm>
+            <a:off x="6263640" y="1691640"/>
+            <a:ext cx="5166360" cy="4663440"/>
+          </a:xfrm>
+          <a:prstGeom prst="roundRect">
+            <a:avLst/>
+          </a:prstGeom>
+          <a:solidFill>
+            <a:srgbClr val="1C2541"/>
+          </a:solidFill>
+          <a:ln w="12700">
+            <a:solidFill>
+              <a:srgbClr val="4ECDC4"/>
+            </a:solidFill>
+          </a:ln>
+        </p:spPr>
+        <p:style>
+          <a:lnRef idx="1">
+            <a:schemeClr val="accent1"/>
+          </a:lnRef>
+          <a:fillRef idx="3">
+            <a:schemeClr val="accent1"/>
+          </a:fillRef>
+          <a:effectRef idx="2">
+            <a:schemeClr val="accent1"/>
+          </a:effectRef>
+          <a:fontRef idx="minor">
+            <a:schemeClr val="lt1"/>
+          </a:fontRef>
+        </p:style>
+        <p:txBody>
+          <a:bodyPr rtlCol="0" anchor="ctr" wrap="square" lIns="320040" rIns="320040" tIns="274320" bIns="274320"/>
+          <a:lstStyle/>
+          <a:p>
+            <a:pPr algn="ctr">
+              <a:spcAft>
+                <a:spcPts val="1400"/>
+              </a:spcAft>
+              <a:defRPr sz="1700" b="1">
+                <a:solidFill>
+                  <a:srgbClr val="4ECDC4"/>
+                </a:solidFill>
+              </a:defRPr>
+            </a:pPr>
+            <a:r>
+              <a:t>🧠 Αλγόριθμος check_triangle_puzzle()</a:t>
+            </a:r>
+          </a:p>
+          <a:p>
+            <a:pPr>
+              <a:spcAft>
+                <a:spcPts val="900"/>
+              </a:spcAft>
+              <a:defRPr sz="1300">
+                <a:solidFill>
+                  <a:srgbClr val="DCE2EB"/>
+                </a:solidFill>
+              </a:defRPr>
+            </a:pPr>
+            <a:r>
+              <a:t>• Ταξινόμηση σε 3 Τύπους: Οριζόντια (0°/180°), Slash / (60°/240°), Backslash \ (120°/300°).</a:t>
+            </a:r>
+          </a:p>
+          <a:p>
+            <a:pPr>
+              <a:spcAft>
+                <a:spcPts val="900"/>
+              </a:spcAft>
+              <a:defRPr sz="1300">
+                <a:solidFill>
+                  <a:srgbClr val="DCE2EB"/>
+                </a:solidFill>
+              </a:defRPr>
+            </a:pPr>
+            <a:r>
+              <a:t>• Υποστήριξη Συμμετρίας: Επειδή οι ράβδοι είναι ορθογώνιες, οι 180° μοιάζουν πανομοιότυπες.</a:t>
+            </a:r>
+          </a:p>
+          <a:p>
+            <a:pPr>
+              <a:spcAft>
+                <a:spcPts val="900"/>
+              </a:spcAft>
+              <a:defRPr sz="1300">
+                <a:solidFill>
+                  <a:srgbClr val="DCE2EB"/>
+                </a:solidFill>
+              </a:defRPr>
+            </a:pPr>
+            <a:r>
+              <a:t>• Έλεγχος Μεταθέσεων: Το παζλ λύνεται αν υπάρχει ακριβώς μία ράβδος από κάθε τύπο (types == [0,1,2]).</a:t>
+            </a:r>
+          </a:p>
+          <a:p>
+            <a:pPr>
+              <a:spcAft>
+                <a:spcPts val="900"/>
+              </a:spcAft>
+              <a:defRPr sz="1300">
+                <a:solidFill>
+                  <a:srgbClr val="DCE2EB"/>
+                </a:solidFill>
+              </a:defRPr>
+            </a:pPr>
+            <a:r>
+              <a:t>• Αποτέλεσμα: Δέχεται οποιονδήποτε οπτικά σωστό σχηματισμό τριγώνου χωρίς εκνευρισμό.</a:t>
             </a:r>
           </a:p>
         </p:txBody>
@@ -6581,4 +11048,324 @@
   </a:objectDefaults>
   <a:extraClrSchemeLst/>
 </a:theme>
+</file>
+
+<file path=ppt/theme/theme2.xml><?xml version="1.0" encoding="utf-8"?>
+<a:theme xmlns:a="http://schemas.openxmlformats.org/drawingml/2006/main" name="Office Theme">
+  <a:themeElements>
+    <a:clrScheme name="Office">
+      <a:dk1>
+        <a:sysClr val="windowText" lastClr="000000"/>
+      </a:dk1>
+      <a:lt1>
+        <a:sysClr val="window" lastClr="FFFFFF"/>
+      </a:lt1>
+      <a:dk2>
+        <a:srgbClr val="1F497D"/>
+      </a:dk2>
+      <a:lt2>
+        <a:srgbClr val="EEECE1"/>
+      </a:lt2>
+      <a:accent1>
+        <a:srgbClr val="4F81BD"/>
+      </a:accent1>
+      <a:accent2>
+        <a:srgbClr val="C0504D"/>
+      </a:accent2>
+      <a:accent3>
+        <a:srgbClr val="9BBB59"/>
+      </a:accent3>
+      <a:accent4>
+        <a:srgbClr val="8064A2"/>
+      </a:accent4>
+      <a:accent5>
+        <a:srgbClr val="4BACC6"/>
+      </a:accent5>
+      <a:accent6>
+        <a:srgbClr val="F79646"/>
+      </a:accent6>
+      <a:hlink>
+        <a:srgbClr val="0000FF"/>
+      </a:hlink>
+      <a:folHlink>
+        <a:srgbClr val="800080"/>
+      </a:folHlink>
+    </a:clrScheme>
+    <a:fontScheme name="Office">
+      <a:majorFont>
+        <a:latin typeface="Calibri"/>
+        <a:ea typeface=""/>
+        <a:cs typeface=""/>
+        <a:font script="Jpan" typeface="ＭＳ Ｐゴシック"/>
+        <a:font script="Hang" typeface="맑은 고딕"/>
+        <a:font script="Hans" typeface="宋体"/>
+        <a:font script="Hant" typeface="新細明體"/>
+        <a:font script="Arab" typeface="Times New Roman"/>
+        <a:font script="Hebr" typeface="Times New Roman"/>
+        <a:font script="Thai" typeface="Angsana New"/>
+        <a:font script="Ethi" typeface="Nyala"/>
+        <a:font script="Beng" typeface="Vrinda"/>
+        <a:font script="Gujr" typeface="Shruti"/>
+        <a:font script="Khmr" typeface="MoolBoran"/>
+        <a:font script="Knda" typeface="Tunga"/>
+        <a:font script="Guru" typeface="Raavi"/>
+        <a:font script="Cans" typeface="Euphemia"/>
+        <a:font script="Cher" typeface="Plantagenet Cherokee"/>
+        <a:font script="Yiii" typeface="Microsoft Yi Baiti"/>
+        <a:font script="Tibt" typeface="Microsoft Himalaya"/>
+        <a:font script="Thaa" typeface="MV Boli"/>
+        <a:font script="Deva" typeface="Mangal"/>
+        <a:font script="Telu" typeface="Gautami"/>
+        <a:font script="Taml" typeface="Latha"/>
+        <a:font script="Syrc" typeface="Estrangelo Edessa"/>
+        <a:font script="Orya" typeface="Kalinga"/>
+        <a:font script="Mlym" typeface="Kartika"/>
+        <a:font script="Laoo" typeface="DokChampa"/>
+        <a:font script="Sinh" typeface="Iskoola Pota"/>
+        <a:font script="Mong" typeface="Mongolian Baiti"/>
+        <a:font script="Viet" typeface="Times New Roman"/>
+        <a:font script="Uigh" typeface="Microsoft Uighur"/>
+        <a:font script="Geor" typeface="Sylfaen"/>
+      </a:majorFont>
+      <a:minorFont>
+        <a:latin typeface="Calibri"/>
+        <a:ea typeface=""/>
+        <a:cs typeface=""/>
+        <a:font script="Jpan" typeface="ＭＳ Ｐゴシック"/>
+        <a:font script="Hang" typeface="맑은 고딕"/>
+        <a:font script="Hans" typeface="宋体"/>
+        <a:font script="Hant" typeface="新細明體"/>
+        <a:font script="Arab" typeface="Arial"/>
+        <a:font script="Hebr" typeface="Arial"/>
+        <a:font script="Thai" typeface="Cordia New"/>
+        <a:font script="Ethi" typeface="Nyala"/>
+        <a:font script="Beng" typeface="Vrinda"/>
+        <a:font script="Gujr" typeface="Shruti"/>
+        <a:font script="Khmr" typeface="DaunPenh"/>
+        <a:font script="Knda" typeface="Tunga"/>
+        <a:font script="Guru" typeface="Raavi"/>
+        <a:font script="Cans" typeface="Euphemia"/>
+        <a:font script="Cher" typeface="Plantagenet Cherokee"/>
+        <a:font script="Yiii" typeface="Microsoft Yi Baiti"/>
+        <a:font script="Tibt" typeface="Microsoft Himalaya"/>
+        <a:font script="Thaa" typeface="MV Boli"/>
+        <a:font script="Deva" typeface="Mangal"/>
+        <a:font script="Telu" typeface="Gautami"/>
+        <a:font script="Taml" typeface="Latha"/>
+        <a:font script="Syrc" typeface="Estrangelo Edessa"/>
+        <a:font script="Orya" typeface="Kalinga"/>
+        <a:font script="Mlym" typeface="Kartika"/>
+        <a:font script="Laoo" typeface="DokChampa"/>
+        <a:font script="Sinh" typeface="Iskoola Pota"/>
+        <a:font script="Mong" typeface="Mongolian Baiti"/>
+        <a:font script="Viet" typeface="Arial"/>
+        <a:font script="Uigh" typeface="Microsoft Uighur"/>
+        <a:font script="Geor" typeface="Sylfaen"/>
+      </a:minorFont>
+    </a:fontScheme>
+    <a:fmtScheme name="Office">
+      <a:fillStyleLst>
+        <a:solidFill>
+          <a:schemeClr val="phClr"/>
+        </a:solidFill>
+        <a:gradFill rotWithShape="1">
+          <a:gsLst>
+            <a:gs pos="0">
+              <a:schemeClr val="phClr">
+                <a:tint val="50000"/>
+                <a:satMod val="300000"/>
+              </a:schemeClr>
+            </a:gs>
+            <a:gs pos="35000">
+              <a:schemeClr val="phClr">
+                <a:tint val="37000"/>
+                <a:satMod val="300000"/>
+              </a:schemeClr>
+            </a:gs>
+            <a:gs pos="100000">
+              <a:schemeClr val="phClr">
+                <a:tint val="15000"/>
+                <a:satMod val="350000"/>
+              </a:schemeClr>
+            </a:gs>
+          </a:gsLst>
+          <a:lin ang="16200000" scaled="1"/>
+        </a:gradFill>
+        <a:gradFill rotWithShape="1">
+          <a:gsLst>
+            <a:gs pos="0">
+              <a:schemeClr val="phClr">
+                <a:tint val="100000"/>
+                <a:shade val="100000"/>
+                <a:satMod val="130000"/>
+              </a:schemeClr>
+            </a:gs>
+            <a:gs pos="100000">
+              <a:schemeClr val="phClr">
+                <a:tint val="50000"/>
+                <a:shade val="100000"/>
+                <a:satMod val="350000"/>
+              </a:schemeClr>
+            </a:gs>
+          </a:gsLst>
+          <a:lin ang="16200000" scaled="0"/>
+        </a:gradFill>
+      </a:fillStyleLst>
+      <a:lnStyleLst>
+        <a:ln w="9525" cap="flat" cmpd="sng" algn="ctr">
+          <a:solidFill>
+            <a:schemeClr val="phClr">
+              <a:shade val="95000"/>
+              <a:satMod val="105000"/>
+            </a:schemeClr>
+          </a:solidFill>
+          <a:prstDash val="solid"/>
+        </a:ln>
+        <a:ln w="25400" cap="flat" cmpd="sng" algn="ctr">
+          <a:solidFill>
+            <a:schemeClr val="phClr"/>
+          </a:solidFill>
+          <a:prstDash val="solid"/>
+        </a:ln>
+        <a:ln w="38100" cap="flat" cmpd="sng" algn="ctr">
+          <a:solidFill>
+            <a:schemeClr val="phClr"/>
+          </a:solidFill>
+          <a:prstDash val="solid"/>
+        </a:ln>
+      </a:lnStyleLst>
+      <a:effectStyleLst>
+        <a:effectStyle>
+          <a:effectLst>
+            <a:outerShdw blurRad="40000" dist="20000" dir="5400000" rotWithShape="0">
+              <a:srgbClr val="000000">
+                <a:alpha val="38000"/>
+              </a:srgbClr>
+            </a:outerShdw>
+          </a:effectLst>
+        </a:effectStyle>
+        <a:effectStyle>
+          <a:effectLst>
+            <a:outerShdw blurRad="40000" dist="23000" dir="5400000" rotWithShape="0">
+              <a:srgbClr val="000000">
+                <a:alpha val="35000"/>
+              </a:srgbClr>
+            </a:outerShdw>
+          </a:effectLst>
+        </a:effectStyle>
+        <a:effectStyle>
+          <a:effectLst>
+            <a:outerShdw blurRad="40000" dist="23000" dir="5400000" rotWithShape="0">
+              <a:srgbClr val="000000">
+                <a:alpha val="35000"/>
+              </a:srgbClr>
+            </a:outerShdw>
+          </a:effectLst>
+          <a:scene3d>
+            <a:camera prst="orthographicFront">
+              <a:rot lat="0" lon="0" rev="0"/>
+            </a:camera>
+            <a:lightRig rig="threePt" dir="t">
+              <a:rot lat="0" lon="0" rev="1200000"/>
+            </a:lightRig>
+          </a:scene3d>
+          <a:sp3d>
+            <a:bevelT w="63500" h="25400"/>
+          </a:sp3d>
+        </a:effectStyle>
+      </a:effectStyleLst>
+      <a:bgFillStyleLst>
+        <a:solidFill>
+          <a:schemeClr val="phClr"/>
+        </a:solidFill>
+        <a:gradFill rotWithShape="1">
+          <a:gsLst>
+            <a:gs pos="0">
+              <a:schemeClr val="phClr">
+                <a:tint val="40000"/>
+                <a:satMod val="350000"/>
+              </a:schemeClr>
+            </a:gs>
+            <a:gs pos="40000">
+              <a:schemeClr val="phClr">
+                <a:tint val="45000"/>
+                <a:shade val="99000"/>
+                <a:satMod val="350000"/>
+              </a:schemeClr>
+            </a:gs>
+            <a:gs pos="100000">
+              <a:schemeClr val="phClr">
+                <a:shade val="20000"/>
+                <a:satMod val="255000"/>
+              </a:schemeClr>
+            </a:gs>
+          </a:gsLst>
+          <a:path path="circle">
+            <a:fillToRect l="50000" t="-80000" r="50000" b="180000"/>
+          </a:path>
+        </a:gradFill>
+        <a:gradFill rotWithShape="1">
+          <a:gsLst>
+            <a:gs pos="0">
+              <a:schemeClr val="phClr">
+                <a:tint val="80000"/>
+                <a:satMod val="300000"/>
+              </a:schemeClr>
+            </a:gs>
+            <a:gs pos="100000">
+              <a:schemeClr val="phClr">
+                <a:shade val="30000"/>
+                <a:satMod val="200000"/>
+              </a:schemeClr>
+            </a:gs>
+          </a:gsLst>
+          <a:path path="circle">
+            <a:fillToRect l="50000" t="50000" r="50000" b="50000"/>
+          </a:path>
+        </a:gradFill>
+      </a:bgFillStyleLst>
+    </a:fmtScheme>
+  </a:themeElements>
+  <a:objectDefaults>
+    <a:spDef>
+      <a:spPr/>
+      <a:bodyPr/>
+      <a:lstStyle/>
+      <a:style>
+        <a:lnRef idx="1">
+          <a:schemeClr val="accent1"/>
+        </a:lnRef>
+        <a:fillRef idx="3">
+          <a:schemeClr val="accent1"/>
+        </a:fillRef>
+        <a:effectRef idx="2">
+          <a:schemeClr val="accent1"/>
+        </a:effectRef>
+        <a:fontRef idx="minor">
+          <a:schemeClr val="lt1"/>
+        </a:fontRef>
+      </a:style>
+    </a:spDef>
+    <a:lnDef>
+      <a:spPr/>
+      <a:bodyPr/>
+      <a:lstStyle/>
+      <a:style>
+        <a:lnRef idx="2">
+          <a:schemeClr val="accent1"/>
+        </a:lnRef>
+        <a:fillRef idx="0">
+          <a:schemeClr val="accent1"/>
+        </a:fillRef>
+        <a:effectRef idx="1">
+          <a:schemeClr val="accent1"/>
+        </a:effectRef>
+        <a:fontRef idx="minor">
+          <a:schemeClr val="tx1"/>
+        </a:fontRef>
+      </a:style>
+    </a:lnDef>
+  </a:objectDefaults>
+  <a:extraClrSchemeLst/>
+</a:theme>
 </file>
--- a/Deliverables/The_Secret_Library_Presentation.pptx
+++ b/Deliverables/The_Secret_Library_Presentation.pptx
@@ -7107,11 +7107,7 @@
               </a:defRPr>
             </a:pPr>
             <a:r>
-              <a:rPr dirty="0">
-                <a:latin typeface="Times New Roman" panose="02020603050405020304" pitchFamily="18" charset="0"/>
-                <a:cs typeface="Times New Roman" panose="02020603050405020304" pitchFamily="18" charset="0"/>
-              </a:rPr>
-              <a:t>Procedural Primitives</a:t>
+              <a:t>• Πραγματικές Μετρήσεις RenderingServer: Μόλις 68 Draw Calls, 89 Objects, 1.8M Primitives.</a:t>
             </a:r>
           </a:p>
           <a:p>
@@ -10159,18 +10155,7 @@
               </a:defRPr>
             </a:pPr>
             <a:r>
-              <a:rPr dirty="0">
-                <a:latin typeface="Times New Roman" panose="02020603050405020304" pitchFamily="18" charset="0"/>
-                <a:cs typeface="Times New Roman" panose="02020603050405020304" pitchFamily="18" charset="0"/>
-              </a:rPr>
-              <a:t>🏃 </a:t>
-            </a:r>
-            <a:r>
-              <a:rPr dirty="0" err="1">
-                <a:latin typeface="Times New Roman" panose="02020603050405020304" pitchFamily="18" charset="0"/>
-                <a:cs typeface="Times New Roman" panose="02020603050405020304" pitchFamily="18" charset="0"/>
-              </a:rPr>
-              <a:t>player.gd</a:t>
+              <a:t>🏃 player.gd: 266 Γραμμές (Input Actions, Input.get_vector, 3.0m reach, ✋ crosshair, door check)</a:t>
             </a:r>
             <a:endParaRPr dirty="0">
               <a:latin typeface="Times New Roman" panose="02020603050405020304" pitchFamily="18" charset="0"/>
@@ -10189,53 +10174,7 @@
               </a:defRPr>
             </a:pPr>
             <a:r>
-              <a:rPr dirty="0">
-                <a:latin typeface="Times New Roman" panose="02020603050405020304" pitchFamily="18" charset="0"/>
-                <a:cs typeface="Times New Roman" panose="02020603050405020304" pitchFamily="18" charset="0"/>
-              </a:rPr>
-              <a:t>180 </a:t>
-            </a:r>
-            <a:r>
-              <a:rPr dirty="0" err="1">
-                <a:latin typeface="Times New Roman" panose="02020603050405020304" pitchFamily="18" charset="0"/>
-                <a:cs typeface="Times New Roman" panose="02020603050405020304" pitchFamily="18" charset="0"/>
-              </a:rPr>
-              <a:t>Γρ</a:t>
-            </a:r>
-            <a:r>
-              <a:rPr dirty="0">
-                <a:latin typeface="Times New Roman" panose="02020603050405020304" pitchFamily="18" charset="0"/>
-                <a:cs typeface="Times New Roman" panose="02020603050405020304" pitchFamily="18" charset="0"/>
-              </a:rPr>
-              <a:t>α</a:t>
-            </a:r>
-            <a:r>
-              <a:rPr dirty="0" err="1">
-                <a:latin typeface="Times New Roman" panose="02020603050405020304" pitchFamily="18" charset="0"/>
-                <a:cs typeface="Times New Roman" panose="02020603050405020304" pitchFamily="18" charset="0"/>
-              </a:rPr>
-              <a:t>μμές</a:t>
-            </a:r>
-            <a:r>
-              <a:rPr dirty="0">
-                <a:latin typeface="Times New Roman" panose="02020603050405020304" pitchFamily="18" charset="0"/>
-                <a:cs typeface="Times New Roman" panose="02020603050405020304" pitchFamily="18" charset="0"/>
-              </a:rPr>
-              <a:t> </a:t>
-            </a:r>
-            <a:r>
-              <a:rPr dirty="0" err="1">
-                <a:latin typeface="Times New Roman" panose="02020603050405020304" pitchFamily="18" charset="0"/>
-                <a:cs typeface="Times New Roman" panose="02020603050405020304" pitchFamily="18" charset="0"/>
-              </a:rPr>
-              <a:t>Κώδικ</a:t>
-            </a:r>
-            <a:r>
-              <a:rPr dirty="0">
-                <a:latin typeface="Times New Roman" panose="02020603050405020304" pitchFamily="18" charset="0"/>
-                <a:cs typeface="Times New Roman" panose="02020603050405020304" pitchFamily="18" charset="0"/>
-              </a:rPr>
-              <a:t>α</a:t>
+              <a:t>266 Γραμμές Κώδικα</a:t>
             </a:r>
           </a:p>
           <a:p>
@@ -10398,18 +10337,7 @@
               </a:defRPr>
             </a:pPr>
             <a:r>
-              <a:rPr dirty="0">
-                <a:latin typeface="Times New Roman" panose="02020603050405020304" pitchFamily="18" charset="0"/>
-                <a:cs typeface="Times New Roman" panose="02020603050405020304" pitchFamily="18" charset="0"/>
-              </a:rPr>
-              <a:t>🧠 </a:t>
-            </a:r>
-            <a:r>
-              <a:rPr dirty="0" err="1">
-                <a:latin typeface="Times New Roman" panose="02020603050405020304" pitchFamily="18" charset="0"/>
-                <a:cs typeface="Times New Roman" panose="02020603050405020304" pitchFamily="18" charset="0"/>
-              </a:rPr>
-              <a:t>game_manager.gd</a:t>
+              <a:t>⚙️ game_manager.gd: 406 Γραμμές (240-book MultiMesh, triangle puzzle logic, atmospheric tweens)</a:t>
             </a:r>
             <a:endParaRPr dirty="0">
               <a:latin typeface="Times New Roman" panose="02020603050405020304" pitchFamily="18" charset="0"/>
@@ -21030,11 +20958,7 @@
               </a:defRPr>
             </a:pPr>
             <a:r>
-              <a:rPr dirty="0">
-                <a:latin typeface="Times New Roman" panose="02020603050405020304" pitchFamily="18" charset="0"/>
-                <a:cs typeface="Times New Roman" panose="02020603050405020304" pitchFamily="18" charset="0"/>
-              </a:rPr>
-              <a:t>RayCast3D, Signals &amp; Adaptive Crosshair</a:t>
+              <a:t>• Δυναμικό Στόχαστρο: Αυτόματη μετατροπή από + σε χρυσό ✋ κατά την εστίαση σε interactable.</a:t>
             </a:r>
           </a:p>
         </p:txBody>
@@ -21138,151 +21062,7 @@
               </a:defRPr>
             </a:pPr>
             <a:r>
-              <a:rPr dirty="0">
-                <a:latin typeface="Times New Roman" panose="02020603050405020304" pitchFamily="18" charset="0"/>
-                <a:cs typeface="Times New Roman" panose="02020603050405020304" pitchFamily="18" charset="0"/>
-              </a:rPr>
-              <a:t>• </a:t>
-            </a:r>
-            <a:r>
-              <a:rPr dirty="0" err="1">
-                <a:latin typeface="Times New Roman" panose="02020603050405020304" pitchFamily="18" charset="0"/>
-                <a:cs typeface="Times New Roman" panose="02020603050405020304" pitchFamily="18" charset="0"/>
-              </a:rPr>
-              <a:t>Ακτίν</a:t>
-            </a:r>
-            <a:r>
-              <a:rPr dirty="0">
-                <a:latin typeface="Times New Roman" panose="02020603050405020304" pitchFamily="18" charset="0"/>
-                <a:cs typeface="Times New Roman" panose="02020603050405020304" pitchFamily="18" charset="0"/>
-              </a:rPr>
-              <a:t>α </a:t>
-            </a:r>
-            <a:r>
-              <a:rPr dirty="0" err="1">
-                <a:latin typeface="Times New Roman" panose="02020603050405020304" pitchFamily="18" charset="0"/>
-                <a:cs typeface="Times New Roman" panose="02020603050405020304" pitchFamily="18" charset="0"/>
-              </a:rPr>
-              <a:t>Ανίχνευσης</a:t>
-            </a:r>
-            <a:r>
-              <a:rPr dirty="0">
-                <a:latin typeface="Times New Roman" panose="02020603050405020304" pitchFamily="18" charset="0"/>
-                <a:cs typeface="Times New Roman" panose="02020603050405020304" pitchFamily="18" charset="0"/>
-              </a:rPr>
-              <a:t>: </a:t>
-            </a:r>
-            <a:r>
-              <a:rPr dirty="0" err="1">
-                <a:latin typeface="Times New Roman" panose="02020603050405020304" pitchFamily="18" charset="0"/>
-                <a:cs typeface="Times New Roman" panose="02020603050405020304" pitchFamily="18" charset="0"/>
-              </a:rPr>
-              <a:t>Μήκους</a:t>
-            </a:r>
-            <a:r>
-              <a:rPr dirty="0">
-                <a:latin typeface="Times New Roman" panose="02020603050405020304" pitchFamily="18" charset="0"/>
-                <a:cs typeface="Times New Roman" panose="02020603050405020304" pitchFamily="18" charset="0"/>
-              </a:rPr>
-              <a:t> 2.5 </a:t>
-            </a:r>
-            <a:r>
-              <a:rPr dirty="0" err="1">
-                <a:latin typeface="Times New Roman" panose="02020603050405020304" pitchFamily="18" charset="0"/>
-                <a:cs typeface="Times New Roman" panose="02020603050405020304" pitchFamily="18" charset="0"/>
-              </a:rPr>
-              <a:t>μέτρων</a:t>
-            </a:r>
-            <a:r>
-              <a:rPr dirty="0">
-                <a:latin typeface="Times New Roman" panose="02020603050405020304" pitchFamily="18" charset="0"/>
-                <a:cs typeface="Times New Roman" panose="02020603050405020304" pitchFamily="18" charset="0"/>
-              </a:rPr>
-              <a:t> απ</a:t>
-            </a:r>
-            <a:r>
-              <a:rPr dirty="0" err="1">
-                <a:latin typeface="Times New Roman" panose="02020603050405020304" pitchFamily="18" charset="0"/>
-                <a:cs typeface="Times New Roman" panose="02020603050405020304" pitchFamily="18" charset="0"/>
-              </a:rPr>
-              <a:t>ό</a:t>
-            </a:r>
-            <a:r>
-              <a:rPr dirty="0">
-                <a:latin typeface="Times New Roman" panose="02020603050405020304" pitchFamily="18" charset="0"/>
-                <a:cs typeface="Times New Roman" panose="02020603050405020304" pitchFamily="18" charset="0"/>
-              </a:rPr>
-              <a:t> </a:t>
-            </a:r>
-            <a:r>
-              <a:rPr dirty="0" err="1">
-                <a:latin typeface="Times New Roman" panose="02020603050405020304" pitchFamily="18" charset="0"/>
-                <a:cs typeface="Times New Roman" panose="02020603050405020304" pitchFamily="18" charset="0"/>
-              </a:rPr>
-              <a:t>το</a:t>
-            </a:r>
-            <a:r>
-              <a:rPr dirty="0">
-                <a:latin typeface="Times New Roman" panose="02020603050405020304" pitchFamily="18" charset="0"/>
-                <a:cs typeface="Times New Roman" panose="02020603050405020304" pitchFamily="18" charset="0"/>
-              </a:rPr>
-              <a:t> </a:t>
-            </a:r>
-            <a:r>
-              <a:rPr dirty="0" err="1">
-                <a:latin typeface="Times New Roman" panose="02020603050405020304" pitchFamily="18" charset="0"/>
-                <a:cs typeface="Times New Roman" panose="02020603050405020304" pitchFamily="18" charset="0"/>
-              </a:rPr>
-              <a:t>κέντρο</a:t>
-            </a:r>
-            <a:r>
-              <a:rPr dirty="0">
-                <a:latin typeface="Times New Roman" panose="02020603050405020304" pitchFamily="18" charset="0"/>
-                <a:cs typeface="Times New Roman" panose="02020603050405020304" pitchFamily="18" charset="0"/>
-              </a:rPr>
-              <a:t> </a:t>
-            </a:r>
-            <a:r>
-              <a:rPr dirty="0" err="1">
-                <a:latin typeface="Times New Roman" panose="02020603050405020304" pitchFamily="18" charset="0"/>
-                <a:cs typeface="Times New Roman" panose="02020603050405020304" pitchFamily="18" charset="0"/>
-              </a:rPr>
-              <a:t>της</a:t>
-            </a:r>
-            <a:r>
-              <a:rPr dirty="0">
-                <a:latin typeface="Times New Roman" panose="02020603050405020304" pitchFamily="18" charset="0"/>
-                <a:cs typeface="Times New Roman" panose="02020603050405020304" pitchFamily="18" charset="0"/>
-              </a:rPr>
-              <a:t> </a:t>
-            </a:r>
-            <a:r>
-              <a:rPr dirty="0" err="1">
-                <a:latin typeface="Times New Roman" panose="02020603050405020304" pitchFamily="18" charset="0"/>
-                <a:cs typeface="Times New Roman" panose="02020603050405020304" pitchFamily="18" charset="0"/>
-              </a:rPr>
-              <a:t>κάμερ</a:t>
-            </a:r>
-            <a:r>
-              <a:rPr dirty="0">
-                <a:latin typeface="Times New Roman" panose="02020603050405020304" pitchFamily="18" charset="0"/>
-                <a:cs typeface="Times New Roman" panose="02020603050405020304" pitchFamily="18" charset="0"/>
-              </a:rPr>
-              <a:t>α</a:t>
-            </a:r>
-            <a:r>
-              <a:rPr dirty="0" err="1">
-                <a:latin typeface="Times New Roman" panose="02020603050405020304" pitchFamily="18" charset="0"/>
-                <a:cs typeface="Times New Roman" panose="02020603050405020304" pitchFamily="18" charset="0"/>
-              </a:rPr>
-              <a:t>ς</a:t>
-            </a:r>
-            <a:r>
-              <a:rPr dirty="0">
-                <a:latin typeface="Times New Roman" panose="02020603050405020304" pitchFamily="18" charset="0"/>
-                <a:cs typeface="Times New Roman" panose="02020603050405020304" pitchFamily="18" charset="0"/>
-              </a:rPr>
-              <a:t>.</a:t>
+              <a:t>• Ακτίνα Ανίχνευσης: Μήκους 3.0 μέτρων από το κέντρο της κάμερας.</a:t>
             </a:r>
           </a:p>
           <a:p>
@@ -25488,165 +25268,7 @@
               </a:defRPr>
             </a:pPr>
             <a:r>
-              <a:rPr dirty="0">
-                <a:latin typeface="Times New Roman" panose="02020603050405020304" pitchFamily="18" charset="0"/>
-                <a:cs typeface="Times New Roman" panose="02020603050405020304" pitchFamily="18" charset="0"/>
-              </a:rPr>
-              <a:t>• </a:t>
-            </a:r>
-            <a:r>
-              <a:rPr dirty="0" err="1">
-                <a:latin typeface="Times New Roman" panose="02020603050405020304" pitchFamily="18" charset="0"/>
-                <a:cs typeface="Times New Roman" panose="02020603050405020304" pitchFamily="18" charset="0"/>
-              </a:rPr>
-              <a:t>Τυχ</a:t>
-            </a:r>
-            <a:r>
-              <a:rPr dirty="0">
-                <a:latin typeface="Times New Roman" panose="02020603050405020304" pitchFamily="18" charset="0"/>
-                <a:cs typeface="Times New Roman" panose="02020603050405020304" pitchFamily="18" charset="0"/>
-              </a:rPr>
-              <a:t>α</a:t>
-            </a:r>
-            <a:r>
-              <a:rPr dirty="0" err="1">
-                <a:latin typeface="Times New Roman" panose="02020603050405020304" pitchFamily="18" charset="0"/>
-                <a:cs typeface="Times New Roman" panose="02020603050405020304" pitchFamily="18" charset="0"/>
-              </a:rPr>
-              <a:t>ίες</a:t>
-            </a:r>
-            <a:r>
-              <a:rPr dirty="0">
-                <a:latin typeface="Times New Roman" panose="02020603050405020304" pitchFamily="18" charset="0"/>
-                <a:cs typeface="Times New Roman" panose="02020603050405020304" pitchFamily="18" charset="0"/>
-              </a:rPr>
-              <a:t> </a:t>
-            </a:r>
-            <a:r>
-              <a:rPr dirty="0" err="1">
-                <a:latin typeface="Times New Roman" panose="02020603050405020304" pitchFamily="18" charset="0"/>
-                <a:cs typeface="Times New Roman" panose="02020603050405020304" pitchFamily="18" charset="0"/>
-              </a:rPr>
-              <a:t>Αρχικές</a:t>
-            </a:r>
-            <a:r>
-              <a:rPr dirty="0">
-                <a:latin typeface="Times New Roman" panose="02020603050405020304" pitchFamily="18" charset="0"/>
-                <a:cs typeface="Times New Roman" panose="02020603050405020304" pitchFamily="18" charset="0"/>
-              </a:rPr>
-              <a:t> </a:t>
-            </a:r>
-            <a:r>
-              <a:rPr dirty="0" err="1">
-                <a:latin typeface="Times New Roman" panose="02020603050405020304" pitchFamily="18" charset="0"/>
-                <a:cs typeface="Times New Roman" panose="02020603050405020304" pitchFamily="18" charset="0"/>
-              </a:rPr>
-              <a:t>Γωνίες</a:t>
-            </a:r>
-            <a:r>
-              <a:rPr dirty="0">
-                <a:latin typeface="Times New Roman" panose="02020603050405020304" pitchFamily="18" charset="0"/>
-                <a:cs typeface="Times New Roman" panose="02020603050405020304" pitchFamily="18" charset="0"/>
-              </a:rPr>
-              <a:t>: </a:t>
-            </a:r>
-            <a:r>
-              <a:rPr dirty="0" err="1">
-                <a:latin typeface="Times New Roman" panose="02020603050405020304" pitchFamily="18" charset="0"/>
-                <a:cs typeface="Times New Roman" panose="02020603050405020304" pitchFamily="18" charset="0"/>
-              </a:rPr>
-              <a:t>Οι</a:t>
-            </a:r>
-            <a:r>
-              <a:rPr dirty="0">
-                <a:latin typeface="Times New Roman" panose="02020603050405020304" pitchFamily="18" charset="0"/>
-                <a:cs typeface="Times New Roman" panose="02020603050405020304" pitchFamily="18" charset="0"/>
-              </a:rPr>
-              <a:t> </a:t>
-            </a:r>
-            <a:r>
-              <a:rPr dirty="0" err="1">
-                <a:latin typeface="Times New Roman" panose="02020603050405020304" pitchFamily="18" charset="0"/>
-                <a:cs typeface="Times New Roman" panose="02020603050405020304" pitchFamily="18" charset="0"/>
-              </a:rPr>
-              <a:t>ρά</a:t>
-            </a:r>
-            <a:r>
-              <a:rPr dirty="0">
-                <a:latin typeface="Times New Roman" panose="02020603050405020304" pitchFamily="18" charset="0"/>
-                <a:cs typeface="Times New Roman" panose="02020603050405020304" pitchFamily="18" charset="0"/>
-              </a:rPr>
-              <a:t>β</a:t>
-            </a:r>
-            <a:r>
-              <a:rPr dirty="0" err="1">
-                <a:latin typeface="Times New Roman" panose="02020603050405020304" pitchFamily="18" charset="0"/>
-                <a:cs typeface="Times New Roman" panose="02020603050405020304" pitchFamily="18" charset="0"/>
-              </a:rPr>
-              <a:t>δοι</a:t>
-            </a:r>
-            <a:r>
-              <a:rPr dirty="0">
-                <a:latin typeface="Times New Roman" panose="02020603050405020304" pitchFamily="18" charset="0"/>
-                <a:cs typeface="Times New Roman" panose="02020603050405020304" pitchFamily="18" charset="0"/>
-              </a:rPr>
-              <a:t> </a:t>
-            </a:r>
-            <a:r>
-              <a:rPr dirty="0" err="1">
-                <a:latin typeface="Times New Roman" panose="02020603050405020304" pitchFamily="18" charset="0"/>
-                <a:cs typeface="Times New Roman" panose="02020603050405020304" pitchFamily="18" charset="0"/>
-              </a:rPr>
-              <a:t>ξεκινούν</a:t>
-            </a:r>
-            <a:r>
-              <a:rPr dirty="0">
-                <a:latin typeface="Times New Roman" panose="02020603050405020304" pitchFamily="18" charset="0"/>
-                <a:cs typeface="Times New Roman" panose="02020603050405020304" pitchFamily="18" charset="0"/>
-              </a:rPr>
-              <a:t> α</a:t>
-            </a:r>
-            <a:r>
-              <a:rPr dirty="0" err="1">
-                <a:latin typeface="Times New Roman" panose="02020603050405020304" pitchFamily="18" charset="0"/>
-                <a:cs typeface="Times New Roman" panose="02020603050405020304" pitchFamily="18" charset="0"/>
-              </a:rPr>
-              <a:t>ν</a:t>
-            </a:r>
-            <a:r>
-              <a:rPr dirty="0">
-                <a:latin typeface="Times New Roman" panose="02020603050405020304" pitchFamily="18" charset="0"/>
-                <a:cs typeface="Times New Roman" panose="02020603050405020304" pitchFamily="18" charset="0"/>
-              </a:rPr>
-              <a:t>α</a:t>
-            </a:r>
-            <a:r>
-              <a:rPr dirty="0" err="1">
-                <a:latin typeface="Times New Roman" panose="02020603050405020304" pitchFamily="18" charset="0"/>
-                <a:cs typeface="Times New Roman" panose="02020603050405020304" pitchFamily="18" charset="0"/>
-              </a:rPr>
-              <a:t>κ</a:t>
-            </a:r>
-            <a:r>
-              <a:rPr dirty="0">
-                <a:latin typeface="Times New Roman" panose="02020603050405020304" pitchFamily="18" charset="0"/>
-                <a:cs typeface="Times New Roman" panose="02020603050405020304" pitchFamily="18" charset="0"/>
-              </a:rPr>
-              <a:t>α</a:t>
-            </a:r>
-            <a:r>
-              <a:rPr dirty="0" err="1">
-                <a:latin typeface="Times New Roman" panose="02020603050405020304" pitchFamily="18" charset="0"/>
-                <a:cs typeface="Times New Roman" panose="02020603050405020304" pitchFamily="18" charset="0"/>
-              </a:rPr>
-              <a:t>τεμένες</a:t>
-            </a:r>
-            <a:r>
-              <a:rPr dirty="0">
-                <a:latin typeface="Times New Roman" panose="02020603050405020304" pitchFamily="18" charset="0"/>
-                <a:cs typeface="Times New Roman" panose="02020603050405020304" pitchFamily="18" charset="0"/>
-              </a:rPr>
-              <a:t> (120°, 0°, 60°).</a:t>
+              <a:t>• Μη Λυμένη Αρχικοποίηση: Οι ράβδοι ξεκινούν στις γωνίες [0.0°, 180.0°, 60.0°] (μη λυμένη κατάσταση).</a:t>
             </a:r>
           </a:p>
           <a:p>

--- a/Deliverables/The_Secret_Library_Presentation.pptx
+++ b/Deliverables/The_Secret_Library_Presentation.pptx
@@ -7107,7 +7107,11 @@
               </a:defRPr>
             </a:pPr>
             <a:r>
-              <a:t>• Πραγματικές Μετρήσεις RenderingServer: Μόλις 68 Draw Calls, 89 Objects, 1.8M Primitives.</a:t>
+              <a:rPr dirty="0">
+                <a:latin typeface="Times New Roman" panose="02020603050405020304" pitchFamily="18" charset="0"/>
+                <a:cs typeface="Times New Roman" panose="02020603050405020304" pitchFamily="18" charset="0"/>
+              </a:rPr>
+              <a:t>Procedural Primitives</a:t>
             </a:r>
           </a:p>
           <a:p>
@@ -10155,7 +10159,18 @@
               </a:defRPr>
             </a:pPr>
             <a:r>
-              <a:t>🏃 player.gd: 266 Γραμμές (Input Actions, Input.get_vector, 3.0m reach, ✋ crosshair, door check)</a:t>
+              <a:rPr dirty="0">
+                <a:latin typeface="Times New Roman" panose="02020603050405020304" pitchFamily="18" charset="0"/>
+                <a:cs typeface="Times New Roman" panose="02020603050405020304" pitchFamily="18" charset="0"/>
+              </a:rPr>
+              <a:t>🏃 </a:t>
+            </a:r>
+            <a:r>
+              <a:rPr dirty="0" err="1">
+                <a:latin typeface="Times New Roman" panose="02020603050405020304" pitchFamily="18" charset="0"/>
+                <a:cs typeface="Times New Roman" panose="02020603050405020304" pitchFamily="18" charset="0"/>
+              </a:rPr>
+              <a:t>player.gd</a:t>
             </a:r>
             <a:endParaRPr dirty="0">
               <a:latin typeface="Times New Roman" panose="02020603050405020304" pitchFamily="18" charset="0"/>
@@ -10174,7 +10189,53 @@
               </a:defRPr>
             </a:pPr>
             <a:r>
-              <a:t>266 Γραμμές Κώδικα</a:t>
+              <a:rPr dirty="0">
+                <a:latin typeface="Times New Roman" panose="02020603050405020304" pitchFamily="18" charset="0"/>
+                <a:cs typeface="Times New Roman" panose="02020603050405020304" pitchFamily="18" charset="0"/>
+              </a:rPr>
+              <a:t>180 </a:t>
+            </a:r>
+            <a:r>
+              <a:rPr dirty="0" err="1">
+                <a:latin typeface="Times New Roman" panose="02020603050405020304" pitchFamily="18" charset="0"/>
+                <a:cs typeface="Times New Roman" panose="02020603050405020304" pitchFamily="18" charset="0"/>
+              </a:rPr>
+              <a:t>Γρ</a:t>
+            </a:r>
+            <a:r>
+              <a:rPr dirty="0">
+                <a:latin typeface="Times New Roman" panose="02020603050405020304" pitchFamily="18" charset="0"/>
+                <a:cs typeface="Times New Roman" panose="02020603050405020304" pitchFamily="18" charset="0"/>
+              </a:rPr>
+              <a:t>α</a:t>
+            </a:r>
+            <a:r>
+              <a:rPr dirty="0" err="1">
+                <a:latin typeface="Times New Roman" panose="02020603050405020304" pitchFamily="18" charset="0"/>
+                <a:cs typeface="Times New Roman" panose="02020603050405020304" pitchFamily="18" charset="0"/>
+              </a:rPr>
+              <a:t>μμές</a:t>
+            </a:r>
+            <a:r>
+              <a:rPr dirty="0">
+                <a:latin typeface="Times New Roman" panose="02020603050405020304" pitchFamily="18" charset="0"/>
+                <a:cs typeface="Times New Roman" panose="02020603050405020304" pitchFamily="18" charset="0"/>
+              </a:rPr>
+              <a:t> </a:t>
+            </a:r>
+            <a:r>
+              <a:rPr dirty="0" err="1">
+                <a:latin typeface="Times New Roman" panose="02020603050405020304" pitchFamily="18" charset="0"/>
+                <a:cs typeface="Times New Roman" panose="02020603050405020304" pitchFamily="18" charset="0"/>
+              </a:rPr>
+              <a:t>Κώδικ</a:t>
+            </a:r>
+            <a:r>
+              <a:rPr dirty="0">
+                <a:latin typeface="Times New Roman" panose="02020603050405020304" pitchFamily="18" charset="0"/>
+                <a:cs typeface="Times New Roman" panose="02020603050405020304" pitchFamily="18" charset="0"/>
+              </a:rPr>
+              <a:t>α</a:t>
             </a:r>
           </a:p>
           <a:p>
@@ -10337,7 +10398,18 @@
               </a:defRPr>
             </a:pPr>
             <a:r>
-              <a:t>⚙️ game_manager.gd: 406 Γραμμές (240-book MultiMesh, triangle puzzle logic, atmospheric tweens)</a:t>
+              <a:rPr dirty="0">
+                <a:latin typeface="Times New Roman" panose="02020603050405020304" pitchFamily="18" charset="0"/>
+                <a:cs typeface="Times New Roman" panose="02020603050405020304" pitchFamily="18" charset="0"/>
+              </a:rPr>
+              <a:t>🧠 </a:t>
+            </a:r>
+            <a:r>
+              <a:rPr dirty="0" err="1">
+                <a:latin typeface="Times New Roman" panose="02020603050405020304" pitchFamily="18" charset="0"/>
+                <a:cs typeface="Times New Roman" panose="02020603050405020304" pitchFamily="18" charset="0"/>
+              </a:rPr>
+              <a:t>game_manager.gd</a:t>
             </a:r>
             <a:endParaRPr dirty="0">
               <a:latin typeface="Times New Roman" panose="02020603050405020304" pitchFamily="18" charset="0"/>
@@ -20958,7 +21030,11 @@
               </a:defRPr>
             </a:pPr>
             <a:r>
-              <a:t>• Δυναμικό Στόχαστρο: Αυτόματη μετατροπή από + σε χρυσό ✋ κατά την εστίαση σε interactable.</a:t>
+              <a:rPr dirty="0">
+                <a:latin typeface="Times New Roman" panose="02020603050405020304" pitchFamily="18" charset="0"/>
+                <a:cs typeface="Times New Roman" panose="02020603050405020304" pitchFamily="18" charset="0"/>
+              </a:rPr>
+              <a:t>RayCast3D, Signals &amp; Adaptive Crosshair</a:t>
             </a:r>
           </a:p>
         </p:txBody>
@@ -21062,7 +21138,151 @@
               </a:defRPr>
             </a:pPr>
             <a:r>
-              <a:t>• Ακτίνα Ανίχνευσης: Μήκους 3.0 μέτρων από το κέντρο της κάμερας.</a:t>
+              <a:rPr dirty="0">
+                <a:latin typeface="Times New Roman" panose="02020603050405020304" pitchFamily="18" charset="0"/>
+                <a:cs typeface="Times New Roman" panose="02020603050405020304" pitchFamily="18" charset="0"/>
+              </a:rPr>
+              <a:t>• </a:t>
+            </a:r>
+            <a:r>
+              <a:rPr dirty="0" err="1">
+                <a:latin typeface="Times New Roman" panose="02020603050405020304" pitchFamily="18" charset="0"/>
+                <a:cs typeface="Times New Roman" panose="02020603050405020304" pitchFamily="18" charset="0"/>
+              </a:rPr>
+              <a:t>Ακτίν</a:t>
+            </a:r>
+            <a:r>
+              <a:rPr dirty="0">
+                <a:latin typeface="Times New Roman" panose="02020603050405020304" pitchFamily="18" charset="0"/>
+                <a:cs typeface="Times New Roman" panose="02020603050405020304" pitchFamily="18" charset="0"/>
+              </a:rPr>
+              <a:t>α </a:t>
+            </a:r>
+            <a:r>
+              <a:rPr dirty="0" err="1">
+                <a:latin typeface="Times New Roman" panose="02020603050405020304" pitchFamily="18" charset="0"/>
+                <a:cs typeface="Times New Roman" panose="02020603050405020304" pitchFamily="18" charset="0"/>
+              </a:rPr>
+              <a:t>Ανίχνευσης</a:t>
+            </a:r>
+            <a:r>
+              <a:rPr dirty="0">
+                <a:latin typeface="Times New Roman" panose="02020603050405020304" pitchFamily="18" charset="0"/>
+                <a:cs typeface="Times New Roman" panose="02020603050405020304" pitchFamily="18" charset="0"/>
+              </a:rPr>
+              <a:t>: </a:t>
+            </a:r>
+            <a:r>
+              <a:rPr dirty="0" err="1">
+                <a:latin typeface="Times New Roman" panose="02020603050405020304" pitchFamily="18" charset="0"/>
+                <a:cs typeface="Times New Roman" panose="02020603050405020304" pitchFamily="18" charset="0"/>
+              </a:rPr>
+              <a:t>Μήκους</a:t>
+            </a:r>
+            <a:r>
+              <a:rPr dirty="0">
+                <a:latin typeface="Times New Roman" panose="02020603050405020304" pitchFamily="18" charset="0"/>
+                <a:cs typeface="Times New Roman" panose="02020603050405020304" pitchFamily="18" charset="0"/>
+              </a:rPr>
+              <a:t> 2.5 </a:t>
+            </a:r>
+            <a:r>
+              <a:rPr dirty="0" err="1">
+                <a:latin typeface="Times New Roman" panose="02020603050405020304" pitchFamily="18" charset="0"/>
+                <a:cs typeface="Times New Roman" panose="02020603050405020304" pitchFamily="18" charset="0"/>
+              </a:rPr>
+              <a:t>μέτρων</a:t>
+            </a:r>
+            <a:r>
+              <a:rPr dirty="0">
+                <a:latin typeface="Times New Roman" panose="02020603050405020304" pitchFamily="18" charset="0"/>
+                <a:cs typeface="Times New Roman" panose="02020603050405020304" pitchFamily="18" charset="0"/>
+              </a:rPr>
+              <a:t> απ</a:t>
+            </a:r>
+            <a:r>
+              <a:rPr dirty="0" err="1">
+                <a:latin typeface="Times New Roman" panose="02020603050405020304" pitchFamily="18" charset="0"/>
+                <a:cs typeface="Times New Roman" panose="02020603050405020304" pitchFamily="18" charset="0"/>
+              </a:rPr>
+              <a:t>ό</a:t>
+            </a:r>
+            <a:r>
+              <a:rPr dirty="0">
+                <a:latin typeface="Times New Roman" panose="02020603050405020304" pitchFamily="18" charset="0"/>
+                <a:cs typeface="Times New Roman" panose="02020603050405020304" pitchFamily="18" charset="0"/>
+              </a:rPr>
+              <a:t> </a:t>
+            </a:r>
+            <a:r>
+              <a:rPr dirty="0" err="1">
+                <a:latin typeface="Times New Roman" panose="02020603050405020304" pitchFamily="18" charset="0"/>
+                <a:cs typeface="Times New Roman" panose="02020603050405020304" pitchFamily="18" charset="0"/>
+              </a:rPr>
+              <a:t>το</a:t>
+            </a:r>
+            <a:r>
+              <a:rPr dirty="0">
+                <a:latin typeface="Times New Roman" panose="02020603050405020304" pitchFamily="18" charset="0"/>
+                <a:cs typeface="Times New Roman" panose="02020603050405020304" pitchFamily="18" charset="0"/>
+              </a:rPr>
+              <a:t> </a:t>
+            </a:r>
+            <a:r>
+              <a:rPr dirty="0" err="1">
+                <a:latin typeface="Times New Roman" panose="02020603050405020304" pitchFamily="18" charset="0"/>
+                <a:cs typeface="Times New Roman" panose="02020603050405020304" pitchFamily="18" charset="0"/>
+              </a:rPr>
+              <a:t>κέντρο</a:t>
+            </a:r>
+            <a:r>
+              <a:rPr dirty="0">
+                <a:latin typeface="Times New Roman" panose="02020603050405020304" pitchFamily="18" charset="0"/>
+                <a:cs typeface="Times New Roman" panose="02020603050405020304" pitchFamily="18" charset="0"/>
+              </a:rPr>
+              <a:t> </a:t>
+            </a:r>
+            <a:r>
+              <a:rPr dirty="0" err="1">
+                <a:latin typeface="Times New Roman" panose="02020603050405020304" pitchFamily="18" charset="0"/>
+                <a:cs typeface="Times New Roman" panose="02020603050405020304" pitchFamily="18" charset="0"/>
+              </a:rPr>
+              <a:t>της</a:t>
+            </a:r>
+            <a:r>
+              <a:rPr dirty="0">
+                <a:latin typeface="Times New Roman" panose="02020603050405020304" pitchFamily="18" charset="0"/>
+                <a:cs typeface="Times New Roman" panose="02020603050405020304" pitchFamily="18" charset="0"/>
+              </a:rPr>
+              <a:t> </a:t>
+            </a:r>
+            <a:r>
+              <a:rPr dirty="0" err="1">
+                <a:latin typeface="Times New Roman" panose="02020603050405020304" pitchFamily="18" charset="0"/>
+                <a:cs typeface="Times New Roman" panose="02020603050405020304" pitchFamily="18" charset="0"/>
+              </a:rPr>
+              <a:t>κάμερ</a:t>
+            </a:r>
+            <a:r>
+              <a:rPr dirty="0">
+                <a:latin typeface="Times New Roman" panose="02020603050405020304" pitchFamily="18" charset="0"/>
+                <a:cs typeface="Times New Roman" panose="02020603050405020304" pitchFamily="18" charset="0"/>
+              </a:rPr>
+              <a:t>α</a:t>
+            </a:r>
+            <a:r>
+              <a:rPr dirty="0" err="1">
+                <a:latin typeface="Times New Roman" panose="02020603050405020304" pitchFamily="18" charset="0"/>
+                <a:cs typeface="Times New Roman" panose="02020603050405020304" pitchFamily="18" charset="0"/>
+              </a:rPr>
+              <a:t>ς</a:t>
+            </a:r>
+            <a:r>
+              <a:rPr dirty="0">
+                <a:latin typeface="Times New Roman" panose="02020603050405020304" pitchFamily="18" charset="0"/>
+                <a:cs typeface="Times New Roman" panose="02020603050405020304" pitchFamily="18" charset="0"/>
+              </a:rPr>
+              <a:t>.</a:t>
             </a:r>
           </a:p>
           <a:p>
@@ -25268,7 +25488,165 @@
               </a:defRPr>
             </a:pPr>
             <a:r>
-              <a:t>• Μη Λυμένη Αρχικοποίηση: Οι ράβδοι ξεκινούν στις γωνίες [0.0°, 180.0°, 60.0°] (μη λυμένη κατάσταση).</a:t>
+              <a:rPr dirty="0">
+                <a:latin typeface="Times New Roman" panose="02020603050405020304" pitchFamily="18" charset="0"/>
+                <a:cs typeface="Times New Roman" panose="02020603050405020304" pitchFamily="18" charset="0"/>
+              </a:rPr>
+              <a:t>• </a:t>
+            </a:r>
+            <a:r>
+              <a:rPr dirty="0" err="1">
+                <a:latin typeface="Times New Roman" panose="02020603050405020304" pitchFamily="18" charset="0"/>
+                <a:cs typeface="Times New Roman" panose="02020603050405020304" pitchFamily="18" charset="0"/>
+              </a:rPr>
+              <a:t>Τυχ</a:t>
+            </a:r>
+            <a:r>
+              <a:rPr dirty="0">
+                <a:latin typeface="Times New Roman" panose="02020603050405020304" pitchFamily="18" charset="0"/>
+                <a:cs typeface="Times New Roman" panose="02020603050405020304" pitchFamily="18" charset="0"/>
+              </a:rPr>
+              <a:t>α</a:t>
+            </a:r>
+            <a:r>
+              <a:rPr dirty="0" err="1">
+                <a:latin typeface="Times New Roman" panose="02020603050405020304" pitchFamily="18" charset="0"/>
+                <a:cs typeface="Times New Roman" panose="02020603050405020304" pitchFamily="18" charset="0"/>
+              </a:rPr>
+              <a:t>ίες</a:t>
+            </a:r>
+            <a:r>
+              <a:rPr dirty="0">
+                <a:latin typeface="Times New Roman" panose="02020603050405020304" pitchFamily="18" charset="0"/>
+                <a:cs typeface="Times New Roman" panose="02020603050405020304" pitchFamily="18" charset="0"/>
+              </a:rPr>
+              <a:t> </a:t>
+            </a:r>
+            <a:r>
+              <a:rPr dirty="0" err="1">
+                <a:latin typeface="Times New Roman" panose="02020603050405020304" pitchFamily="18" charset="0"/>
+                <a:cs typeface="Times New Roman" panose="02020603050405020304" pitchFamily="18" charset="0"/>
+              </a:rPr>
+              <a:t>Αρχικές</a:t>
+            </a:r>
+            <a:r>
+              <a:rPr dirty="0">
+                <a:latin typeface="Times New Roman" panose="02020603050405020304" pitchFamily="18" charset="0"/>
+                <a:cs typeface="Times New Roman" panose="02020603050405020304" pitchFamily="18" charset="0"/>
+              </a:rPr>
+              <a:t> </a:t>
+            </a:r>
+            <a:r>
+              <a:rPr dirty="0" err="1">
+                <a:latin typeface="Times New Roman" panose="02020603050405020304" pitchFamily="18" charset="0"/>
+                <a:cs typeface="Times New Roman" panose="02020603050405020304" pitchFamily="18" charset="0"/>
+              </a:rPr>
+              <a:t>Γωνίες</a:t>
+            </a:r>
+            <a:r>
+              <a:rPr dirty="0">
+                <a:latin typeface="Times New Roman" panose="02020603050405020304" pitchFamily="18" charset="0"/>
+                <a:cs typeface="Times New Roman" panose="02020603050405020304" pitchFamily="18" charset="0"/>
+              </a:rPr>
+              <a:t>: </a:t>
+            </a:r>
+            <a:r>
+              <a:rPr dirty="0" err="1">
+                <a:latin typeface="Times New Roman" panose="02020603050405020304" pitchFamily="18" charset="0"/>
+                <a:cs typeface="Times New Roman" panose="02020603050405020304" pitchFamily="18" charset="0"/>
+              </a:rPr>
+              <a:t>Οι</a:t>
+            </a:r>
+            <a:r>
+              <a:rPr dirty="0">
+                <a:latin typeface="Times New Roman" panose="02020603050405020304" pitchFamily="18" charset="0"/>
+                <a:cs typeface="Times New Roman" panose="02020603050405020304" pitchFamily="18" charset="0"/>
+              </a:rPr>
+              <a:t> </a:t>
+            </a:r>
+            <a:r>
+              <a:rPr dirty="0" err="1">
+                <a:latin typeface="Times New Roman" panose="02020603050405020304" pitchFamily="18" charset="0"/>
+                <a:cs typeface="Times New Roman" panose="02020603050405020304" pitchFamily="18" charset="0"/>
+              </a:rPr>
+              <a:t>ρά</a:t>
+            </a:r>
+            <a:r>
+              <a:rPr dirty="0">
+                <a:latin typeface="Times New Roman" panose="02020603050405020304" pitchFamily="18" charset="0"/>
+                <a:cs typeface="Times New Roman" panose="02020603050405020304" pitchFamily="18" charset="0"/>
+              </a:rPr>
+              <a:t>β</a:t>
+            </a:r>
+            <a:r>
+              <a:rPr dirty="0" err="1">
+                <a:latin typeface="Times New Roman" panose="02020603050405020304" pitchFamily="18" charset="0"/>
+                <a:cs typeface="Times New Roman" panose="02020603050405020304" pitchFamily="18" charset="0"/>
+              </a:rPr>
+              <a:t>δοι</a:t>
+            </a:r>
+            <a:r>
+              <a:rPr dirty="0">
+                <a:latin typeface="Times New Roman" panose="02020603050405020304" pitchFamily="18" charset="0"/>
+                <a:cs typeface="Times New Roman" panose="02020603050405020304" pitchFamily="18" charset="0"/>
+              </a:rPr>
+              <a:t> </a:t>
+            </a:r>
+            <a:r>
+              <a:rPr dirty="0" err="1">
+                <a:latin typeface="Times New Roman" panose="02020603050405020304" pitchFamily="18" charset="0"/>
+                <a:cs typeface="Times New Roman" panose="02020603050405020304" pitchFamily="18" charset="0"/>
+              </a:rPr>
+              <a:t>ξεκινούν</a:t>
+            </a:r>
+            <a:r>
+              <a:rPr dirty="0">
+                <a:latin typeface="Times New Roman" panose="02020603050405020304" pitchFamily="18" charset="0"/>
+                <a:cs typeface="Times New Roman" panose="02020603050405020304" pitchFamily="18" charset="0"/>
+              </a:rPr>
+              <a:t> α</a:t>
+            </a:r>
+            <a:r>
+              <a:rPr dirty="0" err="1">
+                <a:latin typeface="Times New Roman" panose="02020603050405020304" pitchFamily="18" charset="0"/>
+                <a:cs typeface="Times New Roman" panose="02020603050405020304" pitchFamily="18" charset="0"/>
+              </a:rPr>
+              <a:t>ν</a:t>
+            </a:r>
+            <a:r>
+              <a:rPr dirty="0">
+                <a:latin typeface="Times New Roman" panose="02020603050405020304" pitchFamily="18" charset="0"/>
+                <a:cs typeface="Times New Roman" panose="02020603050405020304" pitchFamily="18" charset="0"/>
+              </a:rPr>
+              <a:t>α</a:t>
+            </a:r>
+            <a:r>
+              <a:rPr dirty="0" err="1">
+                <a:latin typeface="Times New Roman" panose="02020603050405020304" pitchFamily="18" charset="0"/>
+                <a:cs typeface="Times New Roman" panose="02020603050405020304" pitchFamily="18" charset="0"/>
+              </a:rPr>
+              <a:t>κ</a:t>
+            </a:r>
+            <a:r>
+              <a:rPr dirty="0">
+                <a:latin typeface="Times New Roman" panose="02020603050405020304" pitchFamily="18" charset="0"/>
+                <a:cs typeface="Times New Roman" panose="02020603050405020304" pitchFamily="18" charset="0"/>
+              </a:rPr>
+              <a:t>α</a:t>
+            </a:r>
+            <a:r>
+              <a:rPr dirty="0" err="1">
+                <a:latin typeface="Times New Roman" panose="02020603050405020304" pitchFamily="18" charset="0"/>
+                <a:cs typeface="Times New Roman" panose="02020603050405020304" pitchFamily="18" charset="0"/>
+              </a:rPr>
+              <a:t>τεμένες</a:t>
+            </a:r>
+            <a:r>
+              <a:rPr dirty="0">
+                <a:latin typeface="Times New Roman" panose="02020603050405020304" pitchFamily="18" charset="0"/>
+                <a:cs typeface="Times New Roman" panose="02020603050405020304" pitchFamily="18" charset="0"/>
+              </a:rPr>
+              <a:t> (120°, 0°, 60°).</a:t>
             </a:r>
           </a:p>
           <a:p>

--- a/Deliverables/The_Secret_Library_Presentation.pptx
+++ b/Deliverables/The_Secret_Library_Presentation.pptx
@@ -449,7 +449,7 @@
           <a:lstStyle/>
           <a:p>
             <a:r>
-              <a:t>Ιδιαίτερη έμφαση δόθηκε στη βελτιστοποίηση: μηδενικό μέγεθος assets μέσω procedural primitives, batching υλικών για χαμηλά draw calls, και Jolt Physics για ταχύτατες συγκρούσεις.</a:t>
+              <a:t>Ιδιαίτερη έμφαση δόθηκε στη βελτιστοποίηση: μηδενικό μέγεθος assets μέσω procedural primitives, διαμοιρασμός κοινών PBR υλικών για χαμηλά draw calls, και Jolt Physics για ταχύτατες συγκρούσεις.</a:t>
             </a:r>
           </a:p>
         </p:txBody>
@@ -1079,7 +1079,7 @@
           <a:lstStyle/>
           <a:p>
             <a:r>
-              <a:t>Η ανίχνευση γίνεται μέσω RayCast3D. Όταν ο παίκτης κοιτάζει κάποιο αντικείμενο, το στόχαστρο μετατρέπεται δυναμικά σε χέρι 🫱 και εμφανίζεται το κατάλληλο μήνυμα προτροπής.</a:t>
+              <a:t>Η ανίχνευση γίνεται μέσω RayCast3D. Όταν ο παίκτης κοιτάζει κάποιο αντικείμενο, το στόχαστρο μετατρέπεται δυναμικά σε χέρι ✋ και εμφανίζεται το κατάλληλο μήνυμα προτροπής.</a:t>
             </a:r>
           </a:p>
         </p:txBody>
@@ -5078,7 +5078,7 @@
         <p:spPr>
           <a:xfrm>
             <a:off x="731520" y="1691640"/>
-            <a:ext cx="5166360" cy="4663440"/>
+            <a:ext cx="5852160" cy="2240280"/>
           </a:xfrm>
           <a:prstGeom prst="roundRect">
             <a:avLst/>
@@ -5203,7 +5203,7 @@
               <a:spcAft>
                 <a:spcPts val="900"/>
               </a:spcAft>
-              <a:defRPr sz="1300">
+              <a:defRPr sz="1200">
                 <a:solidFill>
                   <a:srgbClr val="DCE2EB"/>
                 </a:solidFill>
@@ -5404,7 +5404,7 @@
               <a:spcAft>
                 <a:spcPts val="900"/>
               </a:spcAft>
-              <a:defRPr sz="1300">
+              <a:defRPr sz="1200">
                 <a:solidFill>
                   <a:srgbClr val="DCE2EB"/>
                 </a:solidFill>
@@ -5479,7 +5479,7 @@
               <a:spcAft>
                 <a:spcPts val="900"/>
               </a:spcAft>
-              <a:defRPr sz="1300">
+              <a:defRPr sz="1200">
                 <a:solidFill>
                   <a:srgbClr val="DCE2EB"/>
                 </a:solidFill>
@@ -5680,7 +5680,7 @@
               <a:spcAft>
                 <a:spcPts val="900"/>
               </a:spcAft>
-              <a:defRPr sz="1300">
+              <a:defRPr sz="1200">
                 <a:solidFill>
                   <a:srgbClr val="DCE2EB"/>
                 </a:solidFill>
@@ -5886,8 +5886,8 @@
         </p:nvSpPr>
         <p:spPr>
           <a:xfrm>
-            <a:off x="6263640" y="1691640"/>
-            <a:ext cx="5166360" cy="4663440"/>
+            <a:off x="731520" y="4069080"/>
+            <a:ext cx="5852160" cy="2286000"/>
           </a:xfrm>
           <a:prstGeom prst="roundRect">
             <a:avLst/>
@@ -5970,7 +5970,7 @@
               <a:spcAft>
                 <a:spcPts val="900"/>
               </a:spcAft>
-              <a:defRPr sz="1300">
+              <a:defRPr sz="1200">
                 <a:solidFill>
                   <a:srgbClr val="DCE2EB"/>
                 </a:solidFill>
@@ -6129,7 +6129,7 @@
               <a:spcAft>
                 <a:spcPts val="900"/>
               </a:spcAft>
-              <a:defRPr sz="1300">
+              <a:defRPr sz="1200">
                 <a:solidFill>
                   <a:srgbClr val="DCE2EB"/>
                 </a:solidFill>
@@ -6288,7 +6288,7 @@
               <a:spcAft>
                 <a:spcPts val="900"/>
               </a:spcAft>
-              <a:defRPr sz="1300">
+              <a:defRPr sz="1200">
                 <a:solidFill>
                   <a:srgbClr val="DCE2EB"/>
                 </a:solidFill>
@@ -6475,7 +6475,7 @@
               <a:spcAft>
                 <a:spcPts val="900"/>
               </a:spcAft>
-              <a:defRPr sz="1300">
+              <a:defRPr sz="1200">
                 <a:solidFill>
                   <a:srgbClr val="DCE2EB"/>
                 </a:solidFill>
@@ -6655,6 +6655,65 @@
                 <a:cs typeface="Times New Roman" panose="02020603050405020304" pitchFamily="18" charset="0"/>
               </a:rPr>
               <a:t>.</a:t>
+            </a:r>
+          </a:p>
+        </p:txBody>
+      </p:sp>
+      <p:pic>
+        <p:nvPicPr>
+          <p:cNvPr id="8" name="Picture 7" descr="image4.png"/>
+          <p:cNvPicPr>
+            <a:picLocks noChangeAspect="1"/>
+          </p:cNvPicPr>
+          <p:nvPr/>
+        </p:nvPicPr>
+        <p:blipFill>
+          <a:blip r:embed="rId3"/>
+          <a:stretch>
+            <a:fillRect/>
+          </a:stretch>
+        </p:blipFill>
+        <p:spPr>
+          <a:xfrm>
+            <a:off x="6858000" y="1691640"/>
+            <a:ext cx="4572000" cy="4023360"/>
+          </a:xfrm>
+          <a:prstGeom prst="rect">
+            <a:avLst/>
+          </a:prstGeom>
+        </p:spPr>
+      </p:pic>
+      <p:sp>
+        <p:nvSpPr>
+          <p:cNvPr id="9" name="TextBox 8"/>
+          <p:cNvSpPr txBox="1"/>
+          <p:nvPr/>
+        </p:nvSpPr>
+        <p:spPr>
+          <a:xfrm>
+            <a:off x="6858000" y="5779008"/>
+            <a:ext cx="4572000" cy="502920"/>
+          </a:xfrm>
+          <a:prstGeom prst="rect">
+            <a:avLst/>
+          </a:prstGeom>
+          <a:noFill/>
+        </p:spPr>
+        <p:txBody>
+          <a:bodyPr wrap="square">
+            <a:spAutoFit/>
+          </a:bodyPr>
+          <a:lstStyle/>
+          <a:p>
+            <a:pPr algn="ctr">
+              <a:defRPr sz="1100">
+                <a:solidFill>
+                  <a:srgbClr val="D4AF37"/>
+                </a:solidFill>
+              </a:defRPr>
+            </a:pPr>
+            <a:r>
+              <a:t>📷 In-Game: Το ξεκλείδωμα θυρεού &amp; η μυστική πόρτα</a:t>
             </a:r>
           </a:p>
         </p:txBody>
@@ -7081,220 +7140,46 @@
           <a:lstStyle/>
           <a:p>
             <a:pPr algn="ctr">
-              <a:defRPr sz="1600" b="1">
+              <a:defRPr sz="1700" b="1">
                 <a:solidFill>
                   <a:srgbClr val="D4AF37"/>
                 </a:solidFill>
               </a:defRPr>
             </a:pPr>
             <a:r>
-              <a:rPr dirty="0">
-                <a:latin typeface="Times New Roman" panose="02020603050405020304" pitchFamily="18" charset="0"/>
-                <a:cs typeface="Times New Roman" panose="02020603050405020304" pitchFamily="18" charset="0"/>
-              </a:rPr>
               <a:t>📦 Asset &amp; Geometry</a:t>
             </a:r>
           </a:p>
           <a:p>
             <a:pPr>
-              <a:spcAft>
-                <a:spcPts val="1200"/>
-              </a:spcAft>
-              <a:defRPr sz="1400" b="1">
-                <a:solidFill>
-                  <a:srgbClr val="FFFFFF"/>
-                </a:solidFill>
-              </a:defRPr>
+              <a:defRPr sz="1500"/>
             </a:pPr>
             <a:r>
-              <a:rPr dirty="0">
-                <a:latin typeface="Times New Roman" panose="02020603050405020304" pitchFamily="18" charset="0"/>
-                <a:cs typeface="Times New Roman" panose="02020603050405020304" pitchFamily="18" charset="0"/>
-              </a:rPr>
               <a:t>Procedural Primitives</a:t>
             </a:r>
           </a:p>
           <a:p>
-            <a:pPr algn="just">
-              <a:spcAft>
-                <a:spcPts val="800"/>
-              </a:spcAft>
-              <a:defRPr sz="1200">
-                <a:solidFill>
-                  <a:srgbClr val="DCE2EB"/>
-                </a:solidFill>
-              </a:defRPr>
+            <a:pPr>
+              <a:defRPr sz="1300"/>
             </a:pPr>
             <a:r>
-              <a:rPr dirty="0">
-                <a:latin typeface="Times New Roman" panose="02020603050405020304" pitchFamily="18" charset="0"/>
-                <a:cs typeface="Times New Roman" panose="02020603050405020304" pitchFamily="18" charset="0"/>
-              </a:rPr>
-              <a:t>• </a:t>
-            </a:r>
-            <a:r>
-              <a:rPr dirty="0" err="1">
-                <a:latin typeface="Times New Roman" panose="02020603050405020304" pitchFamily="18" charset="0"/>
-                <a:cs typeface="Times New Roman" panose="02020603050405020304" pitchFamily="18" charset="0"/>
-              </a:rPr>
-              <a:t>Μηδενικό</a:t>
-            </a:r>
-            <a:r>
-              <a:rPr dirty="0">
-                <a:latin typeface="Times New Roman" panose="02020603050405020304" pitchFamily="18" charset="0"/>
-                <a:cs typeface="Times New Roman" panose="02020603050405020304" pitchFamily="18" charset="0"/>
-              </a:rPr>
-              <a:t> </a:t>
-            </a:r>
-            <a:r>
-              <a:rPr dirty="0" err="1">
-                <a:latin typeface="Times New Roman" panose="02020603050405020304" pitchFamily="18" charset="0"/>
-                <a:cs typeface="Times New Roman" panose="02020603050405020304" pitchFamily="18" charset="0"/>
-              </a:rPr>
-              <a:t>μέγεθος</a:t>
-            </a:r>
-            <a:r>
-              <a:rPr dirty="0">
-                <a:latin typeface="Times New Roman" panose="02020603050405020304" pitchFamily="18" charset="0"/>
-                <a:cs typeface="Times New Roman" panose="02020603050405020304" pitchFamily="18" charset="0"/>
-              </a:rPr>
-              <a:t> </a:t>
-            </a:r>
-            <a:r>
-              <a:rPr dirty="0" err="1">
-                <a:latin typeface="Times New Roman" panose="02020603050405020304" pitchFamily="18" charset="0"/>
-                <a:cs typeface="Times New Roman" panose="02020603050405020304" pitchFamily="18" charset="0"/>
-              </a:rPr>
-              <a:t>εξωτερικών</a:t>
-            </a:r>
-            <a:r>
-              <a:rPr dirty="0">
-                <a:latin typeface="Times New Roman" panose="02020603050405020304" pitchFamily="18" charset="0"/>
-                <a:cs typeface="Times New Roman" panose="02020603050405020304" pitchFamily="18" charset="0"/>
-              </a:rPr>
-              <a:t> 3D α</a:t>
-            </a:r>
-            <a:r>
-              <a:rPr dirty="0" err="1">
-                <a:latin typeface="Times New Roman" panose="02020603050405020304" pitchFamily="18" charset="0"/>
-                <a:cs typeface="Times New Roman" panose="02020603050405020304" pitchFamily="18" charset="0"/>
-              </a:rPr>
-              <a:t>ρχείων</a:t>
-            </a:r>
-            <a:r>
-              <a:rPr dirty="0">
-                <a:latin typeface="Times New Roman" panose="02020603050405020304" pitchFamily="18" charset="0"/>
-                <a:cs typeface="Times New Roman" panose="02020603050405020304" pitchFamily="18" charset="0"/>
-              </a:rPr>
-              <a:t> (.obj/.</a:t>
-            </a:r>
-            <a:r>
-              <a:rPr dirty="0" err="1">
-                <a:latin typeface="Times New Roman" panose="02020603050405020304" pitchFamily="18" charset="0"/>
-                <a:cs typeface="Times New Roman" panose="02020603050405020304" pitchFamily="18" charset="0"/>
-              </a:rPr>
-              <a:t>gltf</a:t>
-            </a:r>
-            <a:r>
-              <a:rPr dirty="0">
-                <a:latin typeface="Times New Roman" panose="02020603050405020304" pitchFamily="18" charset="0"/>
-                <a:cs typeface="Times New Roman" panose="02020603050405020304" pitchFamily="18" charset="0"/>
-              </a:rPr>
-              <a:t>)</a:t>
-            </a:r>
-          </a:p>
-          <a:p>
-            <a:pPr algn="just">
-              <a:spcAft>
-                <a:spcPts val="800"/>
-              </a:spcAft>
-              <a:defRPr sz="1200">
-                <a:solidFill>
-                  <a:srgbClr val="DCE2EB"/>
-                </a:solidFill>
-              </a:defRPr>
+              <a:t>• Μηδενικό μέγεθος εξωτερικών 3D αρχείων (.obj/.gltf)</a:t>
+            </a:r>
+          </a:p>
+          <a:p>
+            <a:pPr>
+              <a:defRPr sz="1300"/>
             </a:pPr>
             <a:r>
-              <a:rPr dirty="0">
-                <a:latin typeface="Times New Roman" panose="02020603050405020304" pitchFamily="18" charset="0"/>
-                <a:cs typeface="Times New Roman" panose="02020603050405020304" pitchFamily="18" charset="0"/>
-              </a:rPr>
-              <a:t>• </a:t>
-            </a:r>
-            <a:r>
-              <a:rPr dirty="0" err="1">
-                <a:latin typeface="Times New Roman" panose="02020603050405020304" pitchFamily="18" charset="0"/>
-                <a:cs typeface="Times New Roman" panose="02020603050405020304" pitchFamily="18" charset="0"/>
-              </a:rPr>
-              <a:t>Χρήση</a:t>
-            </a:r>
-            <a:r>
-              <a:rPr dirty="0">
-                <a:latin typeface="Times New Roman" panose="02020603050405020304" pitchFamily="18" charset="0"/>
-                <a:cs typeface="Times New Roman" panose="02020603050405020304" pitchFamily="18" charset="0"/>
-              </a:rPr>
-              <a:t> native Box/Cylinder/Sphere meshes</a:t>
-            </a:r>
-          </a:p>
-          <a:p>
-            <a:pPr algn="just">
-              <a:spcAft>
-                <a:spcPts val="800"/>
-              </a:spcAft>
-              <a:defRPr sz="1200">
-                <a:solidFill>
-                  <a:srgbClr val="DCE2EB"/>
-                </a:solidFill>
-              </a:defRPr>
+              <a:t>• Χρήση native Box/Cylinder/Sphere meshes (20.892 τρίγωνα)</a:t>
+            </a:r>
+          </a:p>
+          <a:p>
+            <a:pPr>
+              <a:defRPr sz="1300"/>
             </a:pPr>
             <a:r>
-              <a:rPr dirty="0">
-                <a:latin typeface="Times New Roman" panose="02020603050405020304" pitchFamily="18" charset="0"/>
-                <a:cs typeface="Times New Roman" panose="02020603050405020304" pitchFamily="18" charset="0"/>
-              </a:rPr>
-              <a:t>• </a:t>
-            </a:r>
-            <a:r>
-              <a:rPr dirty="0" err="1">
-                <a:latin typeface="Times New Roman" panose="02020603050405020304" pitchFamily="18" charset="0"/>
-                <a:cs typeface="Times New Roman" panose="02020603050405020304" pitchFamily="18" charset="0"/>
-              </a:rPr>
-              <a:t>Άμεση</a:t>
-            </a:r>
-            <a:r>
-              <a:rPr dirty="0">
-                <a:latin typeface="Times New Roman" panose="02020603050405020304" pitchFamily="18" charset="0"/>
-                <a:cs typeface="Times New Roman" panose="02020603050405020304" pitchFamily="18" charset="0"/>
-              </a:rPr>
-              <a:t> </a:t>
-            </a:r>
-            <a:r>
-              <a:rPr dirty="0" err="1">
-                <a:latin typeface="Times New Roman" panose="02020603050405020304" pitchFamily="18" charset="0"/>
-                <a:cs typeface="Times New Roman" panose="02020603050405020304" pitchFamily="18" charset="0"/>
-              </a:rPr>
-              <a:t>φόρτωση</a:t>
-            </a:r>
-            <a:r>
-              <a:rPr dirty="0">
-                <a:latin typeface="Times New Roman" panose="02020603050405020304" pitchFamily="18" charset="0"/>
-                <a:cs typeface="Times New Roman" panose="02020603050405020304" pitchFamily="18" charset="0"/>
-              </a:rPr>
-              <a:t> </a:t>
-            </a:r>
-            <a:r>
-              <a:rPr dirty="0" err="1">
-                <a:latin typeface="Times New Roman" panose="02020603050405020304" pitchFamily="18" charset="0"/>
-                <a:cs typeface="Times New Roman" panose="02020603050405020304" pitchFamily="18" charset="0"/>
-              </a:rPr>
-              <a:t>στη</a:t>
-            </a:r>
-            <a:r>
-              <a:rPr dirty="0">
-                <a:latin typeface="Times New Roman" panose="02020603050405020304" pitchFamily="18" charset="0"/>
-                <a:cs typeface="Times New Roman" panose="02020603050405020304" pitchFamily="18" charset="0"/>
-              </a:rPr>
-              <a:t> VRAM</a:t>
+              <a:t>• Άμεση φόρτωση στη VRAM χωρίς I/O stalls</a:t>
             </a:r>
           </a:p>
         </p:txBody>
@@ -7341,262 +7226,46 @@
           <a:lstStyle/>
           <a:p>
             <a:pPr algn="ctr">
-              <a:defRPr sz="1600" b="1">
+              <a:defRPr sz="1700" b="1">
                 <a:solidFill>
                   <a:srgbClr val="4ECDC4"/>
                 </a:solidFill>
               </a:defRPr>
             </a:pPr>
             <a:r>
-              <a:rPr dirty="0">
-                <a:latin typeface="Times New Roman" panose="02020603050405020304" pitchFamily="18" charset="0"/>
-                <a:cs typeface="Times New Roman" panose="02020603050405020304" pitchFamily="18" charset="0"/>
-              </a:rPr>
               <a:t>🎨 Rendering &amp; Draw Calls</a:t>
             </a:r>
           </a:p>
           <a:p>
             <a:pPr>
-              <a:spcAft>
-                <a:spcPts val="1200"/>
-              </a:spcAft>
-              <a:defRPr sz="1400" b="1">
-                <a:solidFill>
-                  <a:srgbClr val="FFFFFF"/>
-                </a:solidFill>
-              </a:defRPr>
+              <a:defRPr sz="1500"/>
             </a:pPr>
             <a:r>
-              <a:rPr dirty="0">
-                <a:latin typeface="Times New Roman" panose="02020603050405020304" pitchFamily="18" charset="0"/>
-                <a:cs typeface="Times New Roman" panose="02020603050405020304" pitchFamily="18" charset="0"/>
-              </a:rPr>
-              <a:t>PBR Material Batching</a:t>
-            </a:r>
-          </a:p>
-          <a:p>
-            <a:pPr algn="just">
-              <a:spcAft>
-                <a:spcPts val="800"/>
-              </a:spcAft>
-              <a:defRPr sz="1200">
-                <a:solidFill>
-                  <a:srgbClr val="DCE2EB"/>
-                </a:solidFill>
-              </a:defRPr>
+              <a:t>Material Sharing &amp; State Optimization</a:t>
+            </a:r>
+          </a:p>
+          <a:p>
+            <a:pPr>
+              <a:defRPr sz="1300"/>
             </a:pPr>
             <a:r>
-              <a:rPr dirty="0">
-                <a:latin typeface="Times New Roman" panose="02020603050405020304" pitchFamily="18" charset="0"/>
-                <a:cs typeface="Times New Roman" panose="02020603050405020304" pitchFamily="18" charset="0"/>
-              </a:rPr>
-              <a:t>• </a:t>
-            </a:r>
-            <a:r>
-              <a:rPr dirty="0" err="1">
-                <a:latin typeface="Times New Roman" panose="02020603050405020304" pitchFamily="18" charset="0"/>
-                <a:cs typeface="Times New Roman" panose="02020603050405020304" pitchFamily="18" charset="0"/>
-              </a:rPr>
-              <a:t>Ε</a:t>
-            </a:r>
-            <a:r>
-              <a:rPr dirty="0">
-                <a:latin typeface="Times New Roman" panose="02020603050405020304" pitchFamily="18" charset="0"/>
-                <a:cs typeface="Times New Roman" panose="02020603050405020304" pitchFamily="18" charset="0"/>
-              </a:rPr>
-              <a:t>πα</a:t>
-            </a:r>
-            <a:r>
-              <a:rPr dirty="0" err="1">
-                <a:latin typeface="Times New Roman" panose="02020603050405020304" pitchFamily="18" charset="0"/>
-                <a:cs typeface="Times New Roman" panose="02020603050405020304" pitchFamily="18" charset="0"/>
-              </a:rPr>
-              <a:t>ν</a:t>
-            </a:r>
-            <a:r>
-              <a:rPr dirty="0">
-                <a:latin typeface="Times New Roman" panose="02020603050405020304" pitchFamily="18" charset="0"/>
-                <a:cs typeface="Times New Roman" panose="02020603050405020304" pitchFamily="18" charset="0"/>
-              </a:rPr>
-              <a:t>α</a:t>
-            </a:r>
-            <a:r>
-              <a:rPr dirty="0" err="1">
-                <a:latin typeface="Times New Roman" panose="02020603050405020304" pitchFamily="18" charset="0"/>
-                <a:cs typeface="Times New Roman" panose="02020603050405020304" pitchFamily="18" charset="0"/>
-              </a:rPr>
-              <a:t>χρησιμο</a:t>
-            </a:r>
-            <a:r>
-              <a:rPr dirty="0">
-                <a:latin typeface="Times New Roman" panose="02020603050405020304" pitchFamily="18" charset="0"/>
-                <a:cs typeface="Times New Roman" panose="02020603050405020304" pitchFamily="18" charset="0"/>
-              </a:rPr>
-              <a:t>π</a:t>
-            </a:r>
-            <a:r>
-              <a:rPr dirty="0" err="1">
-                <a:latin typeface="Times New Roman" panose="02020603050405020304" pitchFamily="18" charset="0"/>
-                <a:cs typeface="Times New Roman" panose="02020603050405020304" pitchFamily="18" charset="0"/>
-              </a:rPr>
-              <a:t>οίηση</a:t>
-            </a:r>
-            <a:r>
-              <a:rPr dirty="0">
-                <a:latin typeface="Times New Roman" panose="02020603050405020304" pitchFamily="18" charset="0"/>
-                <a:cs typeface="Times New Roman" panose="02020603050405020304" pitchFamily="18" charset="0"/>
-              </a:rPr>
-              <a:t> StandardMaterial3D</a:t>
-            </a:r>
-          </a:p>
-          <a:p>
-            <a:pPr algn="just">
-              <a:spcAft>
-                <a:spcPts val="800"/>
-              </a:spcAft>
-              <a:defRPr sz="1200">
-                <a:solidFill>
-                  <a:srgbClr val="DCE2EB"/>
-                </a:solidFill>
-              </a:defRPr>
+              <a:t>• Επαναχρησιμοποίηση StandardMaterial3D (κοινό ξύλο/μέταλλο)</a:t>
+            </a:r>
+          </a:p>
+          <a:p>
+            <a:pPr>
+              <a:defRPr sz="1300"/>
             </a:pPr>
             <a:r>
-              <a:rPr dirty="0">
-                <a:latin typeface="Times New Roman" panose="02020603050405020304" pitchFamily="18" charset="0"/>
-                <a:cs typeface="Times New Roman" panose="02020603050405020304" pitchFamily="18" charset="0"/>
-              </a:rPr>
-              <a:t>• </a:t>
-            </a:r>
-            <a:r>
-              <a:rPr dirty="0" err="1">
-                <a:latin typeface="Times New Roman" panose="02020603050405020304" pitchFamily="18" charset="0"/>
-                <a:cs typeface="Times New Roman" panose="02020603050405020304" pitchFamily="18" charset="0"/>
-              </a:rPr>
-              <a:t>Ελ</a:t>
-            </a:r>
-            <a:r>
-              <a:rPr dirty="0">
-                <a:latin typeface="Times New Roman" panose="02020603050405020304" pitchFamily="18" charset="0"/>
-                <a:cs typeface="Times New Roman" panose="02020603050405020304" pitchFamily="18" charset="0"/>
-              </a:rPr>
-              <a:t>α</a:t>
-            </a:r>
-            <a:r>
-              <a:rPr dirty="0" err="1">
-                <a:latin typeface="Times New Roman" panose="02020603050405020304" pitchFamily="18" charset="0"/>
-                <a:cs typeface="Times New Roman" panose="02020603050405020304" pitchFamily="18" charset="0"/>
-              </a:rPr>
-              <a:t>χιστο</a:t>
-            </a:r>
-            <a:r>
-              <a:rPr dirty="0">
-                <a:latin typeface="Times New Roman" panose="02020603050405020304" pitchFamily="18" charset="0"/>
-                <a:cs typeface="Times New Roman" panose="02020603050405020304" pitchFamily="18" charset="0"/>
-              </a:rPr>
-              <a:t>π</a:t>
-            </a:r>
-            <a:r>
-              <a:rPr dirty="0" err="1">
-                <a:latin typeface="Times New Roman" panose="02020603050405020304" pitchFamily="18" charset="0"/>
-                <a:cs typeface="Times New Roman" panose="02020603050405020304" pitchFamily="18" charset="0"/>
-              </a:rPr>
-              <a:t>οίηση</a:t>
-            </a:r>
-            <a:r>
-              <a:rPr dirty="0">
-                <a:latin typeface="Times New Roman" panose="02020603050405020304" pitchFamily="18" charset="0"/>
-                <a:cs typeface="Times New Roman" panose="02020603050405020304" pitchFamily="18" charset="0"/>
-              </a:rPr>
-              <a:t> shader program swaps</a:t>
-            </a:r>
-          </a:p>
-          <a:p>
-            <a:pPr algn="just">
-              <a:spcAft>
-                <a:spcPts val="800"/>
-              </a:spcAft>
-              <a:defRPr sz="1200">
-                <a:solidFill>
-                  <a:srgbClr val="DCE2EB"/>
-                </a:solidFill>
-              </a:defRPr>
+              <a:t>• 68 Draw Calls, 89 Αντικείμενα (-55% έναντι naive 150 DC)</a:t>
+            </a:r>
+          </a:p>
+          <a:p>
+            <a:pPr>
+              <a:defRPr sz="1300"/>
             </a:pPr>
             <a:r>
-              <a:rPr dirty="0">
-                <a:latin typeface="Times New Roman" panose="02020603050405020304" pitchFamily="18" charset="0"/>
-                <a:cs typeface="Times New Roman" panose="02020603050405020304" pitchFamily="18" charset="0"/>
-              </a:rPr>
-              <a:t>• </a:t>
-            </a:r>
-            <a:r>
-              <a:rPr dirty="0" err="1">
-                <a:latin typeface="Times New Roman" panose="02020603050405020304" pitchFamily="18" charset="0"/>
-                <a:cs typeface="Times New Roman" panose="02020603050405020304" pitchFamily="18" charset="0"/>
-              </a:rPr>
-              <a:t>Στ</a:t>
-            </a:r>
-            <a:r>
-              <a:rPr dirty="0">
-                <a:latin typeface="Times New Roman" panose="02020603050405020304" pitchFamily="18" charset="0"/>
-                <a:cs typeface="Times New Roman" panose="02020603050405020304" pitchFamily="18" charset="0"/>
-              </a:rPr>
-              <a:t>α</a:t>
-            </a:r>
-            <a:r>
-              <a:rPr dirty="0" err="1">
-                <a:latin typeface="Times New Roman" panose="02020603050405020304" pitchFamily="18" charset="0"/>
-                <a:cs typeface="Times New Roman" panose="02020603050405020304" pitchFamily="18" charset="0"/>
-              </a:rPr>
-              <a:t>θερά</a:t>
-            </a:r>
-            <a:r>
-              <a:rPr dirty="0">
-                <a:latin typeface="Times New Roman" panose="02020603050405020304" pitchFamily="18" charset="0"/>
-                <a:cs typeface="Times New Roman" panose="02020603050405020304" pitchFamily="18" charset="0"/>
-              </a:rPr>
-              <a:t> 60+ FPS </a:t>
-            </a:r>
-            <a:r>
-              <a:rPr dirty="0" err="1">
-                <a:latin typeface="Times New Roman" panose="02020603050405020304" pitchFamily="18" charset="0"/>
-                <a:cs typeface="Times New Roman" panose="02020603050405020304" pitchFamily="18" charset="0"/>
-              </a:rPr>
-              <a:t>σε</a:t>
-            </a:r>
-            <a:r>
-              <a:rPr dirty="0">
-                <a:latin typeface="Times New Roman" panose="02020603050405020304" pitchFamily="18" charset="0"/>
-                <a:cs typeface="Times New Roman" panose="02020603050405020304" pitchFamily="18" charset="0"/>
-              </a:rPr>
-              <a:t> </a:t>
-            </a:r>
-            <a:r>
-              <a:rPr dirty="0" err="1">
-                <a:latin typeface="Times New Roman" panose="02020603050405020304" pitchFamily="18" charset="0"/>
-                <a:cs typeface="Times New Roman" panose="02020603050405020304" pitchFamily="18" charset="0"/>
-              </a:rPr>
-              <a:t>κάθε</a:t>
-            </a:r>
-            <a:r>
-              <a:rPr dirty="0">
-                <a:latin typeface="Times New Roman" panose="02020603050405020304" pitchFamily="18" charset="0"/>
-                <a:cs typeface="Times New Roman" panose="02020603050405020304" pitchFamily="18" charset="0"/>
-              </a:rPr>
-              <a:t> </a:t>
-            </a:r>
-            <a:r>
-              <a:rPr dirty="0" err="1">
-                <a:latin typeface="Times New Roman" panose="02020603050405020304" pitchFamily="18" charset="0"/>
-                <a:cs typeface="Times New Roman" panose="02020603050405020304" pitchFamily="18" charset="0"/>
-              </a:rPr>
-              <a:t>σύστημ</a:t>
-            </a:r>
-            <a:r>
-              <a:rPr dirty="0">
-                <a:latin typeface="Times New Roman" panose="02020603050405020304" pitchFamily="18" charset="0"/>
-                <a:cs typeface="Times New Roman" panose="02020603050405020304" pitchFamily="18" charset="0"/>
-              </a:rPr>
-              <a:t>α</a:t>
+              <a:t>• 108.5 FPS avg (χωρίς V-Sync) / 60 FPS (V-Sync)</a:t>
             </a:r>
           </a:p>
         </p:txBody>
@@ -10193,49 +9862,49 @@
                 <a:latin typeface="Times New Roman" panose="02020603050405020304" pitchFamily="18" charset="0"/>
                 <a:cs typeface="Times New Roman" panose="02020603050405020304" pitchFamily="18" charset="0"/>
               </a:rPr>
-              <a:t>180 </a:t>
-            </a:r>
-            <a:r>
-              <a:rPr dirty="0" err="1">
-                <a:latin typeface="Times New Roman" panose="02020603050405020304" pitchFamily="18" charset="0"/>
-                <a:cs typeface="Times New Roman" panose="02020603050405020304" pitchFamily="18" charset="0"/>
-              </a:rPr>
-              <a:t>Γρ</a:t>
-            </a:r>
-            <a:r>
-              <a:rPr dirty="0">
-                <a:latin typeface="Times New Roman" panose="02020603050405020304" pitchFamily="18" charset="0"/>
-                <a:cs typeface="Times New Roman" panose="02020603050405020304" pitchFamily="18" charset="0"/>
-              </a:rPr>
-              <a:t>α</a:t>
-            </a:r>
-            <a:r>
-              <a:rPr dirty="0" err="1">
-                <a:latin typeface="Times New Roman" panose="02020603050405020304" pitchFamily="18" charset="0"/>
-                <a:cs typeface="Times New Roman" panose="02020603050405020304" pitchFamily="18" charset="0"/>
-              </a:rPr>
-              <a:t>μμές</a:t>
-            </a:r>
-            <a:r>
-              <a:rPr dirty="0">
-                <a:latin typeface="Times New Roman" panose="02020603050405020304" pitchFamily="18" charset="0"/>
-                <a:cs typeface="Times New Roman" panose="02020603050405020304" pitchFamily="18" charset="0"/>
-              </a:rPr>
-              <a:t> </a:t>
-            </a:r>
-            <a:r>
-              <a:rPr dirty="0" err="1">
-                <a:latin typeface="Times New Roman" panose="02020603050405020304" pitchFamily="18" charset="0"/>
-                <a:cs typeface="Times New Roman" panose="02020603050405020304" pitchFamily="18" charset="0"/>
-              </a:rPr>
-              <a:t>Κώδικ</a:t>
-            </a:r>
-            <a:r>
-              <a:rPr dirty="0">
-                <a:latin typeface="Times New Roman" panose="02020603050405020304" pitchFamily="18" charset="0"/>
-                <a:cs typeface="Times New Roman" panose="02020603050405020304" pitchFamily="18" charset="0"/>
-              </a:rPr>
-              <a:t>α</a:t>
+              <a:t>266 Γραμμές Κώδικα</a:t>
+            </a:r>
+            <a:r>
+              <a:rPr dirty="0" err="1">
+                <a:latin typeface="Times New Roman" panose="02020603050405020304" pitchFamily="18" charset="0"/>
+                <a:cs typeface="Times New Roman" panose="02020603050405020304" pitchFamily="18" charset="0"/>
+              </a:rPr>
+              <a:t/>
+            </a:r>
+            <a:r>
+              <a:rPr dirty="0">
+                <a:latin typeface="Times New Roman" panose="02020603050405020304" pitchFamily="18" charset="0"/>
+                <a:cs typeface="Times New Roman" panose="02020603050405020304" pitchFamily="18" charset="0"/>
+              </a:rPr>
+              <a:t/>
+            </a:r>
+            <a:r>
+              <a:rPr dirty="0" err="1">
+                <a:latin typeface="Times New Roman" panose="02020603050405020304" pitchFamily="18" charset="0"/>
+                <a:cs typeface="Times New Roman" panose="02020603050405020304" pitchFamily="18" charset="0"/>
+              </a:rPr>
+              <a:t/>
+            </a:r>
+            <a:r>
+              <a:rPr dirty="0">
+                <a:latin typeface="Times New Roman" panose="02020603050405020304" pitchFamily="18" charset="0"/>
+                <a:cs typeface="Times New Roman" panose="02020603050405020304" pitchFamily="18" charset="0"/>
+              </a:rPr>
+              <a:t/>
+            </a:r>
+            <a:r>
+              <a:rPr dirty="0" err="1">
+                <a:latin typeface="Times New Roman" panose="02020603050405020304" pitchFamily="18" charset="0"/>
+                <a:cs typeface="Times New Roman" panose="02020603050405020304" pitchFamily="18" charset="0"/>
+              </a:rPr>
+              <a:t/>
+            </a:r>
+            <a:r>
+              <a:rPr dirty="0">
+                <a:latin typeface="Times New Roman" panose="02020603050405020304" pitchFamily="18" charset="0"/>
+                <a:cs typeface="Times New Roman" panose="02020603050405020304" pitchFamily="18" charset="0"/>
+              </a:rPr>
+              <a:t/>
             </a:r>
           </a:p>
           <a:p>
@@ -10432,49 +10101,49 @@
                 <a:latin typeface="Times New Roman" panose="02020603050405020304" pitchFamily="18" charset="0"/>
                 <a:cs typeface="Times New Roman" panose="02020603050405020304" pitchFamily="18" charset="0"/>
               </a:rPr>
-              <a:t>285 </a:t>
-            </a:r>
-            <a:r>
-              <a:rPr dirty="0" err="1">
-                <a:latin typeface="Times New Roman" panose="02020603050405020304" pitchFamily="18" charset="0"/>
-                <a:cs typeface="Times New Roman" panose="02020603050405020304" pitchFamily="18" charset="0"/>
-              </a:rPr>
-              <a:t>Γρ</a:t>
-            </a:r>
-            <a:r>
-              <a:rPr dirty="0">
-                <a:latin typeface="Times New Roman" panose="02020603050405020304" pitchFamily="18" charset="0"/>
-                <a:cs typeface="Times New Roman" panose="02020603050405020304" pitchFamily="18" charset="0"/>
-              </a:rPr>
-              <a:t>α</a:t>
-            </a:r>
-            <a:r>
-              <a:rPr dirty="0" err="1">
-                <a:latin typeface="Times New Roman" panose="02020603050405020304" pitchFamily="18" charset="0"/>
-                <a:cs typeface="Times New Roman" panose="02020603050405020304" pitchFamily="18" charset="0"/>
-              </a:rPr>
-              <a:t>μμές</a:t>
-            </a:r>
-            <a:r>
-              <a:rPr dirty="0">
-                <a:latin typeface="Times New Roman" panose="02020603050405020304" pitchFamily="18" charset="0"/>
-                <a:cs typeface="Times New Roman" panose="02020603050405020304" pitchFamily="18" charset="0"/>
-              </a:rPr>
-              <a:t> </a:t>
-            </a:r>
-            <a:r>
-              <a:rPr dirty="0" err="1">
-                <a:latin typeface="Times New Roman" panose="02020603050405020304" pitchFamily="18" charset="0"/>
-                <a:cs typeface="Times New Roman" panose="02020603050405020304" pitchFamily="18" charset="0"/>
-              </a:rPr>
-              <a:t>Κώδικ</a:t>
-            </a:r>
-            <a:r>
-              <a:rPr dirty="0">
-                <a:latin typeface="Times New Roman" panose="02020603050405020304" pitchFamily="18" charset="0"/>
-                <a:cs typeface="Times New Roman" panose="02020603050405020304" pitchFamily="18" charset="0"/>
-              </a:rPr>
-              <a:t>α</a:t>
+              <a:t>406 Γραμμές Κώδικα</a:t>
+            </a:r>
+            <a:r>
+              <a:rPr dirty="0" err="1">
+                <a:latin typeface="Times New Roman" panose="02020603050405020304" pitchFamily="18" charset="0"/>
+                <a:cs typeface="Times New Roman" panose="02020603050405020304" pitchFamily="18" charset="0"/>
+              </a:rPr>
+              <a:t/>
+            </a:r>
+            <a:r>
+              <a:rPr dirty="0">
+                <a:latin typeface="Times New Roman" panose="02020603050405020304" pitchFamily="18" charset="0"/>
+                <a:cs typeface="Times New Roman" panose="02020603050405020304" pitchFamily="18" charset="0"/>
+              </a:rPr>
+              <a:t/>
+            </a:r>
+            <a:r>
+              <a:rPr dirty="0" err="1">
+                <a:latin typeface="Times New Roman" panose="02020603050405020304" pitchFamily="18" charset="0"/>
+                <a:cs typeface="Times New Roman" panose="02020603050405020304" pitchFamily="18" charset="0"/>
+              </a:rPr>
+              <a:t/>
+            </a:r>
+            <a:r>
+              <a:rPr dirty="0">
+                <a:latin typeface="Times New Roman" panose="02020603050405020304" pitchFamily="18" charset="0"/>
+                <a:cs typeface="Times New Roman" panose="02020603050405020304" pitchFamily="18" charset="0"/>
+              </a:rPr>
+              <a:t/>
+            </a:r>
+            <a:r>
+              <a:rPr dirty="0" err="1">
+                <a:latin typeface="Times New Roman" panose="02020603050405020304" pitchFamily="18" charset="0"/>
+                <a:cs typeface="Times New Roman" panose="02020603050405020304" pitchFamily="18" charset="0"/>
+              </a:rPr>
+              <a:t/>
+            </a:r>
+            <a:r>
+              <a:rPr dirty="0">
+                <a:latin typeface="Times New Roman" panose="02020603050405020304" pitchFamily="18" charset="0"/>
+                <a:cs typeface="Times New Roman" panose="02020603050405020304" pitchFamily="18" charset="0"/>
+              </a:rPr>
+              <a:t/>
             </a:r>
           </a:p>
           <a:p>
@@ -10657,49 +10326,49 @@
                 <a:latin typeface="Times New Roman" panose="02020603050405020304" pitchFamily="18" charset="0"/>
                 <a:cs typeface="Times New Roman" panose="02020603050405020304" pitchFamily="18" charset="0"/>
               </a:rPr>
-              <a:t>35 </a:t>
-            </a:r>
-            <a:r>
-              <a:rPr dirty="0" err="1">
-                <a:latin typeface="Times New Roman" panose="02020603050405020304" pitchFamily="18" charset="0"/>
-                <a:cs typeface="Times New Roman" panose="02020603050405020304" pitchFamily="18" charset="0"/>
-              </a:rPr>
-              <a:t>Γρ</a:t>
-            </a:r>
-            <a:r>
-              <a:rPr dirty="0">
-                <a:latin typeface="Times New Roman" panose="02020603050405020304" pitchFamily="18" charset="0"/>
-                <a:cs typeface="Times New Roman" panose="02020603050405020304" pitchFamily="18" charset="0"/>
-              </a:rPr>
-              <a:t>α</a:t>
-            </a:r>
-            <a:r>
-              <a:rPr dirty="0" err="1">
-                <a:latin typeface="Times New Roman" panose="02020603050405020304" pitchFamily="18" charset="0"/>
-                <a:cs typeface="Times New Roman" panose="02020603050405020304" pitchFamily="18" charset="0"/>
-              </a:rPr>
-              <a:t>μμές</a:t>
-            </a:r>
-            <a:r>
-              <a:rPr dirty="0">
-                <a:latin typeface="Times New Roman" panose="02020603050405020304" pitchFamily="18" charset="0"/>
-                <a:cs typeface="Times New Roman" panose="02020603050405020304" pitchFamily="18" charset="0"/>
-              </a:rPr>
-              <a:t> </a:t>
-            </a:r>
-            <a:r>
-              <a:rPr dirty="0" err="1">
-                <a:latin typeface="Times New Roman" panose="02020603050405020304" pitchFamily="18" charset="0"/>
-                <a:cs typeface="Times New Roman" panose="02020603050405020304" pitchFamily="18" charset="0"/>
-              </a:rPr>
-              <a:t>Κώδικ</a:t>
-            </a:r>
-            <a:r>
-              <a:rPr dirty="0">
-                <a:latin typeface="Times New Roman" panose="02020603050405020304" pitchFamily="18" charset="0"/>
-                <a:cs typeface="Times New Roman" panose="02020603050405020304" pitchFamily="18" charset="0"/>
-              </a:rPr>
-              <a:t>α</a:t>
+              <a:t>25 Γραμμές Κώδικα</a:t>
+            </a:r>
+            <a:r>
+              <a:rPr dirty="0" err="1">
+                <a:latin typeface="Times New Roman" panose="02020603050405020304" pitchFamily="18" charset="0"/>
+                <a:cs typeface="Times New Roman" panose="02020603050405020304" pitchFamily="18" charset="0"/>
+              </a:rPr>
+              <a:t/>
+            </a:r>
+            <a:r>
+              <a:rPr dirty="0">
+                <a:latin typeface="Times New Roman" panose="02020603050405020304" pitchFamily="18" charset="0"/>
+                <a:cs typeface="Times New Roman" panose="02020603050405020304" pitchFamily="18" charset="0"/>
+              </a:rPr>
+              <a:t/>
+            </a:r>
+            <a:r>
+              <a:rPr dirty="0" err="1">
+                <a:latin typeface="Times New Roman" panose="02020603050405020304" pitchFamily="18" charset="0"/>
+                <a:cs typeface="Times New Roman" panose="02020603050405020304" pitchFamily="18" charset="0"/>
+              </a:rPr>
+              <a:t/>
+            </a:r>
+            <a:r>
+              <a:rPr dirty="0">
+                <a:latin typeface="Times New Roman" panose="02020603050405020304" pitchFamily="18" charset="0"/>
+                <a:cs typeface="Times New Roman" panose="02020603050405020304" pitchFamily="18" charset="0"/>
+              </a:rPr>
+              <a:t/>
+            </a:r>
+            <a:r>
+              <a:rPr dirty="0" err="1">
+                <a:latin typeface="Times New Roman" panose="02020603050405020304" pitchFamily="18" charset="0"/>
+                <a:cs typeface="Times New Roman" panose="02020603050405020304" pitchFamily="18" charset="0"/>
+              </a:rPr>
+              <a:t/>
+            </a:r>
+            <a:r>
+              <a:rPr dirty="0">
+                <a:latin typeface="Times New Roman" panose="02020603050405020304" pitchFamily="18" charset="0"/>
+                <a:cs typeface="Times New Roman" panose="02020603050405020304" pitchFamily="18" charset="0"/>
+              </a:rPr>
+              <a:t/>
             </a:r>
           </a:p>
           <a:p>
@@ -12767,7 +12436,7 @@
         <p:spPr>
           <a:xfrm>
             <a:off x="731520" y="1691640"/>
-            <a:ext cx="5166360" cy="4663440"/>
+            <a:ext cx="5852160" cy="2560320"/>
           </a:xfrm>
           <a:prstGeom prst="roundRect">
             <a:avLst/>
@@ -12875,7 +12544,7 @@
               <a:spcAft>
                 <a:spcPts val="900"/>
               </a:spcAft>
-              <a:defRPr sz="1300">
+              <a:defRPr sz="1200">
                 <a:solidFill>
                   <a:srgbClr val="DCE2EB"/>
                 </a:solidFill>
@@ -13020,7 +12689,7 @@
               <a:spcAft>
                 <a:spcPts val="900"/>
               </a:spcAft>
-              <a:defRPr sz="1300">
+              <a:defRPr sz="1200">
                 <a:solidFill>
                   <a:srgbClr val="DCE2EB"/>
                 </a:solidFill>
@@ -13221,7 +12890,7 @@
               <a:spcAft>
                 <a:spcPts val="900"/>
               </a:spcAft>
-              <a:defRPr sz="1300">
+              <a:defRPr sz="1200">
                 <a:solidFill>
                   <a:srgbClr val="DCE2EB"/>
                 </a:solidFill>
@@ -13422,7 +13091,7 @@
               <a:spcAft>
                 <a:spcPts val="900"/>
               </a:spcAft>
-              <a:defRPr sz="1300">
+              <a:defRPr sz="1200">
                 <a:solidFill>
                   <a:srgbClr val="DCE2EB"/>
                 </a:solidFill>
@@ -13609,7 +13278,7 @@
               <a:spcAft>
                 <a:spcPts val="900"/>
               </a:spcAft>
-              <a:defRPr sz="1300">
+              <a:defRPr sz="1200">
                 <a:solidFill>
                   <a:srgbClr val="DCE2EB"/>
                 </a:solidFill>
@@ -13787,8 +13456,8 @@
         </p:nvSpPr>
         <p:spPr>
           <a:xfrm>
-            <a:off x="6263640" y="1691640"/>
-            <a:ext cx="5166360" cy="4663440"/>
+            <a:off x="731520" y="4389120"/>
+            <a:ext cx="5852160" cy="1965960"/>
           </a:xfrm>
           <a:prstGeom prst="roundRect">
             <a:avLst/>
@@ -13913,7 +13582,7 @@
               <a:spcAft>
                 <a:spcPts val="900"/>
               </a:spcAft>
-              <a:defRPr sz="1300">
+              <a:defRPr sz="1200">
                 <a:solidFill>
                   <a:srgbClr val="DCE2EB"/>
                 </a:solidFill>
@@ -14142,7 +13811,7 @@
               <a:spcAft>
                 <a:spcPts val="900"/>
               </a:spcAft>
-              <a:defRPr sz="1300">
+              <a:defRPr sz="1200">
                 <a:solidFill>
                   <a:srgbClr val="DCE2EB"/>
                 </a:solidFill>
@@ -14315,7 +13984,7 @@
               <a:spcAft>
                 <a:spcPts val="900"/>
               </a:spcAft>
-              <a:defRPr sz="1300">
+              <a:defRPr sz="1200">
                 <a:solidFill>
                   <a:srgbClr val="DCE2EB"/>
                 </a:solidFill>
@@ -14481,6 +14150,65 @@
                 <a:cs typeface="Times New Roman" panose="02020603050405020304" pitchFamily="18" charset="0"/>
               </a:rPr>
               <a:t>.</a:t>
+            </a:r>
+          </a:p>
+        </p:txBody>
+      </p:sp>
+      <p:pic>
+        <p:nvPicPr>
+          <p:cNvPr id="8" name="Picture 7" descr="image1.png"/>
+          <p:cNvPicPr>
+            <a:picLocks noChangeAspect="1"/>
+          </p:cNvPicPr>
+          <p:nvPr/>
+        </p:nvPicPr>
+        <p:blipFill>
+          <a:blip r:embed="rId3"/>
+          <a:stretch>
+            <a:fillRect/>
+          </a:stretch>
+        </p:blipFill>
+        <p:spPr>
+          <a:xfrm>
+            <a:off x="6858000" y="1691640"/>
+            <a:ext cx="4572000" cy="4023360"/>
+          </a:xfrm>
+          <a:prstGeom prst="rect">
+            <a:avLst/>
+          </a:prstGeom>
+        </p:spPr>
+      </p:pic>
+      <p:sp>
+        <p:nvSpPr>
+          <p:cNvPr id="9" name="TextBox 8"/>
+          <p:cNvSpPr txBox="1"/>
+          <p:nvPr/>
+        </p:nvSpPr>
+        <p:spPr>
+          <a:xfrm>
+            <a:off x="6858000" y="5779008"/>
+            <a:ext cx="4572000" cy="502920"/>
+          </a:xfrm>
+          <a:prstGeom prst="rect">
+            <a:avLst/>
+          </a:prstGeom>
+          <a:noFill/>
+        </p:spPr>
+        <p:txBody>
+          <a:bodyPr wrap="square">
+            <a:spAutoFit/>
+          </a:bodyPr>
+          <a:lstStyle/>
+          <a:p>
+            <a:pPr algn="ctr">
+              <a:defRPr sz="1100">
+                <a:solidFill>
+                  <a:srgbClr val="D4AF37"/>
+                </a:solidFill>
+              </a:defRPr>
+            </a:pPr>
+            <a:r>
+              <a:t>📷 In-Game: Ο ατμοσφαιρικός 3D χώρος της βιβλιοθήκης</a:t>
             </a:r>
           </a:p>
         </p:txBody>
@@ -21184,7 +20912,7 @@
                 <a:latin typeface="Times New Roman" panose="02020603050405020304" pitchFamily="18" charset="0"/>
                 <a:cs typeface="Times New Roman" panose="02020603050405020304" pitchFamily="18" charset="0"/>
               </a:rPr>
-              <a:t> 2.5 </a:t>
+              <a:t> 3.0 </a:t>
             </a:r>
             <a:r>
               <a:rPr dirty="0" err="1">
@@ -22317,7 +22045,7 @@
                 <a:latin typeface="Times New Roman" panose="02020603050405020304" pitchFamily="18" charset="0"/>
                 <a:cs typeface="Times New Roman" panose="02020603050405020304" pitchFamily="18" charset="0"/>
               </a:rPr>
-              <a:t> (🫱) </a:t>
+              <a:t> (✋) </a:t>
             </a:r>
             <a:r>
               <a:rPr dirty="0" err="1">
@@ -23039,8 +22767,8 @@
         </p:nvSpPr>
         <p:spPr>
           <a:xfrm>
-            <a:off x="661852" y="1691640"/>
-            <a:ext cx="5166360" cy="4663440"/>
+            <a:off x="731520" y="1691640"/>
+            <a:ext cx="5852160" cy="2240280"/>
           </a:xfrm>
           <a:prstGeom prst="roundRect">
             <a:avLst/>
@@ -23148,7 +22876,7 @@
               <a:spcAft>
                 <a:spcPts val="900"/>
               </a:spcAft>
-              <a:defRPr sz="1300">
+              <a:defRPr sz="1200">
                 <a:solidFill>
                   <a:srgbClr val="DCE2EB"/>
                 </a:solidFill>
@@ -23349,7 +23077,7 @@
               <a:spcAft>
                 <a:spcPts val="900"/>
               </a:spcAft>
-              <a:defRPr sz="1300">
+              <a:defRPr sz="1200">
                 <a:solidFill>
                   <a:srgbClr val="DCE2EB"/>
                 </a:solidFill>
@@ -23536,7 +23264,7 @@
               <a:spcAft>
                 <a:spcPts val="900"/>
               </a:spcAft>
-              <a:defRPr sz="1300">
+              <a:defRPr sz="1200">
                 <a:solidFill>
                   <a:srgbClr val="DCE2EB"/>
                 </a:solidFill>
@@ -23667,7 +23395,7 @@
               <a:spcAft>
                 <a:spcPts val="900"/>
               </a:spcAft>
-              <a:defRPr sz="1300">
+              <a:defRPr sz="1200">
                 <a:solidFill>
                   <a:srgbClr val="DCE2EB"/>
                 </a:solidFill>
@@ -23901,8 +23629,8 @@
         </p:nvSpPr>
         <p:spPr>
           <a:xfrm>
-            <a:off x="6263640" y="1691640"/>
-            <a:ext cx="5166360" cy="4663440"/>
+            <a:off x="731520" y="4069080"/>
+            <a:ext cx="5852160" cy="2286000"/>
           </a:xfrm>
           <a:prstGeom prst="roundRect">
             <a:avLst/>
@@ -24010,7 +23738,7 @@
               <a:spcAft>
                 <a:spcPts val="900"/>
               </a:spcAft>
-              <a:defRPr sz="1300">
+              <a:defRPr sz="1200">
                 <a:solidFill>
                   <a:srgbClr val="DCE2EB"/>
                 </a:solidFill>
@@ -24169,7 +23897,7 @@
               <a:spcAft>
                 <a:spcPts val="900"/>
               </a:spcAft>
-              <a:defRPr sz="1300">
+              <a:defRPr sz="1200">
                 <a:solidFill>
                   <a:srgbClr val="DCE2EB"/>
                 </a:solidFill>
@@ -24328,7 +24056,7 @@
               <a:spcAft>
                 <a:spcPts val="900"/>
               </a:spcAft>
-              <a:defRPr sz="1300">
+              <a:defRPr sz="1200">
                 <a:solidFill>
                   <a:srgbClr val="DCE2EB"/>
                 </a:solidFill>
@@ -24571,7 +24299,7 @@
               <a:spcAft>
                 <a:spcPts val="900"/>
               </a:spcAft>
-              <a:defRPr sz="1300">
+              <a:defRPr sz="1200">
                 <a:solidFill>
                   <a:srgbClr val="DCE2EB"/>
                 </a:solidFill>
@@ -24737,6 +24465,65 @@
                 <a:cs typeface="Times New Roman" panose="02020603050405020304" pitchFamily="18" charset="0"/>
               </a:rPr>
               <a:t>.</a:t>
+            </a:r>
+          </a:p>
+        </p:txBody>
+      </p:sp>
+      <p:pic>
+        <p:nvPicPr>
+          <p:cNvPr id="8" name="Picture 7" descr="image2.png"/>
+          <p:cNvPicPr>
+            <a:picLocks noChangeAspect="1"/>
+          </p:cNvPicPr>
+          <p:nvPr/>
+        </p:nvPicPr>
+        <p:blipFill>
+          <a:blip r:embed="rId3"/>
+          <a:stretch>
+            <a:fillRect/>
+          </a:stretch>
+        </p:blipFill>
+        <p:spPr>
+          <a:xfrm>
+            <a:off x="6858000" y="1691640"/>
+            <a:ext cx="4572000" cy="4023360"/>
+          </a:xfrm>
+          <a:prstGeom prst="rect">
+            <a:avLst/>
+          </a:prstGeom>
+        </p:spPr>
+      </p:pic>
+      <p:sp>
+        <p:nvSpPr>
+          <p:cNvPr id="9" name="TextBox 8"/>
+          <p:cNvSpPr txBox="1"/>
+          <p:nvPr/>
+        </p:nvSpPr>
+        <p:spPr>
+          <a:xfrm>
+            <a:off x="6858000" y="5779008"/>
+            <a:ext cx="4572000" cy="502920"/>
+          </a:xfrm>
+          <a:prstGeom prst="rect">
+            <a:avLst/>
+          </a:prstGeom>
+          <a:noFill/>
+        </p:spPr>
+        <p:txBody>
+          <a:bodyPr wrap="square">
+            <a:spAutoFit/>
+          </a:bodyPr>
+          <a:lstStyle/>
+          <a:p>
+            <a:pPr algn="ctr">
+              <a:defRPr sz="1100">
+                <a:solidFill>
+                  <a:srgbClr val="D4AF37"/>
+                </a:solidFill>
+              </a:defRPr>
+            </a:pPr>
+            <a:r>
+              <a:t>📷 In-Game: Οι 3 κρύσταλλοι &amp; τα μυστικά βιβλία</a:t>
             </a:r>
           </a:p>
         </p:txBody>
@@ -25088,7 +24875,7 @@
         <p:spPr>
           <a:xfrm>
             <a:off x="731520" y="1691640"/>
-            <a:ext cx="5166360" cy="4663440"/>
+            <a:ext cx="5852160" cy="2240280"/>
           </a:xfrm>
           <a:prstGeom prst="roundRect">
             <a:avLst/>
@@ -25238,7 +25025,7 @@
               <a:spcAft>
                 <a:spcPts val="900"/>
               </a:spcAft>
-              <a:defRPr sz="1300">
+              <a:defRPr sz="1200">
                 <a:solidFill>
                   <a:srgbClr val="DCE2EB"/>
                 </a:solidFill>
@@ -25481,7 +25268,7 @@
               <a:spcAft>
                 <a:spcPts val="900"/>
               </a:spcAft>
-              <a:defRPr sz="1300">
+              <a:defRPr sz="1200">
                 <a:solidFill>
                   <a:srgbClr val="DCE2EB"/>
                 </a:solidFill>
@@ -25654,7 +25441,7 @@
               <a:spcAft>
                 <a:spcPts val="900"/>
               </a:spcAft>
-              <a:defRPr sz="1300">
+              <a:defRPr sz="1200">
                 <a:solidFill>
                   <a:srgbClr val="DCE2EB"/>
                 </a:solidFill>
@@ -25869,7 +25656,7 @@
               <a:spcAft>
                 <a:spcPts val="900"/>
               </a:spcAft>
-              <a:defRPr sz="1300">
+              <a:defRPr sz="1200">
                 <a:solidFill>
                   <a:srgbClr val="DCE2EB"/>
                 </a:solidFill>
@@ -26061,8 +25848,8 @@
         </p:nvSpPr>
         <p:spPr>
           <a:xfrm>
-            <a:off x="6263640" y="1691640"/>
-            <a:ext cx="5166360" cy="4663440"/>
+            <a:off x="731520" y="4069080"/>
+            <a:ext cx="5852160" cy="2286000"/>
           </a:xfrm>
           <a:prstGeom prst="roundRect">
             <a:avLst/>
@@ -26145,7 +25932,7 @@
               <a:spcAft>
                 <a:spcPts val="900"/>
               </a:spcAft>
-              <a:defRPr sz="1300">
+              <a:defRPr sz="1200">
                 <a:solidFill>
                   <a:srgbClr val="DCE2EB"/>
                 </a:solidFill>
@@ -26248,7 +26035,7 @@
               <a:spcAft>
                 <a:spcPts val="900"/>
               </a:spcAft>
-              <a:defRPr sz="1300">
+              <a:defRPr sz="1200">
                 <a:solidFill>
                   <a:srgbClr val="DCE2EB"/>
                 </a:solidFill>
@@ -26491,7 +26278,7 @@
               <a:spcAft>
                 <a:spcPts val="900"/>
               </a:spcAft>
-              <a:defRPr sz="1300">
+              <a:defRPr sz="1200">
                 <a:solidFill>
                   <a:srgbClr val="DCE2EB"/>
                 </a:solidFill>
@@ -26776,7 +26563,7 @@
               <a:spcAft>
                 <a:spcPts val="900"/>
               </a:spcAft>
-              <a:defRPr sz="1300">
+              <a:defRPr sz="1200">
                 <a:solidFill>
                   <a:srgbClr val="DCE2EB"/>
                 </a:solidFill>
@@ -26998,6 +26785,65 @@
                 <a:cs typeface="Times New Roman" panose="02020603050405020304" pitchFamily="18" charset="0"/>
               </a:rPr>
               <a:t>.</a:t>
+            </a:r>
+          </a:p>
+        </p:txBody>
+      </p:sp>
+      <p:pic>
+        <p:nvPicPr>
+          <p:cNvPr id="8" name="Picture 7" descr="image3.png"/>
+          <p:cNvPicPr>
+            <a:picLocks noChangeAspect="1"/>
+          </p:cNvPicPr>
+          <p:nvPr/>
+        </p:nvPicPr>
+        <p:blipFill>
+          <a:blip r:embed="rId3"/>
+          <a:stretch>
+            <a:fillRect/>
+          </a:stretch>
+        </p:blipFill>
+        <p:spPr>
+          <a:xfrm>
+            <a:off x="6858000" y="1691640"/>
+            <a:ext cx="4572000" cy="4023360"/>
+          </a:xfrm>
+          <a:prstGeom prst="rect">
+            <a:avLst/>
+          </a:prstGeom>
+        </p:spPr>
+      </p:pic>
+      <p:sp>
+        <p:nvSpPr>
+          <p:cNvPr id="9" name="TextBox 8"/>
+          <p:cNvSpPr txBox="1"/>
+          <p:nvPr/>
+        </p:nvSpPr>
+        <p:spPr>
+          <a:xfrm>
+            <a:off x="6858000" y="5779008"/>
+            <a:ext cx="4572000" cy="502920"/>
+          </a:xfrm>
+          <a:prstGeom prst="rect">
+            <a:avLst/>
+          </a:prstGeom>
+          <a:noFill/>
+        </p:spPr>
+        <p:txBody>
+          <a:bodyPr wrap="square">
+            <a:spAutoFit/>
+          </a:bodyPr>
+          <a:lstStyle/>
+          <a:p>
+            <a:pPr algn="ctr">
+              <a:defRPr sz="1100">
+                <a:solidFill>
+                  <a:srgbClr val="D4AF37"/>
+                </a:solidFill>
+              </a:defRPr>
+            </a:pPr>
+            <a:r>
+              <a:t>📷 In-Game: Το γεωμετρικό παζλ τριγώνου στο τραπέζι</a:t>
             </a:r>
           </a:p>
         </p:txBody>
